--- a/3.2 Hoofdstuk 2 - Marktvormen en hun marktevenwicht/3.2.6 Paragraaf 6 - Marktvormen en hun economische doelmatigheid/2. Leren/3.2.6 Marktvormen en hun economische doelmatigheid – presentatie.pptx
+++ b/3.2 Hoofdstuk 2 - Marktvormen en hun marktevenwicht/3.2.6 Paragraaf 6 - Marktvormen en hun economische doelmatigheid/2. Leren/3.2.6 Marktvormen en hun economische doelmatigheid – presentatie.pptx
@@ -2190,6 +2190,10 @@
           </a:solidFill>
           <a:ln/>
         </p:spPr>
+        <p:txBody>
+          <a:bodyPr/>
+          <a:p/>
+        </p:txBody>
       </p:sp>
       <p:sp>
         <p:nvSpPr>
@@ -2258,6 +2262,10 @@
             </a:outerShdw>
           </a:effectLst>
         </p:spPr>
+        <p:txBody>
+          <a:bodyPr/>
+          <a:p/>
+        </p:txBody>
       </p:sp>
       <p:sp>
         <p:nvSpPr>
@@ -2317,6 +2325,10 @@
           </a:solidFill>
           <a:ln/>
         </p:spPr>
+        <p:txBody>
+          <a:bodyPr/>
+          <a:p/>
+        </p:txBody>
       </p:sp>
       <p:sp>
         <p:nvSpPr>
@@ -2385,6 +2397,10 @@
             </a:outerShdw>
           </a:effectLst>
         </p:spPr>
+        <p:txBody>
+          <a:bodyPr/>
+          <a:p/>
+        </p:txBody>
       </p:sp>
       <p:sp>
         <p:nvSpPr>
@@ -2444,6 +2460,10 @@
           </a:solidFill>
           <a:ln/>
         </p:spPr>
+        <p:txBody>
+          <a:bodyPr/>
+          <a:p/>
+        </p:txBody>
       </p:sp>
       <p:sp>
         <p:nvSpPr>
@@ -2512,6 +2532,10 @@
             </a:outerShdw>
           </a:effectLst>
         </p:spPr>
+        <p:txBody>
+          <a:bodyPr/>
+          <a:p/>
+        </p:txBody>
       </p:sp>
       <p:sp>
         <p:nvSpPr>
@@ -2580,6 +2604,10 @@
             </a:outerShdw>
           </a:effectLst>
         </p:spPr>
+        <p:txBody>
+          <a:bodyPr/>
+          <a:p/>
+        </p:txBody>
       </p:sp>
       <p:sp>
         <p:nvSpPr>
@@ -2600,6 +2628,10 @@
           </a:solidFill>
           <a:ln/>
         </p:spPr>
+        <p:txBody>
+          <a:bodyPr/>
+          <a:p/>
+        </p:txBody>
       </p:sp>
       <p:sp>
         <p:nvSpPr>
@@ -2747,6 +2779,10 @@
             </a:outerShdw>
           </a:effectLst>
         </p:spPr>
+        <p:txBody>
+          <a:bodyPr/>
+          <a:p/>
+        </p:txBody>
       </p:sp>
       <p:sp>
         <p:nvSpPr>
@@ -2767,6 +2803,10 @@
           </a:solidFill>
           <a:ln/>
         </p:spPr>
+        <p:txBody>
+          <a:bodyPr/>
+          <a:p/>
+        </p:txBody>
       </p:sp>
       <p:sp>
         <p:nvSpPr>
@@ -2874,6 +2914,10 @@
             </a:outerShdw>
           </a:effectLst>
         </p:spPr>
+        <p:txBody>
+          <a:bodyPr/>
+          <a:p/>
+        </p:txBody>
       </p:sp>
       <p:sp>
         <p:nvSpPr>
@@ -2894,6 +2938,10 @@
           </a:solidFill>
           <a:ln/>
         </p:spPr>
+        <p:txBody>
+          <a:bodyPr/>
+          <a:p/>
+        </p:txBody>
       </p:sp>
       <p:sp>
         <p:nvSpPr>
@@ -3001,6 +3049,10 @@
             </a:outerShdw>
           </a:effectLst>
         </p:spPr>
+        <p:txBody>
+          <a:bodyPr/>
+          <a:p/>
+        </p:txBody>
       </p:sp>
       <p:sp>
         <p:nvSpPr>
@@ -3021,6 +3073,10 @@
           </a:solidFill>
           <a:ln/>
         </p:spPr>
+        <p:txBody>
+          <a:bodyPr/>
+          <a:p/>
+        </p:txBody>
       </p:sp>
       <p:sp>
         <p:nvSpPr>
@@ -3245,6 +3301,8 @@
               </a:rPr>
               <a:t>Totaal surplus (TS) = CS + PS → maatstaf voor efficiëntie</a:t>
             </a:r>
+          </a:p>
+          <a:p>
             <a:pPr algn="l" marL="342900" indent="-342900">
               <a:lnSpc>
                 <a:spcPct val="160000"/>
@@ -3266,6 +3324,8 @@
               </a:rPr>
               <a:t>Bij volkomen concurrentie is TS maximaal (P = MK)</a:t>
             </a:r>
+          </a:p>
+          <a:p>
             <a:pPr algn="l" marL="342900" indent="-342900">
               <a:lnSpc>
                 <a:spcPct val="160000"/>
@@ -3287,6 +3347,8 @@
               </a:rPr>
               <a:t>Monopolie: lagere Q, hogere P → Harbergerdriehoek = welvaartsverlies</a:t>
             </a:r>
+          </a:p>
+          <a:p>
             <a:pPr algn="l" marL="342900" indent="-342900">
               <a:lnSpc>
                 <a:spcPct val="160000"/>
@@ -3308,6 +3370,8 @@
               </a:rPr>
               <a:t>Hoge toetredingsdrempels houden inefficiëntie in stand</a:t>
             </a:r>
+          </a:p>
+          <a:p>
             <a:pPr algn="l" marL="342900" indent="-342900">
               <a:lnSpc>
                 <a:spcPct val="160000"/>
@@ -3329,7 +3393,6 @@
               </a:rPr>
               <a:t>Pareto-efficiënt: niemand erop vooruit zonder dat iemand erop achteruitgaat</a:t>
             </a:r>
-            <a:endParaRPr lang="en-US" sz="1500" dirty="0"/>
           </a:p>
         </p:txBody>
       </p:sp>
@@ -3425,6 +3488,10 @@
             </a:outerShdw>
           </a:effectLst>
         </p:spPr>
+        <p:txBody>
+          <a:bodyPr/>
+          <a:p/>
+        </p:txBody>
       </p:sp>
       <p:sp>
         <p:nvSpPr>
@@ -3445,6 +3512,10 @@
           </a:solidFill>
           <a:ln/>
         </p:spPr>
+        <p:txBody>
+          <a:bodyPr/>
+          <a:p/>
+        </p:txBody>
       </p:sp>
       <p:sp>
         <p:nvSpPr>
@@ -3594,6 +3665,10 @@
             </a:outerShdw>
           </a:effectLst>
         </p:spPr>
+        <p:txBody>
+          <a:bodyPr/>
+          <a:p/>
+        </p:txBody>
       </p:sp>
       <p:sp>
         <p:nvSpPr>
@@ -3614,6 +3689,10 @@
           </a:solidFill>
           <a:ln/>
         </p:spPr>
+        <p:txBody>
+          <a:bodyPr/>
+          <a:p/>
+        </p:txBody>
       </p:sp>
       <p:sp>
         <p:nvSpPr>
@@ -3763,6 +3842,10 @@
             </a:outerShdw>
           </a:effectLst>
         </p:spPr>
+        <p:txBody>
+          <a:bodyPr/>
+          <a:p/>
+        </p:txBody>
       </p:sp>
       <p:sp>
         <p:nvSpPr>
@@ -3783,6 +3866,10 @@
           </a:solidFill>
           <a:ln/>
         </p:spPr>
+        <p:txBody>
+          <a:bodyPr/>
+          <a:p/>
+        </p:txBody>
       </p:sp>
       <p:sp>
         <p:nvSpPr>
@@ -4053,6 +4140,10 @@
             <a:prstDash val="solid"/>
           </a:ln>
         </p:spPr>
+        <p:txBody>
+          <a:bodyPr/>
+          <a:p/>
+        </p:txBody>
       </p:sp>
       <p:sp>
         <p:nvSpPr>
@@ -4172,6 +4263,10 @@
             </a:outerShdw>
           </a:effectLst>
         </p:spPr>
+        <p:txBody>
+          <a:bodyPr/>
+          <a:p/>
+        </p:txBody>
       </p:sp>
       <p:sp>
         <p:nvSpPr>
@@ -4192,6 +4287,10 @@
           </a:solidFill>
           <a:ln/>
         </p:spPr>
+        <p:txBody>
+          <a:bodyPr/>
+          <a:p/>
+        </p:txBody>
       </p:sp>
       <p:sp>
         <p:nvSpPr>
@@ -4420,6 +4519,10 @@
             </a:outerShdw>
           </a:effectLst>
         </p:spPr>
+        <p:txBody>
+          <a:bodyPr/>
+          <a:p/>
+        </p:txBody>
       </p:sp>
       <p:sp>
         <p:nvSpPr>
@@ -4440,6 +4543,10 @@
           </a:solidFill>
           <a:ln/>
         </p:spPr>
+        <p:txBody>
+          <a:bodyPr/>
+          <a:p/>
+        </p:txBody>
       </p:sp>
       <p:sp>
         <p:nvSpPr>
@@ -4627,6 +4734,10 @@
             </a:outerShdw>
           </a:effectLst>
         </p:spPr>
+        <p:txBody>
+          <a:bodyPr/>
+          <a:p/>
+        </p:txBody>
       </p:sp>
       <p:sp>
         <p:nvSpPr>
@@ -4647,6 +4758,10 @@
           </a:solidFill>
           <a:ln/>
         </p:spPr>
+        <p:txBody>
+          <a:bodyPr/>
+          <a:p/>
+        </p:txBody>
       </p:sp>
       <p:sp>
         <p:nvSpPr>
@@ -4896,6 +5011,10 @@
             <a:prstDash val="solid"/>
           </a:ln>
         </p:spPr>
+        <p:txBody>
+          <a:bodyPr/>
+          <a:p/>
+        </p:txBody>
       </p:sp>
       <p:sp>
         <p:nvSpPr>
@@ -4998,6 +5117,10 @@
             </a:outerShdw>
           </a:effectLst>
         </p:spPr>
+        <p:txBody>
+          <a:bodyPr/>
+          <a:p/>
+        </p:txBody>
       </p:sp>
       <p:sp>
         <p:nvSpPr>
@@ -5018,6 +5141,10 @@
           </a:solidFill>
           <a:ln/>
         </p:spPr>
+        <p:txBody>
+          <a:bodyPr/>
+          <a:p/>
+        </p:txBody>
       </p:sp>
       <p:sp>
         <p:nvSpPr>
@@ -5228,6 +5355,10 @@
             </a:outerShdw>
           </a:effectLst>
         </p:spPr>
+        <p:txBody>
+          <a:bodyPr/>
+          <a:p/>
+        </p:txBody>
       </p:sp>
       <p:sp>
         <p:nvSpPr>
@@ -5335,6 +5466,10 @@
             </a:outerShdw>
           </a:effectLst>
         </p:spPr>
+        <p:txBody>
+          <a:bodyPr/>
+          <a:p/>
+        </p:txBody>
       </p:sp>
       <p:sp>
         <p:nvSpPr>
@@ -5442,6 +5577,10 @@
             </a:outerShdw>
           </a:effectLst>
         </p:spPr>
+        <p:txBody>
+          <a:bodyPr/>
+          <a:p/>
+        </p:txBody>
       </p:sp>
       <p:sp>
         <p:nvSpPr>
@@ -5549,6 +5688,10 @@
             </a:outerShdw>
           </a:effectLst>
         </p:spPr>
+        <p:txBody>
+          <a:bodyPr/>
+          <a:p/>
+        </p:txBody>
       </p:sp>
       <p:sp>
         <p:nvSpPr>
@@ -5617,6 +5760,10 @@
             </a:outerShdw>
           </a:effectLst>
         </p:spPr>
+        <p:txBody>
+          <a:bodyPr/>
+          <a:p/>
+        </p:txBody>
       </p:sp>
       <p:sp>
         <p:nvSpPr>
@@ -5637,6 +5784,10 @@
           </a:solidFill>
           <a:ln/>
         </p:spPr>
+        <p:txBody>
+          <a:bodyPr/>
+          <a:p/>
+        </p:txBody>
       </p:sp>
       <p:sp>
         <p:nvSpPr>
@@ -5940,6 +6091,10 @@
             </a:outerShdw>
           </a:effectLst>
         </p:spPr>
+        <p:txBody>
+          <a:bodyPr/>
+          <a:p/>
+        </p:txBody>
       </p:sp>
       <p:sp>
         <p:nvSpPr>
@@ -5960,6 +6115,10 @@
           </a:solidFill>
           <a:ln/>
         </p:spPr>
+        <p:txBody>
+          <a:bodyPr/>
+          <a:p/>
+        </p:txBody>
       </p:sp>
       <p:sp>
         <p:nvSpPr>
@@ -6128,6 +6287,10 @@
             </a:outerShdw>
           </a:effectLst>
         </p:spPr>
+        <p:txBody>
+          <a:bodyPr/>
+          <a:p/>
+        </p:txBody>
       </p:sp>
       <p:sp>
         <p:nvSpPr>
@@ -6148,6 +6311,10 @@
           </a:solidFill>
           <a:ln/>
         </p:spPr>
+        <p:txBody>
+          <a:bodyPr/>
+          <a:p/>
+        </p:txBody>
       </p:sp>
       <p:sp>
         <p:nvSpPr>
@@ -6419,6 +6586,10 @@
             </a:outerShdw>
           </a:effectLst>
         </p:spPr>
+        <p:txBody>
+          <a:bodyPr/>
+          <a:p/>
+        </p:txBody>
       </p:sp>
       <p:sp>
         <p:nvSpPr>
@@ -6526,6 +6697,10 @@
             </a:outerShdw>
           </a:effectLst>
         </p:spPr>
+        <p:txBody>
+          <a:bodyPr/>
+          <a:p/>
+        </p:txBody>
       </p:sp>
       <p:sp>
         <p:nvSpPr>
@@ -6633,6 +6808,10 @@
             </a:outerShdw>
           </a:effectLst>
         </p:spPr>
+        <p:txBody>
+          <a:bodyPr/>
+          <a:p/>
+        </p:txBody>
       </p:sp>
       <p:sp>
         <p:nvSpPr>
@@ -6740,6 +6919,10 @@
             </a:outerShdw>
           </a:effectLst>
         </p:spPr>
+        <p:txBody>
+          <a:bodyPr/>
+          <a:p/>
+        </p:txBody>
       </p:sp>
       <p:sp>
         <p:nvSpPr>
@@ -6847,6 +7030,10 @@
             </a:outerShdw>
           </a:effectLst>
         </p:spPr>
+        <p:txBody>
+          <a:bodyPr/>
+          <a:p/>
+        </p:txBody>
       </p:sp>
       <p:sp>
         <p:nvSpPr>
@@ -7032,6 +7219,10 @@
             </a:outerShdw>
           </a:effectLst>
         </p:spPr>
+        <p:txBody>
+          <a:bodyPr/>
+          <a:p/>
+        </p:txBody>
       </p:sp>
       <p:sp>
         <p:nvSpPr>
@@ -7052,6 +7243,10 @@
           </a:solidFill>
           <a:ln/>
         </p:spPr>
+        <p:txBody>
+          <a:bodyPr/>
+          <a:p/>
+        </p:txBody>
       </p:sp>
       <p:sp>
         <p:nvSpPr>
@@ -7196,6 +7391,10 @@
             </a:outerShdw>
           </a:effectLst>
         </p:spPr>
+        <p:txBody>
+          <a:bodyPr/>
+          <a:p/>
+        </p:txBody>
       </p:sp>
       <p:sp>
         <p:nvSpPr>
@@ -7216,6 +7415,10 @@
           </a:solidFill>
           <a:ln/>
         </p:spPr>
+        <p:txBody>
+          <a:bodyPr/>
+          <a:p/>
+        </p:txBody>
       </p:sp>
       <p:sp>
         <p:nvSpPr>

--- a/3.2 Hoofdstuk 2 - Marktvormen en hun marktevenwicht/3.2.6 Paragraaf 6 - Marktvormen en hun economische doelmatigheid/2. Leren/3.2.6 Marktvormen en hun economische doelmatigheid – presentatie.pptx
+++ b/3.2 Hoofdstuk 2 - Marktvormen en hun marktevenwicht/3.2.6 Paragraaf 6 - Marktvormen en hun economische doelmatigheid/2. Leren/3.2.6 Marktvormen en hun economische doelmatigheid – presentatie.pptx
@@ -16,10 +16,9 @@
     <p:sldId id="264" r:id="rId10"/>
     <p:sldId id="265" r:id="rId11"/>
     <p:sldId id="266" r:id="rId12"/>
-    <p:sldId id="267" r:id="rId13"/>
   </p:sldIdLst>
   <p:notesMasterIdLst>
-    <p:notesMasterId r:id="rId14"/>
+    <p:notesMasterId r:id="rId13"/>
   </p:notesMasterIdLst>
   <p:sldSz cx="9144000" cy="5143500"/>
   <p:notesSz cx="5143500" cy="9144000"/>
@@ -513,7 +512,7 @@
           <a:p>
             <a:r>
               <a:rPr lang="en-US" dirty="0"/>
-              <a:t>Paragraaf 3.2.6: economische doelmatigheid. Wanneer is een markt efficiënt? We meten dit met surplus en leren het concept Pareto-efficiëntie.</a:t>
+              <a:t>Welkom bij paragraaf 3.2.6 over economische doelmatigheid. We behandelen surplus (CS, PS, TS), de Harbergerdriehoek, efficiëntie en Pareto.</a:t>
             </a:r>
             <a:endParaRPr lang="en-US" dirty="0"/>
           </a:p>
@@ -601,7 +600,7 @@
           <a:p>
             <a:r>
               <a:rPr lang="en-US" dirty="0"/>
-              <a:t>Voorbeeld stoelruil: als twee leerlingen allebei liever op elkaars stoel zitten (of het niet erg vinden), is ruilen een Pareto-verbetering. Als niemand meer wil ruilen, is de situatie Pareto-efficiënt.</a:t>
+              <a:t>Drie veelgemaakte fouten. Let op: de Harbergerdriehoek meet alleen het allocatieve verlies — er is ook de herverdeling van CS naar PS (geen verlies, wel verschuiving) en eventueel dynamisch verlies door minder innovatie.</a:t>
             </a:r>
             <a:endParaRPr lang="en-US" dirty="0"/>
           </a:p>
@@ -689,7 +688,7 @@
           <a:p>
             <a:r>
               <a:rPr lang="en-US" dirty="0"/>
-              <a:t>Drie veelgemaakte fouten: meer PS bij monopolie betekent niet meer welvaart, Pareto-efficiëntie zegt niets over eerlijkheid, en de Harbergerdriehoek is alleen het allocatieve verlies.</a:t>
+              <a:t>Zes kernpunten. De Harbergerdriehoek-formule is nieuw: ½ × ΔQ × (P_m − MK_m). Benadruk dat het surplus dat verdwijnt nergens heen gaat — het is gewoon weg.</a:t>
             </a:r>
             <a:endParaRPr lang="en-US" dirty="0"/>
           </a:p>
@@ -713,94 +712,6 @@
             <a:fld id="{F7021451-1387-4CA6-816F-3879F97B5CBC}" type="slidenum">
               <a:rPr lang="en-US"/>
               <a:t>11</a:t>
-            </a:fld>
-            <a:endParaRPr lang="en-US"/>
-          </a:p>
-        </p:txBody>
-      </p:sp>
-    </p:spTree>
-    <p:extLst>
-      <p:ext uri="{BB962C8B-B14F-4D97-AF65-F5344CB8AC3E}">
-        <p14:creationId xmlns:p14="http://schemas.microsoft.com/office/powerpoint/2010/main" val="1024086991"/>
-      </p:ext>
-    </p:extLst>
-  </p:cSld>
-  <p:clrMapOvr>
-    <a:masterClrMapping/>
-  </p:clrMapOvr>
-</p:notes>
-</file>
-
-<file path=ppt/notesSlides/notesSlide12.xml><?xml version="1.0" encoding="utf-8"?>
-<p:notes xmlns:a="http://schemas.openxmlformats.org/drawingml/2006/main" xmlns:r="http://schemas.openxmlformats.org/officeDocument/2006/relationships" xmlns:p="http://schemas.openxmlformats.org/presentationml/2006/main">
-  <p:cSld>
-    <p:spTree>
-      <p:nvGrpSpPr>
-        <p:cNvPr id="1" name=""/>
-        <p:cNvGrpSpPr/>
-        <p:nvPr/>
-      </p:nvGrpSpPr>
-      <p:grpSpPr>
-        <a:xfrm>
-          <a:off x="0" y="0"/>
-          <a:ext cx="0" cy="0"/>
-          <a:chOff x="0" y="0"/>
-          <a:chExt cx="0" cy="0"/>
-        </a:xfrm>
-      </p:grpSpPr>
-      <p:sp>
-        <p:nvSpPr>
-          <p:cNvPr id="2" name="Slide Image Placeholder 1"/>
-          <p:cNvSpPr>
-            <a:spLocks noGrp="1" noRot="1" noChangeAspect="1"/>
-          </p:cNvSpPr>
-          <p:nvPr>
-            <p:ph type="sldImg"/>
-          </p:nvPr>
-        </p:nvSpPr>
-        <p:spPr/>
-      </p:sp>
-      <p:sp>
-        <p:nvSpPr>
-          <p:cNvPr id="3" name="Notes Placeholder 2"/>
-          <p:cNvSpPr>
-            <a:spLocks noGrp="1"/>
-          </p:cNvSpPr>
-          <p:nvPr>
-            <p:ph type="body" idx="1"/>
-          </p:nvPr>
-        </p:nvSpPr>
-        <p:spPr/>
-        <p:txBody>
-          <a:bodyPr/>
-          <a:lstStyle/>
-          <a:p>
-            <a:r>
-              <a:rPr lang="en-US" dirty="0"/>
-              <a:t>Samenvatting: volkomen concurrentie is het meest doelmatig (maximaal TS), monopolie het minst (Harbergerdriehoek). Toetredingsdrempels zijn de oorzaak van het verschil. Pareto-efficiëntie is het criterium.</a:t>
-            </a:r>
-            <a:endParaRPr lang="en-US" dirty="0"/>
-          </a:p>
-        </p:txBody>
-      </p:sp>
-      <p:sp>
-        <p:nvSpPr>
-          <p:cNvPr id="4" name="Slide Number Placeholder 3"/>
-          <p:cNvSpPr>
-            <a:spLocks noGrp="1"/>
-          </p:cNvSpPr>
-          <p:nvPr>
-            <p:ph type="sldNum" sz="quarter" idx="10"/>
-          </p:nvPr>
-        </p:nvSpPr>
-        <p:spPr/>
-        <p:txBody>
-          <a:bodyPr/>
-          <a:lstStyle/>
-          <a:p>
-            <a:fld id="{F7021451-1387-4CA6-816F-3879F97B5CBC}" type="slidenum">
-              <a:rPr lang="en-US"/>
-              <a:t>12</a:t>
             </a:fld>
             <a:endParaRPr lang="en-US"/>
           </a:p>
@@ -865,7 +776,7 @@
           <a:p>
             <a:r>
               <a:rPr lang="en-US" dirty="0"/>
-              <a:t>Surplus = maat voor welvaart. CS is het verschil tussen betalingsbereidheid en werkelijke prijs. PS is het verschil tussen ontvangen prijs en minimale prijs. TS = CS + PS. Hoe hoger het totaal surplus, hoe doelmatiger de markt.</a:t>
+              <a:t>Drie vormen van surplus. CS is het voordeel voor consumenten, PS voor producenten. Samen vormen ze het TS — de maatstaf voor totale welvaart.</a:t>
             </a:r>
             <a:endParaRPr lang="en-US" dirty="0"/>
           </a:p>
@@ -953,7 +864,7 @@
           <a:p>
             <a:r>
               <a:rPr lang="en-US" dirty="0"/>
-              <a:t>Bij volkomen concurrentie is het totale surplus maximaal. Er is geen welvaartsverlies. De prijs is gelijk aan MK. Dit is de benchmark waartegen we andere marktvormen vergelijken.</a:t>
+              <a:t>De blauwe driehoek is het CS (boven P*, onder V). De groene driehoek is het PS (onder P*, boven MK). Samen is het TS = 900. Punt B is het evenwicht waar V = MK. Bij VC geldt P = MK, het TS is maximaal.</a:t>
             </a:r>
             <a:endParaRPr lang="en-US" dirty="0"/>
           </a:p>
@@ -1041,7 +952,7 @@
           <a:p>
             <a:r>
               <a:rPr lang="en-US" dirty="0"/>
-              <a:t>Bij monopolie produceert de monopolist minder en vraagt een hogere prijs. Het totale surplus daalt. CS daalt fors, PS stijgt wat maar netto is er welvaartsverlies.</a:t>
+              <a:t>Bij VC is P = MK en het TS maximaal. Bij monopolie kiest de monopolist MO = MK, wat leidt tot een lagere Q en hogere P. Het CS daalt meer dan het PS stijgt — er is netto welvaartsverlies.</a:t>
             </a:r>
             <a:endParaRPr lang="en-US" dirty="0"/>
           </a:p>
@@ -1129,7 +1040,7 @@
           <a:p>
             <a:r>
               <a:rPr lang="en-US" dirty="0"/>
-              <a:t>De Harbergerdriehoek: het driehoekige gebied dat het welvaartsverlies door monopolie weergeeft. Dit zijn transacties die voordelig zouden zijn voor beide partijen maar niet plaatsvinden door de hogere monopolieprijs.</a:t>
+              <a:t>Punt B (30,30) is het VC-evenwicht. Punt A (20,20) is waar MO = MK. Punt C (20,40) is de monopolieprijs op de vraaglijn. De rode driehoek C-B-A is het welvaartsverlies = ½ × 10 × 20 = 100. Het lichtblauwe vlak is CS dat PS wordt — dat is geen verlies, alleen herverdeling. De driehoek is wat écht weg is.</a:t>
             </a:r>
             <a:endParaRPr lang="en-US" dirty="0"/>
           </a:p>
@@ -1217,7 +1128,7 @@
           <a:p>
             <a:r>
               <a:rPr lang="en-US" dirty="0"/>
-              <a:t>Waarom daalt het totaal surplus? De monopolist produceert minder dan het efficiënte niveau. Transacties die voor zowel koper als verkoper voordelig zouden zijn, vinden niet plaats. Rekenvoorbeeld: TS daalt van 900 naar 800, welvaartsverlies = 100.</a:t>
+              <a:t>Het verschil: CS daalt van 450 naar 200 (−250), PS stijgt van 450 naar 600 (+150). Netto: −100. Die 100 is de Harbergerdriehoek — surplus dat niemand krijgt.</a:t>
             </a:r>
             <a:endParaRPr lang="en-US" dirty="0"/>
           </a:p>
@@ -1305,7 +1216,7 @@
           <a:p>
             <a:r>
               <a:rPr lang="en-US" dirty="0"/>
-              <a:t>Een markt is efficiënt als: p = MK, geen welvaartsverlies, totaal surplus is maximaal. Dit is alleen het geval bij volkomen concurrentie. Bij alle andere marktvormen is er een mate van inefficiëntie.</a:t>
+              <a:t>Een markt is efficiënt als het TS maximaal is (P = MK). Bij monopolie geldt P &gt; MK, waardoor er een Harbergerdriehoek ontstaat.</a:t>
             </a:r>
             <a:endParaRPr lang="en-US" dirty="0"/>
           </a:p>
@@ -1393,7 +1304,7 @@
           <a:p>
             <a:r>
               <a:rPr lang="en-US" dirty="0"/>
-              <a:t>Toetredingsdrempels zijn de sleutel: als er geen drempels zijn, treden aanbieders toe totdat winst = 0 en de markt efficiënt is. Hoge drempels houden de inefficiëntie in stand.</a:t>
+              <a:t>Hoge toetredingsdrempels houden de inefficiëntie in stand. Zolang er geen concurrenten toetreden, kan de monopolist P &gt; MK blijven vragen.</a:t>
             </a:r>
             <a:endParaRPr lang="en-US" dirty="0"/>
           </a:p>
@@ -1481,7 +1392,7 @@
           <a:p>
             <a:r>
               <a:rPr lang="en-US" dirty="0"/>
-              <a:t>Pareto-efficiëntie: een situatie waarin je niemand beter af kunt maken zonder iemand anders slechter af te maken. Het marktevenwicht bij volkomen concurrentie is Pareto-efficiënt.</a:t>
+              <a:t>Pareto-efficiëntie kijkt niet naar totaal surplus maar naar individuele voor- en nadelen. Een Pareto-verbetering is als iemand erop vooruitgaat en niemand erop achteruitgaat. Pas als er geen verbetering meer mogelijk is, is de situatie Pareto-efficiënt.</a:t>
             </a:r>
             <a:endParaRPr lang="en-US" dirty="0"/>
           </a:p>
@@ -1981,7 +1892,7 @@
         </p:nvSpPr>
         <p:spPr>
           <a:xfrm>
-            <a:off x="640080" y="914400"/>
+            <a:off x="640080" y="1097280"/>
             <a:ext cx="7863840" cy="1828800"/>
           </a:xfrm>
           <a:prstGeom prst="rect">
@@ -2037,7 +1948,7 @@
         </p:nvSpPr>
         <p:spPr>
           <a:xfrm>
-            <a:off x="640080" y="2743200"/>
+            <a:off x="640080" y="2926080"/>
             <a:ext cx="7863840" cy="457200"/>
           </a:xfrm>
           <a:prstGeom prst="rect">
@@ -2054,7 +1965,7 @@
               <a:buNone/>
             </a:pPr>
             <a:r>
-              <a:rPr lang="en-US" sz="1800" i="1" dirty="0">
+              <a:rPr lang="en-US" sz="2000" dirty="0">
                 <a:solidFill>
                   <a:srgbClr val="718096"/>
                 </a:solidFill>
@@ -2064,7 +1975,7 @@
               </a:rPr>
               <a:t>Surplus, efficiëntie en Pareto</a:t>
             </a:r>
-            <a:endParaRPr lang="en-US" sz="1800" dirty="0"/>
+            <a:endParaRPr lang="en-US" sz="2000" dirty="0"/>
           </a:p>
         </p:txBody>
       </p:sp>
@@ -2165,7 +2076,7 @@
                 <a:ea typeface="Arial" pitchFamily="34" charset="-122"/>
                 <a:cs typeface="Arial" pitchFamily="34" charset="-120"/>
               </a:rPr>
-              <a:t>Voorbeeld: stoelruil in de klas</a:t>
+              <a:t>Valkuilen</a:t>
             </a:r>
             <a:endParaRPr lang="en-US" sz="2400" dirty="0"/>
           </a:p>
@@ -2179,32 +2090,50 @@
         </p:nvSpPr>
         <p:spPr>
           <a:xfrm>
-            <a:off x="640080" y="1115568"/>
-            <a:ext cx="457200" cy="457200"/>
-          </a:xfrm>
-          <a:prstGeom prst="ellipse">
-            <a:avLst/>
+            <a:off x="457200" y="914400"/>
+            <a:ext cx="8229600" cy="1097280"/>
+          </a:xfrm>
+          <a:prstGeom prst="rect">
+            <a:avLst>
+              <a:gd name="adj" fmla="val 4167"/>
+            </a:avLst>
           </a:prstGeom>
           <a:solidFill>
-            <a:srgbClr val="1A5276"/>
+            <a:srgbClr val="FDE8E8"/>
           </a:solidFill>
           <a:ln/>
         </p:spPr>
-        <p:txBody>
-          <a:bodyPr/>
-          <a:p/>
-        </p:txBody>
-      </p:sp>
-      <p:sp>
-        <p:nvSpPr>
-          <p:cNvPr id="4" name="Text 2"/>
-          <p:cNvSpPr/>
-          <p:nvPr/>
-        </p:nvSpPr>
-        <p:spPr>
-          <a:xfrm>
-            <a:off x="640080" y="1115568"/>
-            <a:ext cx="457200" cy="457200"/>
+      </p:sp>
+      <p:sp>
+        <p:nvSpPr>
+          <p:cNvPr id="4" name="Shape 2"/>
+          <p:cNvSpPr/>
+          <p:nvPr/>
+        </p:nvSpPr>
+        <p:spPr>
+          <a:xfrm>
+            <a:off x="457200" y="914400"/>
+            <a:ext cx="54864" cy="1097280"/>
+          </a:xfrm>
+          <a:prstGeom prst="rect">
+            <a:avLst/>
+          </a:prstGeom>
+          <a:solidFill>
+            <a:srgbClr val="D9534F"/>
+          </a:solidFill>
+          <a:ln/>
+        </p:spPr>
+      </p:sp>
+      <p:sp>
+        <p:nvSpPr>
+          <p:cNvPr id="5" name="Text 3"/>
+          <p:cNvSpPr/>
+          <p:nvPr/>
+        </p:nvSpPr>
+        <p:spPr>
+          <a:xfrm>
+            <a:off x="685800" y="960120"/>
+            <a:ext cx="7772400" cy="411480"/>
           </a:xfrm>
           <a:prstGeom prst="rect">
             <a:avLst/>
@@ -2216,67 +2145,115 @@
           <a:bodyPr wrap="square" rtlCol="0" anchor="ctr"/>
           <a:lstStyle/>
           <a:p>
-            <a:pPr algn="ctr" indent="0" marL="0">
-              <a:buNone/>
-            </a:pPr>
-            <a:r>
-              <a:rPr lang="en-US" sz="1800" b="1" dirty="0">
-                <a:solidFill>
-                  <a:srgbClr val="FFFFFF"/>
-                </a:solidFill>
-                <a:latin typeface="Arial" pitchFamily="34" charset="0"/>
-                <a:ea typeface="Arial" pitchFamily="34" charset="-122"/>
-                <a:cs typeface="Arial" pitchFamily="34" charset="-120"/>
-              </a:rPr>
-              <a:t>1</a:t>
-            </a:r>
-            <a:endParaRPr lang="en-US" sz="1800" dirty="0"/>
-          </a:p>
-        </p:txBody>
-      </p:sp>
-      <p:sp>
-        <p:nvSpPr>
-          <p:cNvPr id="5" name="Shape 3"/>
-          <p:cNvSpPr/>
-          <p:nvPr/>
-        </p:nvSpPr>
-        <p:spPr>
-          <a:xfrm>
-            <a:off x="1325880" y="1005840"/>
-            <a:ext cx="7360920" cy="685800"/>
+            <a:pPr indent="0" marL="0">
+              <a:buNone/>
+            </a:pPr>
+            <a:r>
+              <a:rPr lang="en-US" sz="1400" b="1" dirty="0">
+                <a:solidFill>
+                  <a:srgbClr val="D9534F"/>
+                </a:solidFill>
+                <a:latin typeface="Arial" pitchFamily="34" charset="0"/>
+                <a:ea typeface="Arial" pitchFamily="34" charset="-122"/>
+                <a:cs typeface="Arial" pitchFamily="34" charset="-120"/>
+              </a:rPr>
+              <a:t>„Meer PS bij monopolie = beter voor de markt”</a:t>
+            </a:r>
+            <a:endParaRPr lang="en-US" sz="1400" dirty="0"/>
+          </a:p>
+        </p:txBody>
+      </p:sp>
+      <p:sp>
+        <p:nvSpPr>
+          <p:cNvPr id="6" name="Text 4"/>
+          <p:cNvSpPr/>
+          <p:nvPr/>
+        </p:nvSpPr>
+        <p:spPr>
+          <a:xfrm>
+            <a:off x="685800" y="1371600"/>
+            <a:ext cx="7772400" cy="548640"/>
+          </a:xfrm>
+          <a:prstGeom prst="rect">
+            <a:avLst/>
+          </a:prstGeom>
+          <a:noFill/>
+          <a:ln/>
+        </p:spPr>
+        <p:txBody>
+          <a:bodyPr wrap="square" rtlCol="0" anchor="ctr"/>
+          <a:lstStyle/>
+          <a:p>
+            <a:pPr indent="0" marL="0">
+              <a:buNone/>
+            </a:pPr>
+            <a:r>
+              <a:rPr lang="en-US" sz="1300" dirty="0">
+                <a:solidFill>
+                  <a:srgbClr val="2D3748"/>
+                </a:solidFill>
+                <a:latin typeface="Arial" pitchFamily="34" charset="0"/>
+                <a:ea typeface="Arial" pitchFamily="34" charset="-122"/>
+                <a:cs typeface="Arial" pitchFamily="34" charset="-120"/>
+              </a:rPr>
+              <a:t>Onjuist: PS stijgt, maar CS daalt meer. Het totaal surplus (TS) daalt altijd bij monopolie.</a:t>
+            </a:r>
+            <a:endParaRPr lang="en-US" sz="1300" dirty="0"/>
+          </a:p>
+        </p:txBody>
+      </p:sp>
+      <p:sp>
+        <p:nvSpPr>
+          <p:cNvPr id="7" name="Shape 5"/>
+          <p:cNvSpPr/>
+          <p:nvPr/>
+        </p:nvSpPr>
+        <p:spPr>
+          <a:xfrm>
+            <a:off x="457200" y="2194560"/>
+            <a:ext cx="8229600" cy="1097280"/>
           </a:xfrm>
           <a:prstGeom prst="rect">
             <a:avLst>
-              <a:gd name="adj" fmla="val 6667"/>
+              <a:gd name="adj" fmla="val 4167"/>
             </a:avLst>
           </a:prstGeom>
           <a:solidFill>
-            <a:srgbClr val="F9F6F1"/>
+            <a:srgbClr val="FDE8E8"/>
           </a:solidFill>
           <a:ln/>
-          <a:effectLst>
-            <a:outerShdw sx="100000" sy="100000" kx="0" ky="0" algn="bl" rotWithShape="0" blurRad="76200" dist="25400" dir="8100000">
-              <a:srgbClr val="000000">
-                <a:alpha val="10000"/>
-              </a:srgbClr>
-            </a:outerShdw>
-          </a:effectLst>
-        </p:spPr>
-        <p:txBody>
-          <a:bodyPr/>
-          <a:p/>
-        </p:txBody>
-      </p:sp>
-      <p:sp>
-        <p:nvSpPr>
-          <p:cNvPr id="6" name="Text 4"/>
-          <p:cNvSpPr/>
-          <p:nvPr/>
-        </p:nvSpPr>
-        <p:spPr>
-          <a:xfrm>
-            <a:off x="1508760" y="1005840"/>
-            <a:ext cx="6949440" cy="685800"/>
+        </p:spPr>
+      </p:sp>
+      <p:sp>
+        <p:nvSpPr>
+          <p:cNvPr id="8" name="Shape 6"/>
+          <p:cNvSpPr/>
+          <p:nvPr/>
+        </p:nvSpPr>
+        <p:spPr>
+          <a:xfrm>
+            <a:off x="457200" y="2194560"/>
+            <a:ext cx="54864" cy="1097280"/>
+          </a:xfrm>
+          <a:prstGeom prst="rect">
+            <a:avLst/>
+          </a:prstGeom>
+          <a:solidFill>
+            <a:srgbClr val="D9534F"/>
+          </a:solidFill>
+          <a:ln/>
+        </p:spPr>
+      </p:sp>
+      <p:sp>
+        <p:nvSpPr>
+          <p:cNvPr id="9" name="Text 7"/>
+          <p:cNvSpPr/>
+          <p:nvPr/>
+        </p:nvSpPr>
+        <p:spPr>
+          <a:xfrm>
+            <a:off x="685800" y="2240280"/>
+            <a:ext cx="7772400" cy="411480"/>
           </a:xfrm>
           <a:prstGeom prst="rect">
             <a:avLst/>
@@ -2292,7 +2269,46 @@
               <a:buNone/>
             </a:pPr>
             <a:r>
-              <a:rPr lang="en-US" sz="1500" dirty="0">
+              <a:rPr lang="en-US" sz="1400" b="1" dirty="0">
+                <a:solidFill>
+                  <a:srgbClr val="D9534F"/>
+                </a:solidFill>
+                <a:latin typeface="Arial" pitchFamily="34" charset="0"/>
+                <a:ea typeface="Arial" pitchFamily="34" charset="-122"/>
+                <a:cs typeface="Arial" pitchFamily="34" charset="-120"/>
+              </a:rPr>
+              <a:t>„Pareto-efficiënt = eerlijk”</a:t>
+            </a:r>
+            <a:endParaRPr lang="en-US" sz="1400" dirty="0"/>
+          </a:p>
+        </p:txBody>
+      </p:sp>
+      <p:sp>
+        <p:nvSpPr>
+          <p:cNvPr id="10" name="Text 8"/>
+          <p:cNvSpPr/>
+          <p:nvPr/>
+        </p:nvSpPr>
+        <p:spPr>
+          <a:xfrm>
+            <a:off x="685800" y="2651760"/>
+            <a:ext cx="7772400" cy="548640"/>
+          </a:xfrm>
+          <a:prstGeom prst="rect">
+            <a:avLst/>
+          </a:prstGeom>
+          <a:noFill/>
+          <a:ln/>
+        </p:spPr>
+        <p:txBody>
+          <a:bodyPr wrap="square" rtlCol="0" anchor="ctr"/>
+          <a:lstStyle/>
+          <a:p>
+            <a:pPr indent="0" marL="0">
+              <a:buNone/>
+            </a:pPr>
+            <a:r>
+              <a:rPr lang="en-US" sz="1300" dirty="0">
                 <a:solidFill>
                   <a:srgbClr val="2D3748"/>
                 </a:solidFill>
@@ -2300,46 +2316,64 @@
                 <a:ea typeface="Arial" pitchFamily="34" charset="-122"/>
                 <a:cs typeface="Arial" pitchFamily="34" charset="-120"/>
               </a:rPr>
-              <a:t>Esther zit vooraan, Mieke achteraan</a:t>
-            </a:r>
-            <a:endParaRPr lang="en-US" sz="1500" dirty="0"/>
-          </a:p>
-        </p:txBody>
-      </p:sp>
-      <p:sp>
-        <p:nvSpPr>
-          <p:cNvPr id="7" name="Shape 5"/>
-          <p:cNvSpPr/>
-          <p:nvPr/>
-        </p:nvSpPr>
-        <p:spPr>
-          <a:xfrm>
-            <a:off x="640080" y="1984248"/>
-            <a:ext cx="457200" cy="457200"/>
-          </a:xfrm>
-          <a:prstGeom prst="ellipse">
-            <a:avLst/>
+              <a:t>Onjuist: Pareto zegt niets over verdeling. Een situatie kan Pareto-efficiënt zijn terwijl één persoon alles heeft.</a:t>
+            </a:r>
+            <a:endParaRPr lang="en-US" sz="1300" dirty="0"/>
+          </a:p>
+        </p:txBody>
+      </p:sp>
+      <p:sp>
+        <p:nvSpPr>
+          <p:cNvPr id="11" name="Shape 9"/>
+          <p:cNvSpPr/>
+          <p:nvPr/>
+        </p:nvSpPr>
+        <p:spPr>
+          <a:xfrm>
+            <a:off x="457200" y="3474720"/>
+            <a:ext cx="8229600" cy="1097280"/>
+          </a:xfrm>
+          <a:prstGeom prst="rect">
+            <a:avLst>
+              <a:gd name="adj" fmla="val 4167"/>
+            </a:avLst>
           </a:prstGeom>
           <a:solidFill>
-            <a:srgbClr val="1A5276"/>
+            <a:srgbClr val="FDE8E8"/>
           </a:solidFill>
           <a:ln/>
         </p:spPr>
-        <p:txBody>
-          <a:bodyPr/>
-          <a:p/>
-        </p:txBody>
-      </p:sp>
-      <p:sp>
-        <p:nvSpPr>
-          <p:cNvPr id="8" name="Text 6"/>
-          <p:cNvSpPr/>
-          <p:nvPr/>
-        </p:nvSpPr>
-        <p:spPr>
-          <a:xfrm>
-            <a:off x="640080" y="1984248"/>
-            <a:ext cx="457200" cy="457200"/>
+      </p:sp>
+      <p:sp>
+        <p:nvSpPr>
+          <p:cNvPr id="12" name="Shape 10"/>
+          <p:cNvSpPr/>
+          <p:nvPr/>
+        </p:nvSpPr>
+        <p:spPr>
+          <a:xfrm>
+            <a:off x="457200" y="3474720"/>
+            <a:ext cx="54864" cy="1097280"/>
+          </a:xfrm>
+          <a:prstGeom prst="rect">
+            <a:avLst/>
+          </a:prstGeom>
+          <a:solidFill>
+            <a:srgbClr val="D9534F"/>
+          </a:solidFill>
+          <a:ln/>
+        </p:spPr>
+      </p:sp>
+      <p:sp>
+        <p:nvSpPr>
+          <p:cNvPr id="13" name="Text 11"/>
+          <p:cNvSpPr/>
+          <p:nvPr/>
+        </p:nvSpPr>
+        <p:spPr>
+          <a:xfrm>
+            <a:off x="685800" y="3520440"/>
+            <a:ext cx="7772400" cy="411480"/>
           </a:xfrm>
           <a:prstGeom prst="rect">
             <a:avLst/>
@@ -2351,67 +2385,34 @@
           <a:bodyPr wrap="square" rtlCol="0" anchor="ctr"/>
           <a:lstStyle/>
           <a:p>
-            <a:pPr algn="ctr" indent="0" marL="0">
-              <a:buNone/>
-            </a:pPr>
-            <a:r>
-              <a:rPr lang="en-US" sz="1800" b="1" dirty="0">
-                <a:solidFill>
-                  <a:srgbClr val="FFFFFF"/>
-                </a:solidFill>
-                <a:latin typeface="Arial" pitchFamily="34" charset="0"/>
-                <a:ea typeface="Arial" pitchFamily="34" charset="-122"/>
-                <a:cs typeface="Arial" pitchFamily="34" charset="-120"/>
-              </a:rPr>
-              <a:t>2</a:t>
-            </a:r>
-            <a:endParaRPr lang="en-US" sz="1800" dirty="0"/>
-          </a:p>
-        </p:txBody>
-      </p:sp>
-      <p:sp>
-        <p:nvSpPr>
-          <p:cNvPr id="9" name="Shape 7"/>
-          <p:cNvSpPr/>
-          <p:nvPr/>
-        </p:nvSpPr>
-        <p:spPr>
-          <a:xfrm>
-            <a:off x="1325880" y="1874520"/>
-            <a:ext cx="7360920" cy="685800"/>
-          </a:xfrm>
-          <a:prstGeom prst="rect">
-            <a:avLst>
-              <a:gd name="adj" fmla="val 6667"/>
-            </a:avLst>
-          </a:prstGeom>
-          <a:solidFill>
-            <a:srgbClr val="F9F6F1"/>
-          </a:solidFill>
-          <a:ln/>
-          <a:effectLst>
-            <a:outerShdw sx="100000" sy="100000" kx="0" ky="0" algn="bl" rotWithShape="0" blurRad="76200" dist="25400" dir="8100000">
-              <a:srgbClr val="000000">
-                <a:alpha val="10000"/>
-              </a:srgbClr>
-            </a:outerShdw>
-          </a:effectLst>
-        </p:spPr>
-        <p:txBody>
-          <a:bodyPr/>
-          <a:p/>
-        </p:txBody>
-      </p:sp>
-      <p:sp>
-        <p:nvSpPr>
-          <p:cNvPr id="10" name="Text 8"/>
-          <p:cNvSpPr/>
-          <p:nvPr/>
-        </p:nvSpPr>
-        <p:spPr>
-          <a:xfrm>
-            <a:off x="1508760" y="1874520"/>
-            <a:ext cx="6949440" cy="685800"/>
+            <a:pPr indent="0" marL="0">
+              <a:buNone/>
+            </a:pPr>
+            <a:r>
+              <a:rPr lang="en-US" sz="1400" b="1" dirty="0">
+                <a:solidFill>
+                  <a:srgbClr val="D9534F"/>
+                </a:solidFill>
+                <a:latin typeface="Arial" pitchFamily="34" charset="0"/>
+                <a:ea typeface="Arial" pitchFamily="34" charset="-122"/>
+                <a:cs typeface="Arial" pitchFamily="34" charset="-120"/>
+              </a:rPr>
+              <a:t>„Harbergerdriehoek = het hele welvaartsverlies”</a:t>
+            </a:r>
+            <a:endParaRPr lang="en-US" sz="1400" dirty="0"/>
+          </a:p>
+        </p:txBody>
+      </p:sp>
+      <p:sp>
+        <p:nvSpPr>
+          <p:cNvPr id="14" name="Text 12"/>
+          <p:cNvSpPr/>
+          <p:nvPr/>
+        </p:nvSpPr>
+        <p:spPr>
+          <a:xfrm>
+            <a:off x="685800" y="3931920"/>
+            <a:ext cx="7772400" cy="548640"/>
           </a:xfrm>
           <a:prstGeom prst="rect">
             <a:avLst/>
@@ -2427,7 +2428,7 @@
               <a:buNone/>
             </a:pPr>
             <a:r>
-              <a:rPr lang="en-US" sz="1500" dirty="0">
+              <a:rPr lang="en-US" sz="1300" dirty="0">
                 <a:solidFill>
                   <a:srgbClr val="2D3748"/>
                 </a:solidFill>
@@ -2435,255 +2436,9 @@
                 <a:ea typeface="Arial" pitchFamily="34" charset="-122"/>
                 <a:cs typeface="Arial" pitchFamily="34" charset="-120"/>
               </a:rPr>
-              <a:t>Mieke wil graag vooraan — Esther maakt het niet uit</a:t>
-            </a:r>
-            <a:endParaRPr lang="en-US" sz="1500" dirty="0"/>
-          </a:p>
-        </p:txBody>
-      </p:sp>
-      <p:sp>
-        <p:nvSpPr>
-          <p:cNvPr id="11" name="Shape 9"/>
-          <p:cNvSpPr/>
-          <p:nvPr/>
-        </p:nvSpPr>
-        <p:spPr>
-          <a:xfrm>
-            <a:off x="640080" y="2852928"/>
-            <a:ext cx="457200" cy="457200"/>
-          </a:xfrm>
-          <a:prstGeom prst="ellipse">
-            <a:avLst/>
-          </a:prstGeom>
-          <a:solidFill>
-            <a:srgbClr val="1A5276"/>
-          </a:solidFill>
-          <a:ln/>
-        </p:spPr>
-        <p:txBody>
-          <a:bodyPr/>
-          <a:p/>
-        </p:txBody>
-      </p:sp>
-      <p:sp>
-        <p:nvSpPr>
-          <p:cNvPr id="12" name="Text 10"/>
-          <p:cNvSpPr/>
-          <p:nvPr/>
-        </p:nvSpPr>
-        <p:spPr>
-          <a:xfrm>
-            <a:off x="640080" y="2852928"/>
-            <a:ext cx="457200" cy="457200"/>
-          </a:xfrm>
-          <a:prstGeom prst="rect">
-            <a:avLst/>
-          </a:prstGeom>
-          <a:noFill/>
-          <a:ln/>
-        </p:spPr>
-        <p:txBody>
-          <a:bodyPr wrap="square" rtlCol="0" anchor="ctr"/>
-          <a:lstStyle/>
-          <a:p>
-            <a:pPr algn="ctr" indent="0" marL="0">
-              <a:buNone/>
-            </a:pPr>
-            <a:r>
-              <a:rPr lang="en-US" sz="1800" b="1" dirty="0">
-                <a:solidFill>
-                  <a:srgbClr val="FFFFFF"/>
-                </a:solidFill>
-                <a:latin typeface="Arial" pitchFamily="34" charset="0"/>
-                <a:ea typeface="Arial" pitchFamily="34" charset="-122"/>
-                <a:cs typeface="Arial" pitchFamily="34" charset="-120"/>
-              </a:rPr>
-              <a:t>3</a:t>
-            </a:r>
-            <a:endParaRPr lang="en-US" sz="1800" dirty="0"/>
-          </a:p>
-        </p:txBody>
-      </p:sp>
-      <p:sp>
-        <p:nvSpPr>
-          <p:cNvPr id="13" name="Shape 11"/>
-          <p:cNvSpPr/>
-          <p:nvPr/>
-        </p:nvSpPr>
-        <p:spPr>
-          <a:xfrm>
-            <a:off x="1325880" y="2743200"/>
-            <a:ext cx="7360920" cy="685800"/>
-          </a:xfrm>
-          <a:prstGeom prst="rect">
-            <a:avLst>
-              <a:gd name="adj" fmla="val 6667"/>
-            </a:avLst>
-          </a:prstGeom>
-          <a:solidFill>
-            <a:srgbClr val="F9F6F1"/>
-          </a:solidFill>
-          <a:ln/>
-          <a:effectLst>
-            <a:outerShdw sx="100000" sy="100000" kx="0" ky="0" algn="bl" rotWithShape="0" blurRad="76200" dist="25400" dir="8100000">
-              <a:srgbClr val="000000">
-                <a:alpha val="10000"/>
-              </a:srgbClr>
-            </a:outerShdw>
-          </a:effectLst>
-        </p:spPr>
-        <p:txBody>
-          <a:bodyPr/>
-          <a:p/>
-        </p:txBody>
-      </p:sp>
-      <p:sp>
-        <p:nvSpPr>
-          <p:cNvPr id="14" name="Text 12"/>
-          <p:cNvSpPr/>
-          <p:nvPr/>
-        </p:nvSpPr>
-        <p:spPr>
-          <a:xfrm>
-            <a:off x="1508760" y="2743200"/>
-            <a:ext cx="6949440" cy="685800"/>
-          </a:xfrm>
-          <a:prstGeom prst="rect">
-            <a:avLst/>
-          </a:prstGeom>
-          <a:noFill/>
-          <a:ln/>
-        </p:spPr>
-        <p:txBody>
-          <a:bodyPr wrap="square" rtlCol="0" anchor="ctr"/>
-          <a:lstStyle/>
-          <a:p>
-            <a:pPr indent="0" marL="0">
-              <a:buNone/>
-            </a:pPr>
-            <a:r>
-              <a:rPr lang="en-US" sz="1500" dirty="0">
-                <a:solidFill>
-                  <a:srgbClr val="2D3748"/>
-                </a:solidFill>
-                <a:latin typeface="Arial" pitchFamily="34" charset="0"/>
-                <a:ea typeface="Arial" pitchFamily="34" charset="-122"/>
-                <a:cs typeface="Arial" pitchFamily="34" charset="-120"/>
-              </a:rPr>
-              <a:t>Ze wisselen: Mieke blij, Esther niet slechter af</a:t>
-            </a:r>
-            <a:endParaRPr lang="en-US" sz="1500" dirty="0"/>
-          </a:p>
-        </p:txBody>
-      </p:sp>
-      <p:sp>
-        <p:nvSpPr>
-          <p:cNvPr id="15" name="Shape 13"/>
-          <p:cNvSpPr/>
-          <p:nvPr/>
-        </p:nvSpPr>
-        <p:spPr>
-          <a:xfrm>
-            <a:off x="640080" y="3657600"/>
-            <a:ext cx="7863840" cy="777240"/>
-          </a:xfrm>
-          <a:prstGeom prst="rect">
-            <a:avLst>
-              <a:gd name="adj" fmla="val 5882"/>
-            </a:avLst>
-          </a:prstGeom>
-          <a:solidFill>
-            <a:srgbClr val="E8F8F0"/>
-          </a:solidFill>
-          <a:ln/>
-          <a:effectLst>
-            <a:outerShdw sx="100000" sy="100000" kx="0" ky="0" algn="bl" rotWithShape="0" blurRad="76200" dist="25400" dir="8100000">
-              <a:srgbClr val="000000">
-                <a:alpha val="10000"/>
-              </a:srgbClr>
-            </a:outerShdw>
-          </a:effectLst>
-        </p:spPr>
-        <p:txBody>
-          <a:bodyPr/>
-          <a:p/>
-        </p:txBody>
-      </p:sp>
-      <p:sp>
-        <p:nvSpPr>
-          <p:cNvPr id="16" name="Shape 14"/>
-          <p:cNvSpPr/>
-          <p:nvPr/>
-        </p:nvSpPr>
-        <p:spPr>
-          <a:xfrm>
-            <a:off x="640080" y="3657600"/>
-            <a:ext cx="54864" cy="777240"/>
-          </a:xfrm>
-          <a:prstGeom prst="rect">
-            <a:avLst/>
-          </a:prstGeom>
-          <a:solidFill>
-            <a:srgbClr val="1E8449"/>
-          </a:solidFill>
-          <a:ln/>
-        </p:spPr>
-        <p:txBody>
-          <a:bodyPr/>
-          <a:p/>
-        </p:txBody>
-      </p:sp>
-      <p:sp>
-        <p:nvSpPr>
-          <p:cNvPr id="17" name="Text 15"/>
-          <p:cNvSpPr/>
-          <p:nvPr/>
-        </p:nvSpPr>
-        <p:spPr>
-          <a:xfrm>
-            <a:off x="868680" y="3657600"/>
-            <a:ext cx="7406640" cy="777240"/>
-          </a:xfrm>
-          <a:prstGeom prst="rect">
-            <a:avLst/>
-          </a:prstGeom>
-          <a:noFill/>
-          <a:ln/>
-        </p:spPr>
-        <p:txBody>
-          <a:bodyPr wrap="square" rtlCol="0" anchor="ctr"/>
-          <a:lstStyle/>
-          <a:p>
-            <a:pPr indent="0" marL="0">
-              <a:buNone/>
-            </a:pPr>
-            <a:r>
-              <a:rPr lang="en-US" sz="1600" b="1" dirty="0">
-                <a:solidFill>
-                  <a:srgbClr val="1E8449"/>
-                </a:solidFill>
-                <a:latin typeface="Arial" pitchFamily="34" charset="0"/>
-                <a:ea typeface="Arial" pitchFamily="34" charset="-122"/>
-                <a:cs typeface="Arial" pitchFamily="34" charset="-120"/>
-              </a:rPr>
-              <a:t>Dit is een Pareto-verbetering!
-</a:t>
-            </a:r>
-            <a:pPr indent="0" marL="0">
-              <a:buNone/>
-            </a:pPr>
-            <a:r>
-              <a:rPr lang="en-US" sz="1300" dirty="0">
-                <a:solidFill>
-                  <a:srgbClr val="2D3748"/>
-                </a:solidFill>
-                <a:latin typeface="Arial" pitchFamily="34" charset="0"/>
-                <a:ea typeface="Arial" pitchFamily="34" charset="-122"/>
-                <a:cs typeface="Arial" pitchFamily="34" charset="-120"/>
-              </a:rPr>
-              <a:t>Pas als niemand meer wil ruilen zonder dat iemand erop achteruitgaat → Pareto-efficiënt</a:t>
-            </a:r>
-            <a:endParaRPr lang="en-US" sz="1600" dirty="0"/>
+              <a:t>De Harbergerdriehoek meet het allocatieve verlies. Er kan ook dynamisch verlies zijn (minder innovatie).</a:t>
+            </a:r>
+            <a:endParaRPr lang="en-US" sz="1300" dirty="0"/>
           </a:p>
         </p:txBody>
       </p:sp>
@@ -2720,475 +2475,6 @@
         </p:nvSpPr>
         <p:spPr>
           <a:xfrm>
-            <a:off x="457200" y="0"/>
-            <a:ext cx="8229600" cy="685800"/>
-          </a:xfrm>
-          <a:prstGeom prst="rect">
-            <a:avLst/>
-          </a:prstGeom>
-          <a:noFill/>
-          <a:ln/>
-        </p:spPr>
-        <p:txBody>
-          <a:bodyPr wrap="square" rtlCol="0" anchor="ctr"/>
-          <a:lstStyle/>
-          <a:p>
-            <a:pPr indent="0" marL="0">
-              <a:buNone/>
-            </a:pPr>
-            <a:r>
-              <a:rPr lang="en-US" sz="2400" b="1" dirty="0">
-                <a:solidFill>
-                  <a:srgbClr val="FFFFFF"/>
-                </a:solidFill>
-                <a:latin typeface="Arial" pitchFamily="34" charset="0"/>
-                <a:ea typeface="Arial" pitchFamily="34" charset="-122"/>
-                <a:cs typeface="Arial" pitchFamily="34" charset="-120"/>
-              </a:rPr>
-              <a:t>Valkuilen</a:t>
-            </a:r>
-            <a:endParaRPr lang="en-US" sz="2400" dirty="0"/>
-          </a:p>
-        </p:txBody>
-      </p:sp>
-      <p:sp>
-        <p:nvSpPr>
-          <p:cNvPr id="3" name="Shape 1"/>
-          <p:cNvSpPr/>
-          <p:nvPr/>
-        </p:nvSpPr>
-        <p:spPr>
-          <a:xfrm>
-            <a:off x="457200" y="960120"/>
-            <a:ext cx="8229600" cy="1005840"/>
-          </a:xfrm>
-          <a:prstGeom prst="rect">
-            <a:avLst>
-              <a:gd name="adj" fmla="val 4545"/>
-            </a:avLst>
-          </a:prstGeom>
-          <a:solidFill>
-            <a:srgbClr val="FDE8E8"/>
-          </a:solidFill>
-          <a:ln/>
-          <a:effectLst>
-            <a:outerShdw sx="100000" sy="100000" kx="0" ky="0" algn="bl" rotWithShape="0" blurRad="76200" dist="25400" dir="8100000">
-              <a:srgbClr val="000000">
-                <a:alpha val="10000"/>
-              </a:srgbClr>
-            </a:outerShdw>
-          </a:effectLst>
-        </p:spPr>
-        <p:txBody>
-          <a:bodyPr/>
-          <a:p/>
-        </p:txBody>
-      </p:sp>
-      <p:sp>
-        <p:nvSpPr>
-          <p:cNvPr id="4" name="Shape 2"/>
-          <p:cNvSpPr/>
-          <p:nvPr/>
-        </p:nvSpPr>
-        <p:spPr>
-          <a:xfrm>
-            <a:off x="457200" y="960120"/>
-            <a:ext cx="54864" cy="1005840"/>
-          </a:xfrm>
-          <a:prstGeom prst="rect">
-            <a:avLst/>
-          </a:prstGeom>
-          <a:solidFill>
-            <a:srgbClr val="D9534F"/>
-          </a:solidFill>
-          <a:ln/>
-        </p:spPr>
-        <p:txBody>
-          <a:bodyPr/>
-          <a:p/>
-        </p:txBody>
-      </p:sp>
-      <p:sp>
-        <p:nvSpPr>
-          <p:cNvPr id="5" name="Text 3"/>
-          <p:cNvSpPr/>
-          <p:nvPr/>
-        </p:nvSpPr>
-        <p:spPr>
-          <a:xfrm>
-            <a:off x="658368" y="1033272"/>
-            <a:ext cx="7863840" cy="320040"/>
-          </a:xfrm>
-          <a:prstGeom prst="rect">
-            <a:avLst/>
-          </a:prstGeom>
-          <a:noFill/>
-          <a:ln/>
-        </p:spPr>
-        <p:txBody>
-          <a:bodyPr wrap="square" rtlCol="0" anchor="t"/>
-          <a:lstStyle/>
-          <a:p>
-            <a:pPr algn="l" indent="0" marL="0">
-              <a:buNone/>
-            </a:pPr>
-            <a:r>
-              <a:rPr lang="en-US" sz="1400" b="1" dirty="0">
-                <a:solidFill>
-                  <a:srgbClr val="D9534F"/>
-                </a:solidFill>
-                <a:latin typeface="Arial" pitchFamily="34" charset="0"/>
-                <a:ea typeface="Arial" pitchFamily="34" charset="-122"/>
-                <a:cs typeface="Arial" pitchFamily="34" charset="-120"/>
-              </a:rPr>
-              <a:t>"Meer PS bij monopolie = beter voor de markt"</a:t>
-            </a:r>
-            <a:endParaRPr lang="en-US" sz="1400" dirty="0"/>
-          </a:p>
-        </p:txBody>
-      </p:sp>
-      <p:sp>
-        <p:nvSpPr>
-          <p:cNvPr id="6" name="Text 4"/>
-          <p:cNvSpPr/>
-          <p:nvPr/>
-        </p:nvSpPr>
-        <p:spPr>
-          <a:xfrm>
-            <a:off x="658368" y="1344168"/>
-            <a:ext cx="7863840" cy="548640"/>
-          </a:xfrm>
-          <a:prstGeom prst="rect">
-            <a:avLst/>
-          </a:prstGeom>
-          <a:noFill/>
-          <a:ln/>
-        </p:spPr>
-        <p:txBody>
-          <a:bodyPr wrap="square" rtlCol="0" anchor="t"/>
-          <a:lstStyle/>
-          <a:p>
-            <a:pPr algn="l" indent="0" marL="0">
-              <a:buNone/>
-            </a:pPr>
-            <a:r>
-              <a:rPr lang="en-US" sz="1300" dirty="0">
-                <a:solidFill>
-                  <a:srgbClr val="2D3748"/>
-                </a:solidFill>
-                <a:latin typeface="Arial" pitchFamily="34" charset="0"/>
-                <a:ea typeface="Arial" pitchFamily="34" charset="-122"/>
-                <a:cs typeface="Arial" pitchFamily="34" charset="-120"/>
-              </a:rPr>
-              <a:t>Onjuist: PS stijgt, maar CS daalt meer. Het totaal surplus (TS) daalt altijd bij monopolie.</a:t>
-            </a:r>
-            <a:endParaRPr lang="en-US" sz="1300" dirty="0"/>
-          </a:p>
-        </p:txBody>
-      </p:sp>
-      <p:sp>
-        <p:nvSpPr>
-          <p:cNvPr id="7" name="Shape 5"/>
-          <p:cNvSpPr/>
-          <p:nvPr/>
-        </p:nvSpPr>
-        <p:spPr>
-          <a:xfrm>
-            <a:off x="457200" y="2148840"/>
-            <a:ext cx="8229600" cy="1005840"/>
-          </a:xfrm>
-          <a:prstGeom prst="rect">
-            <a:avLst>
-              <a:gd name="adj" fmla="val 4545"/>
-            </a:avLst>
-          </a:prstGeom>
-          <a:solidFill>
-            <a:srgbClr val="FDE8E8"/>
-          </a:solidFill>
-          <a:ln/>
-          <a:effectLst>
-            <a:outerShdw sx="100000" sy="100000" kx="0" ky="0" algn="bl" rotWithShape="0" blurRad="76200" dist="25400" dir="8100000">
-              <a:srgbClr val="000000">
-                <a:alpha val="10000"/>
-              </a:srgbClr>
-            </a:outerShdw>
-          </a:effectLst>
-        </p:spPr>
-        <p:txBody>
-          <a:bodyPr/>
-          <a:p/>
-        </p:txBody>
-      </p:sp>
-      <p:sp>
-        <p:nvSpPr>
-          <p:cNvPr id="8" name="Shape 6"/>
-          <p:cNvSpPr/>
-          <p:nvPr/>
-        </p:nvSpPr>
-        <p:spPr>
-          <a:xfrm>
-            <a:off x="457200" y="2148840"/>
-            <a:ext cx="54864" cy="1005840"/>
-          </a:xfrm>
-          <a:prstGeom prst="rect">
-            <a:avLst/>
-          </a:prstGeom>
-          <a:solidFill>
-            <a:srgbClr val="D9534F"/>
-          </a:solidFill>
-          <a:ln/>
-        </p:spPr>
-        <p:txBody>
-          <a:bodyPr/>
-          <a:p/>
-        </p:txBody>
-      </p:sp>
-      <p:sp>
-        <p:nvSpPr>
-          <p:cNvPr id="9" name="Text 7"/>
-          <p:cNvSpPr/>
-          <p:nvPr/>
-        </p:nvSpPr>
-        <p:spPr>
-          <a:xfrm>
-            <a:off x="658368" y="2221992"/>
-            <a:ext cx="7863840" cy="320040"/>
-          </a:xfrm>
-          <a:prstGeom prst="rect">
-            <a:avLst/>
-          </a:prstGeom>
-          <a:noFill/>
-          <a:ln/>
-        </p:spPr>
-        <p:txBody>
-          <a:bodyPr wrap="square" rtlCol="0" anchor="t"/>
-          <a:lstStyle/>
-          <a:p>
-            <a:pPr algn="l" indent="0" marL="0">
-              <a:buNone/>
-            </a:pPr>
-            <a:r>
-              <a:rPr lang="en-US" sz="1400" b="1" dirty="0">
-                <a:solidFill>
-                  <a:srgbClr val="D9534F"/>
-                </a:solidFill>
-                <a:latin typeface="Arial" pitchFamily="34" charset="0"/>
-                <a:ea typeface="Arial" pitchFamily="34" charset="-122"/>
-                <a:cs typeface="Arial" pitchFamily="34" charset="-120"/>
-              </a:rPr>
-              <a:t>"Pareto-efficiënt = eerlijk"</a:t>
-            </a:r>
-            <a:endParaRPr lang="en-US" sz="1400" dirty="0"/>
-          </a:p>
-        </p:txBody>
-      </p:sp>
-      <p:sp>
-        <p:nvSpPr>
-          <p:cNvPr id="10" name="Text 8"/>
-          <p:cNvSpPr/>
-          <p:nvPr/>
-        </p:nvSpPr>
-        <p:spPr>
-          <a:xfrm>
-            <a:off x="658368" y="2532888"/>
-            <a:ext cx="7863840" cy="548640"/>
-          </a:xfrm>
-          <a:prstGeom prst="rect">
-            <a:avLst/>
-          </a:prstGeom>
-          <a:noFill/>
-          <a:ln/>
-        </p:spPr>
-        <p:txBody>
-          <a:bodyPr wrap="square" rtlCol="0" anchor="t"/>
-          <a:lstStyle/>
-          <a:p>
-            <a:pPr algn="l" indent="0" marL="0">
-              <a:buNone/>
-            </a:pPr>
-            <a:r>
-              <a:rPr lang="en-US" sz="1300" dirty="0">
-                <a:solidFill>
-                  <a:srgbClr val="2D3748"/>
-                </a:solidFill>
-                <a:latin typeface="Arial" pitchFamily="34" charset="0"/>
-                <a:ea typeface="Arial" pitchFamily="34" charset="-122"/>
-                <a:cs typeface="Arial" pitchFamily="34" charset="-120"/>
-              </a:rPr>
-              <a:t>Onjuist: Pareto zegt niets over verdeling. Een situatie kan Pareto-efficiënt zijn terwijl één persoon alles heeft.</a:t>
-            </a:r>
-            <a:endParaRPr lang="en-US" sz="1300" dirty="0"/>
-          </a:p>
-        </p:txBody>
-      </p:sp>
-      <p:sp>
-        <p:nvSpPr>
-          <p:cNvPr id="11" name="Shape 9"/>
-          <p:cNvSpPr/>
-          <p:nvPr/>
-        </p:nvSpPr>
-        <p:spPr>
-          <a:xfrm>
-            <a:off x="457200" y="3337560"/>
-            <a:ext cx="8229600" cy="1005840"/>
-          </a:xfrm>
-          <a:prstGeom prst="rect">
-            <a:avLst>
-              <a:gd name="adj" fmla="val 4545"/>
-            </a:avLst>
-          </a:prstGeom>
-          <a:solidFill>
-            <a:srgbClr val="FDE8E8"/>
-          </a:solidFill>
-          <a:ln/>
-          <a:effectLst>
-            <a:outerShdw sx="100000" sy="100000" kx="0" ky="0" algn="bl" rotWithShape="0" blurRad="76200" dist="25400" dir="8100000">
-              <a:srgbClr val="000000">
-                <a:alpha val="10000"/>
-              </a:srgbClr>
-            </a:outerShdw>
-          </a:effectLst>
-        </p:spPr>
-        <p:txBody>
-          <a:bodyPr/>
-          <a:p/>
-        </p:txBody>
-      </p:sp>
-      <p:sp>
-        <p:nvSpPr>
-          <p:cNvPr id="12" name="Shape 10"/>
-          <p:cNvSpPr/>
-          <p:nvPr/>
-        </p:nvSpPr>
-        <p:spPr>
-          <a:xfrm>
-            <a:off x="457200" y="3337560"/>
-            <a:ext cx="54864" cy="1005840"/>
-          </a:xfrm>
-          <a:prstGeom prst="rect">
-            <a:avLst/>
-          </a:prstGeom>
-          <a:solidFill>
-            <a:srgbClr val="D9534F"/>
-          </a:solidFill>
-          <a:ln/>
-        </p:spPr>
-        <p:txBody>
-          <a:bodyPr/>
-          <a:p/>
-        </p:txBody>
-      </p:sp>
-      <p:sp>
-        <p:nvSpPr>
-          <p:cNvPr id="13" name="Text 11"/>
-          <p:cNvSpPr/>
-          <p:nvPr/>
-        </p:nvSpPr>
-        <p:spPr>
-          <a:xfrm>
-            <a:off x="658368" y="3410712"/>
-            <a:ext cx="7863840" cy="320040"/>
-          </a:xfrm>
-          <a:prstGeom prst="rect">
-            <a:avLst/>
-          </a:prstGeom>
-          <a:noFill/>
-          <a:ln/>
-        </p:spPr>
-        <p:txBody>
-          <a:bodyPr wrap="square" rtlCol="0" anchor="t"/>
-          <a:lstStyle/>
-          <a:p>
-            <a:pPr algn="l" indent="0" marL="0">
-              <a:buNone/>
-            </a:pPr>
-            <a:r>
-              <a:rPr lang="en-US" sz="1400" b="1" dirty="0">
-                <a:solidFill>
-                  <a:srgbClr val="D9534F"/>
-                </a:solidFill>
-                <a:latin typeface="Arial" pitchFamily="34" charset="0"/>
-                <a:ea typeface="Arial" pitchFamily="34" charset="-122"/>
-                <a:cs typeface="Arial" pitchFamily="34" charset="-120"/>
-              </a:rPr>
-              <a:t>"Harbergerdriehoek = het hele welvaartsverlies"</a:t>
-            </a:r>
-            <a:endParaRPr lang="en-US" sz="1400" dirty="0"/>
-          </a:p>
-        </p:txBody>
-      </p:sp>
-      <p:sp>
-        <p:nvSpPr>
-          <p:cNvPr id="14" name="Text 12"/>
-          <p:cNvSpPr/>
-          <p:nvPr/>
-        </p:nvSpPr>
-        <p:spPr>
-          <a:xfrm>
-            <a:off x="658368" y="3721608"/>
-            <a:ext cx="7863840" cy="548640"/>
-          </a:xfrm>
-          <a:prstGeom prst="rect">
-            <a:avLst/>
-          </a:prstGeom>
-          <a:noFill/>
-          <a:ln/>
-        </p:spPr>
-        <p:txBody>
-          <a:bodyPr wrap="square" rtlCol="0" anchor="t"/>
-          <a:lstStyle/>
-          <a:p>
-            <a:pPr algn="l" indent="0" marL="0">
-              <a:buNone/>
-            </a:pPr>
-            <a:r>
-              <a:rPr lang="en-US" sz="1300" dirty="0">
-                <a:solidFill>
-                  <a:srgbClr val="2D3748"/>
-                </a:solidFill>
-                <a:latin typeface="Arial" pitchFamily="34" charset="0"/>
-                <a:ea typeface="Arial" pitchFamily="34" charset="-122"/>
-                <a:cs typeface="Arial" pitchFamily="34" charset="-120"/>
-              </a:rPr>
-              <a:t>De Harbergerdriehoek meet het allocatieve verlies. Er kan ook dynamisch verlies zijn (minder innovatie).</a:t>
-            </a:r>
-            <a:endParaRPr lang="en-US" sz="1300" dirty="0"/>
-          </a:p>
-        </p:txBody>
-      </p:sp>
-    </p:spTree>
-  </p:cSld>
-  <p:clrMapOvr>
-    <a:masterClrMapping/>
-  </p:clrMapOvr>
-</p:sld>
-</file>
-
-<file path=ppt/slides/slide12.xml><?xml version="1.0" encoding="utf-8"?>
-<p:sld xmlns:a="http://schemas.openxmlformats.org/drawingml/2006/main" xmlns:r="http://schemas.openxmlformats.org/officeDocument/2006/relationships" xmlns:p="http://schemas.openxmlformats.org/presentationml/2006/main">
-  <p:cSld name="Slide 12">
-    <p:spTree>
-      <p:nvGrpSpPr>
-        <p:cNvPr id="1" name=""/>
-        <p:cNvGrpSpPr/>
-        <p:nvPr/>
-      </p:nvGrpSpPr>
-      <p:grpSpPr>
-        <a:xfrm>
-          <a:off x="0" y="0"/>
-          <a:ext cx="0" cy="0"/>
-          <a:chOff x="0" y="0"/>
-          <a:chExt cx="0" cy="0"/>
-        </a:xfrm>
-      </p:grpSpPr>
-      <p:sp>
-        <p:nvSpPr>
-          <p:cNvPr id="2" name="Text 0"/>
-          <p:cNvSpPr/>
-          <p:nvPr/>
-        </p:nvSpPr>
-        <p:spPr>
-          <a:xfrm>
             <a:off x="640080" y="457200"/>
             <a:ext cx="7863840" cy="640080"/>
           </a:xfrm>
@@ -3280,7 +2566,7 @@
           <a:bodyPr wrap="square" rtlCol="0" anchor="t"/>
           <a:lstStyle/>
           <a:p>
-            <a:pPr algn="l" marL="342900" indent="-342900">
+            <a:pPr marL="342900" indent="-342900">
               <a:lnSpc>
                 <a:spcPct val="160000"/>
               </a:lnSpc>
@@ -3301,9 +2587,10 @@
               </a:rPr>
               <a:t>Totaal surplus (TS) = CS + PS → maatstaf voor efficiëntie</a:t>
             </a:r>
-          </a:p>
-          <a:p>
-            <a:pPr algn="l" marL="342900" indent="-342900">
+            <a:endParaRPr lang="en-US" sz="1500" dirty="0"/>
+          </a:p>
+          <a:p>
+            <a:pPr marL="342900" indent="-342900">
               <a:lnSpc>
                 <a:spcPct val="160000"/>
               </a:lnSpc>
@@ -3324,9 +2611,10 @@
               </a:rPr>
               <a:t>Bij volkomen concurrentie is TS maximaal (P = MK)</a:t>
             </a:r>
-          </a:p>
-          <a:p>
-            <a:pPr algn="l" marL="342900" indent="-342900">
+            <a:endParaRPr lang="en-US" sz="1500" dirty="0"/>
+          </a:p>
+          <a:p>
+            <a:pPr marL="342900" indent="-342900">
               <a:lnSpc>
                 <a:spcPct val="160000"/>
               </a:lnSpc>
@@ -3347,9 +2635,10 @@
               </a:rPr>
               <a:t>Monopolie: lagere Q, hogere P → Harbergerdriehoek = welvaartsverlies</a:t>
             </a:r>
-          </a:p>
-          <a:p>
-            <a:pPr algn="l" marL="342900" indent="-342900">
+            <a:endParaRPr lang="en-US" sz="1500" dirty="0"/>
+          </a:p>
+          <a:p>
+            <a:pPr marL="342900" indent="-342900">
               <a:lnSpc>
                 <a:spcPct val="160000"/>
               </a:lnSpc>
@@ -3368,11 +2657,12 @@
                 <a:ea typeface="Arial" pitchFamily="34" charset="-122"/>
                 <a:cs typeface="Arial" pitchFamily="34" charset="-120"/>
               </a:rPr>
-              <a:t>Hoge toetredingsdrempels houden inefficiëntie in stand</a:t>
-            </a:r>
-          </a:p>
-          <a:p>
-            <a:pPr algn="l" marL="342900" indent="-342900">
+              <a:t>Harbergerdriehoek = ½ × ΔQ × (Pₘ − MKₘ) — surplus dat niemand krijgt</a:t>
+            </a:r>
+            <a:endParaRPr lang="en-US" sz="1500" dirty="0"/>
+          </a:p>
+          <a:p>
+            <a:pPr marL="342900" indent="-342900">
               <a:lnSpc>
                 <a:spcPct val="160000"/>
               </a:lnSpc>
@@ -3391,8 +2681,33 @@
                 <a:ea typeface="Arial" pitchFamily="34" charset="-122"/>
                 <a:cs typeface="Arial" pitchFamily="34" charset="-120"/>
               </a:rPr>
+              <a:t>Hoge toetredingsdrempels houden inefficiëntie in stand</a:t>
+            </a:r>
+            <a:endParaRPr lang="en-US" sz="1500" dirty="0"/>
+          </a:p>
+          <a:p>
+            <a:pPr marL="342900" indent="-342900">
+              <a:lnSpc>
+                <a:spcPct val="160000"/>
+              </a:lnSpc>
+              <a:spcAft>
+                <a:spcPts val="600"/>
+              </a:spcAft>
+              <a:buSzPct val="100000"/>
+              <a:buChar char="•"/>
+            </a:pPr>
+            <a:r>
+              <a:rPr lang="en-US" sz="1500" dirty="0">
+                <a:solidFill>
+                  <a:srgbClr val="FFFFFF"/>
+                </a:solidFill>
+                <a:latin typeface="Arial" pitchFamily="34" charset="0"/>
+                <a:ea typeface="Arial" pitchFamily="34" charset="-122"/>
+                <a:cs typeface="Arial" pitchFamily="34" charset="-120"/>
+              </a:rPr>
               <a:t>Pareto-efficiënt: niemand erop vooruit zonder dat iemand erop achteruitgaat</a:t>
             </a:r>
+            <a:endParaRPr lang="en-US" sz="1500" dirty="0"/>
           </a:p>
         </p:txBody>
       </p:sp>
@@ -3468,16 +2783,16 @@
         </p:nvSpPr>
         <p:spPr>
           <a:xfrm>
-            <a:off x="457200" y="1005840"/>
-            <a:ext cx="2560320" cy="3108960"/>
+            <a:off x="274320" y="914400"/>
+            <a:ext cx="2743200" cy="1828800"/>
           </a:xfrm>
           <a:prstGeom prst="rect">
             <a:avLst>
-              <a:gd name="adj" fmla="val 1786"/>
+              <a:gd name="adj" fmla="val 2500"/>
             </a:avLst>
           </a:prstGeom>
           <a:solidFill>
-            <a:srgbClr val="EBF5FB"/>
+            <a:srgbClr val="F9F6F1"/>
           </a:solidFill>
           <a:ln/>
           <a:effectLst>
@@ -3488,10 +2803,6 @@
             </a:outerShdw>
           </a:effectLst>
         </p:spPr>
-        <p:txBody>
-          <a:bodyPr/>
-          <a:p/>
-        </p:txBody>
       </p:sp>
       <p:sp>
         <p:nvSpPr>
@@ -3501,8 +2812,8 @@
         </p:nvSpPr>
         <p:spPr>
           <a:xfrm>
-            <a:off x="457200" y="1005840"/>
-            <a:ext cx="54864" cy="3108960"/>
+            <a:off x="274320" y="914400"/>
+            <a:ext cx="54864" cy="1828800"/>
           </a:xfrm>
           <a:prstGeom prst="rect">
             <a:avLst/>
@@ -3512,10 +2823,6 @@
           </a:solidFill>
           <a:ln/>
         </p:spPr>
-        <p:txBody>
-          <a:bodyPr/>
-          <a:p/>
-        </p:txBody>
       </p:sp>
       <p:sp>
         <p:nvSpPr>
@@ -3525,8 +2832,8 @@
         </p:nvSpPr>
         <p:spPr>
           <a:xfrm>
-            <a:off x="640080" y="1143000"/>
-            <a:ext cx="2240280" cy="502920"/>
+            <a:off x="457200" y="1051560"/>
+            <a:ext cx="2423160" cy="365760"/>
           </a:xfrm>
           <a:prstGeom prst="rect">
             <a:avLst/>
@@ -3542,7 +2849,7 @@
               <a:buNone/>
             </a:pPr>
             <a:r>
-              <a:rPr lang="en-US" sz="2800" b="1" dirty="0">
+              <a:rPr lang="en-US" sz="2000" b="1" dirty="0">
                 <a:solidFill>
                   <a:srgbClr val="1A5276"/>
                 </a:solidFill>
@@ -3552,7 +2859,7 @@
               </a:rPr>
               <a:t>CS</a:t>
             </a:r>
-            <a:endParaRPr lang="en-US" sz="2800" dirty="0"/>
+            <a:endParaRPr lang="en-US" sz="2000" dirty="0"/>
           </a:p>
         </p:txBody>
       </p:sp>
@@ -3564,47 +2871,8 @@
         </p:nvSpPr>
         <p:spPr>
           <a:xfrm>
-            <a:off x="640080" y="1645920"/>
-            <a:ext cx="2240280" cy="320040"/>
-          </a:xfrm>
-          <a:prstGeom prst="rect">
-            <a:avLst/>
-          </a:prstGeom>
-          <a:noFill/>
-          <a:ln/>
-        </p:spPr>
-        <p:txBody>
-          <a:bodyPr wrap="square" rtlCol="0" anchor="t"/>
-          <a:lstStyle/>
-          <a:p>
-            <a:pPr indent="0" marL="0">
-              <a:buNone/>
-            </a:pPr>
-            <a:r>
-              <a:rPr lang="en-US" sz="1300" b="1" dirty="0">
-                <a:solidFill>
-                  <a:srgbClr val="718096"/>
-                </a:solidFill>
-                <a:latin typeface="Arial" pitchFamily="34" charset="0"/>
-                <a:ea typeface="Arial" pitchFamily="34" charset="-122"/>
-                <a:cs typeface="Arial" pitchFamily="34" charset="-120"/>
-              </a:rPr>
-              <a:t>Consumentensurplus</a:t>
-            </a:r>
-            <a:endParaRPr lang="en-US" sz="1300" dirty="0"/>
-          </a:p>
-        </p:txBody>
-      </p:sp>
-      <p:sp>
-        <p:nvSpPr>
-          <p:cNvPr id="7" name="Text 5"/>
-          <p:cNvSpPr/>
-          <p:nvPr/>
-        </p:nvSpPr>
-        <p:spPr>
-          <a:xfrm>
-            <a:off x="640080" y="2057400"/>
-            <a:ext cx="2240280" cy="1828800"/>
+            <a:off x="457200" y="1463040"/>
+            <a:ext cx="2423160" cy="1143000"/>
           </a:xfrm>
           <a:prstGeom prst="rect">
             <a:avLst/>
@@ -3618,11 +2886,37 @@
           <a:p>
             <a:pPr algn="l" indent="0" marL="0">
               <a:lnSpc>
-                <a:spcPct val="120000"/>
+                <a:spcPct val="115000"/>
               </a:lnSpc>
               <a:buNone/>
             </a:pPr>
             <a:r>
+              <a:rPr lang="en-US" sz="1400" b="1" dirty="0">
+                <a:solidFill>
+                  <a:srgbClr val="2D3748"/>
+                </a:solidFill>
+                <a:latin typeface="Arial" pitchFamily="34" charset="0"/>
+                <a:ea typeface="Arial" pitchFamily="34" charset="-122"/>
+                <a:cs typeface="Arial" pitchFamily="34" charset="-120"/>
+              </a:rPr>
+              <a:t>Consumentensurplus</a:t>
+            </a:r>
+            <a:pPr algn="l" indent="0" marL="0">
+              <a:lnSpc>
+                <a:spcPct val="115000"/>
+              </a:lnSpc>
+              <a:buNone/>
+            </a:pPr>
+            <a:endParaRPr lang="en-US" sz="1400" dirty="0"/>
+          </a:p>
+          <a:p>
+            <a:pPr algn="l" indent="0" marL="0">
+              <a:lnSpc>
+                <a:spcPct val="115000"/>
+              </a:lnSpc>
+              <a:buNone/>
+            </a:pPr>
+            <a:r>
               <a:rPr lang="en-US" sz="1300" dirty="0">
                 <a:solidFill>
                   <a:srgbClr val="2D3748"/>
@@ -3633,28 +2927,28 @@
               </a:rPr>
               <a:t>Verschil tussen wat consumenten willen betalen en wat ze daadwerkelijk betalen</a:t>
             </a:r>
-            <a:endParaRPr lang="en-US" sz="1300" dirty="0"/>
-          </a:p>
-        </p:txBody>
-      </p:sp>
-      <p:sp>
-        <p:nvSpPr>
-          <p:cNvPr id="8" name="Shape 6"/>
-          <p:cNvSpPr/>
-          <p:nvPr/>
-        </p:nvSpPr>
-        <p:spPr>
-          <a:xfrm>
-            <a:off x="3291840" y="1005840"/>
-            <a:ext cx="2560320" cy="3108960"/>
+            <a:endParaRPr lang="en-US" sz="1400" dirty="0"/>
+          </a:p>
+        </p:txBody>
+      </p:sp>
+      <p:sp>
+        <p:nvSpPr>
+          <p:cNvPr id="7" name="Shape 5"/>
+          <p:cNvSpPr/>
+          <p:nvPr/>
+        </p:nvSpPr>
+        <p:spPr>
+          <a:xfrm>
+            <a:off x="3200400" y="914400"/>
+            <a:ext cx="2743200" cy="1828800"/>
           </a:xfrm>
           <a:prstGeom prst="rect">
             <a:avLst>
-              <a:gd name="adj" fmla="val 1786"/>
+              <a:gd name="adj" fmla="val 2500"/>
             </a:avLst>
           </a:prstGeom>
           <a:solidFill>
-            <a:srgbClr val="FEF5E7"/>
+            <a:srgbClr val="F9F6F1"/>
           </a:solidFill>
           <a:ln/>
           <a:effectLst>
@@ -3665,33 +2959,64 @@
             </a:outerShdw>
           </a:effectLst>
         </p:spPr>
-        <p:txBody>
-          <a:bodyPr/>
-          <a:p/>
-        </p:txBody>
-      </p:sp>
-      <p:sp>
-        <p:nvSpPr>
-          <p:cNvPr id="9" name="Shape 7"/>
-          <p:cNvSpPr/>
-          <p:nvPr/>
-        </p:nvSpPr>
-        <p:spPr>
-          <a:xfrm>
-            <a:off x="3291840" y="1005840"/>
-            <a:ext cx="54864" cy="3108960"/>
+      </p:sp>
+      <p:sp>
+        <p:nvSpPr>
+          <p:cNvPr id="8" name="Shape 6"/>
+          <p:cNvSpPr/>
+          <p:nvPr/>
+        </p:nvSpPr>
+        <p:spPr>
+          <a:xfrm>
+            <a:off x="3200400" y="914400"/>
+            <a:ext cx="54864" cy="1828800"/>
           </a:xfrm>
           <a:prstGeom prst="rect">
             <a:avLst/>
           </a:prstGeom>
           <a:solidFill>
-            <a:srgbClr val="E67E22"/>
+            <a:srgbClr val="1E8449"/>
           </a:solidFill>
           <a:ln/>
         </p:spPr>
-        <p:txBody>
-          <a:bodyPr/>
-          <a:p/>
+      </p:sp>
+      <p:sp>
+        <p:nvSpPr>
+          <p:cNvPr id="9" name="Text 7"/>
+          <p:cNvSpPr/>
+          <p:nvPr/>
+        </p:nvSpPr>
+        <p:spPr>
+          <a:xfrm>
+            <a:off x="3383280" y="1051560"/>
+            <a:ext cx="2423160" cy="365760"/>
+          </a:xfrm>
+          <a:prstGeom prst="rect">
+            <a:avLst/>
+          </a:prstGeom>
+          <a:noFill/>
+          <a:ln/>
+        </p:spPr>
+        <p:txBody>
+          <a:bodyPr wrap="square" rtlCol="0" anchor="t"/>
+          <a:lstStyle/>
+          <a:p>
+            <a:pPr indent="0" marL="0">
+              <a:buNone/>
+            </a:pPr>
+            <a:r>
+              <a:rPr lang="en-US" sz="2000" b="1" dirty="0">
+                <a:solidFill>
+                  <a:srgbClr val="1E8449"/>
+                </a:solidFill>
+                <a:latin typeface="Arial" pitchFamily="34" charset="0"/>
+                <a:ea typeface="Arial" pitchFamily="34" charset="-122"/>
+                <a:cs typeface="Arial" pitchFamily="34" charset="-120"/>
+              </a:rPr>
+              <a:t>PS</a:t>
+            </a:r>
+            <a:endParaRPr lang="en-US" sz="2000" dirty="0"/>
+          </a:p>
         </p:txBody>
       </p:sp>
       <p:sp>
@@ -3702,86 +3027,8 @@
         </p:nvSpPr>
         <p:spPr>
           <a:xfrm>
-            <a:off x="3474720" y="1143000"/>
-            <a:ext cx="2240280" cy="502920"/>
-          </a:xfrm>
-          <a:prstGeom prst="rect">
-            <a:avLst/>
-          </a:prstGeom>
-          <a:noFill/>
-          <a:ln/>
-        </p:spPr>
-        <p:txBody>
-          <a:bodyPr wrap="square" rtlCol="0" anchor="t"/>
-          <a:lstStyle/>
-          <a:p>
-            <a:pPr indent="0" marL="0">
-              <a:buNone/>
-            </a:pPr>
-            <a:r>
-              <a:rPr lang="en-US" sz="2800" b="1" dirty="0">
-                <a:solidFill>
-                  <a:srgbClr val="E67E22"/>
-                </a:solidFill>
-                <a:latin typeface="Arial" pitchFamily="34" charset="0"/>
-                <a:ea typeface="Arial" pitchFamily="34" charset="-122"/>
-                <a:cs typeface="Arial" pitchFamily="34" charset="-120"/>
-              </a:rPr>
-              <a:t>PS</a:t>
-            </a:r>
-            <a:endParaRPr lang="en-US" sz="2800" dirty="0"/>
-          </a:p>
-        </p:txBody>
-      </p:sp>
-      <p:sp>
-        <p:nvSpPr>
-          <p:cNvPr id="11" name="Text 9"/>
-          <p:cNvSpPr/>
-          <p:nvPr/>
-        </p:nvSpPr>
-        <p:spPr>
-          <a:xfrm>
-            <a:off x="3474720" y="1645920"/>
-            <a:ext cx="2240280" cy="320040"/>
-          </a:xfrm>
-          <a:prstGeom prst="rect">
-            <a:avLst/>
-          </a:prstGeom>
-          <a:noFill/>
-          <a:ln/>
-        </p:spPr>
-        <p:txBody>
-          <a:bodyPr wrap="square" rtlCol="0" anchor="t"/>
-          <a:lstStyle/>
-          <a:p>
-            <a:pPr indent="0" marL="0">
-              <a:buNone/>
-            </a:pPr>
-            <a:r>
-              <a:rPr lang="en-US" sz="1300" b="1" dirty="0">
-                <a:solidFill>
-                  <a:srgbClr val="718096"/>
-                </a:solidFill>
-                <a:latin typeface="Arial" pitchFamily="34" charset="0"/>
-                <a:ea typeface="Arial" pitchFamily="34" charset="-122"/>
-                <a:cs typeface="Arial" pitchFamily="34" charset="-120"/>
-              </a:rPr>
-              <a:t>Producentensurplus</a:t>
-            </a:r>
-            <a:endParaRPr lang="en-US" sz="1300" dirty="0"/>
-          </a:p>
-        </p:txBody>
-      </p:sp>
-      <p:sp>
-        <p:nvSpPr>
-          <p:cNvPr id="12" name="Text 10"/>
-          <p:cNvSpPr/>
-          <p:nvPr/>
-        </p:nvSpPr>
-        <p:spPr>
-          <a:xfrm>
-            <a:off x="3474720" y="2057400"/>
-            <a:ext cx="2240280" cy="1828800"/>
+            <a:off x="3383280" y="1463040"/>
+            <a:ext cx="2423160" cy="1143000"/>
           </a:xfrm>
           <a:prstGeom prst="rect">
             <a:avLst/>
@@ -3795,11 +3042,37 @@
           <a:p>
             <a:pPr algn="l" indent="0" marL="0">
               <a:lnSpc>
-                <a:spcPct val="120000"/>
+                <a:spcPct val="115000"/>
               </a:lnSpc>
               <a:buNone/>
             </a:pPr>
             <a:r>
+              <a:rPr lang="en-US" sz="1400" b="1" dirty="0">
+                <a:solidFill>
+                  <a:srgbClr val="2D3748"/>
+                </a:solidFill>
+                <a:latin typeface="Arial" pitchFamily="34" charset="0"/>
+                <a:ea typeface="Arial" pitchFamily="34" charset="-122"/>
+                <a:cs typeface="Arial" pitchFamily="34" charset="-120"/>
+              </a:rPr>
+              <a:t>Producentensurplus</a:t>
+            </a:r>
+            <a:pPr algn="l" indent="0" marL="0">
+              <a:lnSpc>
+                <a:spcPct val="115000"/>
+              </a:lnSpc>
+              <a:buNone/>
+            </a:pPr>
+            <a:endParaRPr lang="en-US" sz="1400" dirty="0"/>
+          </a:p>
+          <a:p>
+            <a:pPr algn="l" indent="0" marL="0">
+              <a:lnSpc>
+                <a:spcPct val="115000"/>
+              </a:lnSpc>
+              <a:buNone/>
+            </a:pPr>
+            <a:r>
               <a:rPr lang="en-US" sz="1300" dirty="0">
                 <a:solidFill>
                   <a:srgbClr val="2D3748"/>
@@ -3810,28 +3083,28 @@
               </a:rPr>
               <a:t>Verschil tussen de ontvangen prijs en de minimale prijs waarvoor men wil produceren</a:t>
             </a:r>
-            <a:endParaRPr lang="en-US" sz="1300" dirty="0"/>
-          </a:p>
-        </p:txBody>
-      </p:sp>
-      <p:sp>
-        <p:nvSpPr>
-          <p:cNvPr id="13" name="Shape 11"/>
-          <p:cNvSpPr/>
-          <p:nvPr/>
-        </p:nvSpPr>
-        <p:spPr>
-          <a:xfrm>
-            <a:off x="6126480" y="1005840"/>
-            <a:ext cx="2560320" cy="3108960"/>
+            <a:endParaRPr lang="en-US" sz="1400" dirty="0"/>
+          </a:p>
+        </p:txBody>
+      </p:sp>
+      <p:sp>
+        <p:nvSpPr>
+          <p:cNvPr id="11" name="Shape 9"/>
+          <p:cNvSpPr/>
+          <p:nvPr/>
+        </p:nvSpPr>
+        <p:spPr>
+          <a:xfrm>
+            <a:off x="6126480" y="914400"/>
+            <a:ext cx="2743200" cy="1828800"/>
           </a:xfrm>
           <a:prstGeom prst="rect">
             <a:avLst>
-              <a:gd name="adj" fmla="val 1786"/>
+              <a:gd name="adj" fmla="val 2500"/>
             </a:avLst>
           </a:prstGeom>
           <a:solidFill>
-            <a:srgbClr val="E8F8F0"/>
+            <a:srgbClr val="F9F6F1"/>
           </a:solidFill>
           <a:ln/>
           <a:effectLst>
@@ -3842,45 +3115,37 @@
             </a:outerShdw>
           </a:effectLst>
         </p:spPr>
-        <p:txBody>
-          <a:bodyPr/>
-          <a:p/>
-        </p:txBody>
-      </p:sp>
-      <p:sp>
-        <p:nvSpPr>
-          <p:cNvPr id="14" name="Shape 12"/>
-          <p:cNvSpPr/>
-          <p:nvPr/>
-        </p:nvSpPr>
-        <p:spPr>
-          <a:xfrm>
-            <a:off x="6126480" y="1005840"/>
-            <a:ext cx="54864" cy="3108960"/>
+      </p:sp>
+      <p:sp>
+        <p:nvSpPr>
+          <p:cNvPr id="12" name="Shape 10"/>
+          <p:cNvSpPr/>
+          <p:nvPr/>
+        </p:nvSpPr>
+        <p:spPr>
+          <a:xfrm>
+            <a:off x="6126480" y="914400"/>
+            <a:ext cx="54864" cy="1828800"/>
           </a:xfrm>
           <a:prstGeom prst="rect">
             <a:avLst/>
           </a:prstGeom>
           <a:solidFill>
-            <a:srgbClr val="1E8449"/>
+            <a:srgbClr val="E67E22"/>
           </a:solidFill>
           <a:ln/>
         </p:spPr>
-        <p:txBody>
-          <a:bodyPr/>
-          <a:p/>
-        </p:txBody>
-      </p:sp>
-      <p:sp>
-        <p:nvSpPr>
-          <p:cNvPr id="15" name="Text 13"/>
-          <p:cNvSpPr/>
-          <p:nvPr/>
-        </p:nvSpPr>
-        <p:spPr>
-          <a:xfrm>
-            <a:off x="6309360" y="1143000"/>
-            <a:ext cx="2240280" cy="502920"/>
+      </p:sp>
+      <p:sp>
+        <p:nvSpPr>
+          <p:cNvPr id="13" name="Text 11"/>
+          <p:cNvSpPr/>
+          <p:nvPr/>
+        </p:nvSpPr>
+        <p:spPr>
+          <a:xfrm>
+            <a:off x="6309360" y="1051560"/>
+            <a:ext cx="2423160" cy="365760"/>
           </a:xfrm>
           <a:prstGeom prst="rect">
             <a:avLst/>
@@ -3896,9 +3161,9 @@
               <a:buNone/>
             </a:pPr>
             <a:r>
-              <a:rPr lang="en-US" sz="2800" b="1" dirty="0">
-                <a:solidFill>
-                  <a:srgbClr val="1E8449"/>
+              <a:rPr lang="en-US" sz="2000" b="1" dirty="0">
+                <a:solidFill>
+                  <a:srgbClr val="E67E22"/>
                 </a:solidFill>
                 <a:latin typeface="Arial" pitchFamily="34" charset="0"/>
                 <a:ea typeface="Arial" pitchFamily="34" charset="-122"/>
@@ -3906,59 +3171,20 @@
               </a:rPr>
               <a:t>TS</a:t>
             </a:r>
-            <a:endParaRPr lang="en-US" sz="2800" dirty="0"/>
-          </a:p>
-        </p:txBody>
-      </p:sp>
-      <p:sp>
-        <p:nvSpPr>
-          <p:cNvPr id="16" name="Text 14"/>
-          <p:cNvSpPr/>
-          <p:nvPr/>
-        </p:nvSpPr>
-        <p:spPr>
-          <a:xfrm>
-            <a:off x="6309360" y="1645920"/>
-            <a:ext cx="2240280" cy="320040"/>
-          </a:xfrm>
-          <a:prstGeom prst="rect">
-            <a:avLst/>
-          </a:prstGeom>
-          <a:noFill/>
-          <a:ln/>
-        </p:spPr>
-        <p:txBody>
-          <a:bodyPr wrap="square" rtlCol="0" anchor="t"/>
-          <a:lstStyle/>
-          <a:p>
-            <a:pPr indent="0" marL="0">
-              <a:buNone/>
-            </a:pPr>
-            <a:r>
-              <a:rPr lang="en-US" sz="1300" b="1" dirty="0">
-                <a:solidFill>
-                  <a:srgbClr val="718096"/>
-                </a:solidFill>
-                <a:latin typeface="Arial" pitchFamily="34" charset="0"/>
-                <a:ea typeface="Arial" pitchFamily="34" charset="-122"/>
-                <a:cs typeface="Arial" pitchFamily="34" charset="-120"/>
-              </a:rPr>
-              <a:t>Totaal surplus</a:t>
-            </a:r>
-            <a:endParaRPr lang="en-US" sz="1300" dirty="0"/>
-          </a:p>
-        </p:txBody>
-      </p:sp>
-      <p:sp>
-        <p:nvSpPr>
-          <p:cNvPr id="17" name="Text 15"/>
-          <p:cNvSpPr/>
-          <p:nvPr/>
-        </p:nvSpPr>
-        <p:spPr>
-          <a:xfrm>
-            <a:off x="6309360" y="2057400"/>
-            <a:ext cx="2240280" cy="1828800"/>
+            <a:endParaRPr lang="en-US" sz="2000" dirty="0"/>
+          </a:p>
+        </p:txBody>
+      </p:sp>
+      <p:sp>
+        <p:nvSpPr>
+          <p:cNvPr id="14" name="Text 12"/>
+          <p:cNvSpPr/>
+          <p:nvPr/>
+        </p:nvSpPr>
+        <p:spPr>
+          <a:xfrm>
+            <a:off x="6309360" y="1463040"/>
+            <a:ext cx="2423160" cy="1143000"/>
           </a:xfrm>
           <a:prstGeom prst="rect">
             <a:avLst/>
@@ -3972,12 +3198,12 @@
           <a:p>
             <a:pPr algn="l" indent="0" marL="0">
               <a:lnSpc>
-                <a:spcPct val="120000"/>
+                <a:spcPct val="115000"/>
               </a:lnSpc>
               <a:buNone/>
             </a:pPr>
             <a:r>
-              <a:rPr lang="en-US" sz="1300" dirty="0">
+              <a:rPr lang="en-US" sz="1400" b="1" dirty="0">
                 <a:solidFill>
                   <a:srgbClr val="2D3748"/>
                 </a:solidFill>
@@ -3985,17 +3211,23 @@
                 <a:ea typeface="Arial" pitchFamily="34" charset="-122"/>
                 <a:cs typeface="Arial" pitchFamily="34" charset="-120"/>
               </a:rPr>
-              <a:t>TS = CS + PS</a:t>
-            </a:r>
-            <a:endParaRPr lang="en-US" sz="1300" dirty="0"/>
-          </a:p>
-          <a:p>
+              <a:t>Totaal surplus</a:t>
+            </a:r>
             <a:pPr algn="l" indent="0" marL="0">
               <a:lnSpc>
-                <a:spcPct val="120000"/>
+                <a:spcPct val="115000"/>
               </a:lnSpc>
               <a:buNone/>
             </a:pPr>
+            <a:endParaRPr lang="en-US" sz="1400" dirty="0"/>
+          </a:p>
+          <a:p>
+            <a:pPr algn="l" indent="0" marL="0">
+              <a:lnSpc>
+                <a:spcPct val="115000"/>
+              </a:lnSpc>
+              <a:buNone/>
+            </a:pPr>
             <a:r>
               <a:rPr lang="en-US" sz="1300" dirty="0">
                 <a:solidFill>
@@ -4005,22 +3237,42 @@
                 <a:ea typeface="Arial" pitchFamily="34" charset="-122"/>
                 <a:cs typeface="Arial" pitchFamily="34" charset="-120"/>
               </a:rPr>
+              <a:t>TS = CS + PS</a:t>
+            </a:r>
+            <a:endParaRPr lang="en-US" sz="1400" dirty="0"/>
+          </a:p>
+          <a:p>
+            <a:pPr algn="l" indent="0" marL="0">
+              <a:lnSpc>
+                <a:spcPct val="115000"/>
+              </a:lnSpc>
+              <a:buNone/>
+            </a:pPr>
+            <a:r>
+              <a:rPr lang="en-US" sz="1300" dirty="0">
+                <a:solidFill>
+                  <a:srgbClr val="2D3748"/>
+                </a:solidFill>
+                <a:latin typeface="Arial" pitchFamily="34" charset="0"/>
+                <a:ea typeface="Arial" pitchFamily="34" charset="-122"/>
+                <a:cs typeface="Arial" pitchFamily="34" charset="-120"/>
+              </a:rPr>
               <a:t>Maatstaf voor de totale welvaart op een markt</a:t>
             </a:r>
-            <a:endParaRPr lang="en-US" sz="1300" dirty="0"/>
-          </a:p>
-        </p:txBody>
-      </p:sp>
-      <p:sp>
-        <p:nvSpPr>
-          <p:cNvPr id="18" name="Text 16"/>
-          <p:cNvSpPr/>
-          <p:nvPr/>
-        </p:nvSpPr>
-        <p:spPr>
-          <a:xfrm>
-            <a:off x="457200" y="4297680"/>
-            <a:ext cx="8229600" cy="365760"/>
+            <a:endParaRPr lang="en-US" sz="1400" dirty="0"/>
+          </a:p>
+        </p:txBody>
+      </p:sp>
+      <p:sp>
+        <p:nvSpPr>
+          <p:cNvPr id="15" name="Text 13"/>
+          <p:cNvSpPr/>
+          <p:nvPr/>
+        </p:nvSpPr>
+        <p:spPr>
+          <a:xfrm>
+            <a:off x="457200" y="3200400"/>
+            <a:ext cx="8229600" cy="457200"/>
           </a:xfrm>
           <a:prstGeom prst="rect">
             <a:avLst/>
@@ -4036,9 +3288,9 @@
               <a:buNone/>
             </a:pPr>
             <a:r>
-              <a:rPr lang="en-US" sz="1300" b="1" i="1" dirty="0">
-                <a:solidFill>
-                  <a:srgbClr val="1A5276"/>
+              <a:rPr lang="en-US" sz="1600" b="1" dirty="0">
+                <a:solidFill>
+                  <a:srgbClr val="2D3748"/>
                 </a:solidFill>
                 <a:latin typeface="Arial" pitchFamily="34" charset="0"/>
                 <a:ea typeface="Arial" pitchFamily="34" charset="-122"/>
@@ -4046,7 +3298,7 @@
               </a:rPr>
               <a:t>Hoe groter het totaal surplus, hoe efficiënter de markt</a:t>
             </a:r>
-            <a:endParaRPr lang="en-US" sz="1300" dirty="0"/>
+            <a:endParaRPr lang="en-US" sz="1600" dirty="0"/>
           </a:p>
         </p:txBody>
       </p:sp>
@@ -4108,53 +3360,88 @@
                 <a:ea typeface="Arial" pitchFamily="34" charset="-122"/>
                 <a:cs typeface="Arial" pitchFamily="34" charset="-120"/>
               </a:rPr>
-              <a:t>Surplus: volkomen concurrentie</a:t>
+              <a:t>Surplus bij volkomen concurrentie</a:t>
             </a:r>
             <a:endParaRPr lang="en-US" sz="2400" dirty="0"/>
           </a:p>
         </p:txBody>
       </p:sp>
-      <p:sp>
-        <p:nvSpPr>
-          <p:cNvPr id="3" name="Shape 1"/>
-          <p:cNvSpPr/>
-          <p:nvPr/>
-        </p:nvSpPr>
-        <p:spPr>
-          <a:xfrm>
-            <a:off x="457200" y="1005840"/>
-            <a:ext cx="5029200" cy="3657600"/>
+      <p:pic>
+        <p:nvPicPr>
+          <p:cNvPr id="3" name="Image 0" descr="preencoded.png">    </p:cNvPr>
+          <p:cNvPicPr>
+            <a:picLocks noChangeAspect="1"/>
+          </p:cNvPicPr>
+          <p:nvPr/>
+        </p:nvPicPr>
+        <p:blipFill>
+          <a:blip r:embed="rId1"/>
+          <a:stretch>
+            <a:fillRect/>
+          </a:stretch>
+        </p:blipFill>
+        <p:spPr>
+          <a:xfrm>
+            <a:off x="274320" y="777240"/>
+            <a:ext cx="5303520" cy="2651760"/>
+          </a:xfrm>
+          <a:prstGeom prst="rect">
+            <a:avLst/>
+          </a:prstGeom>
+        </p:spPr>
+      </p:pic>
+      <p:sp>
+        <p:nvSpPr>
+          <p:cNvPr id="4" name="Shape 1"/>
+          <p:cNvSpPr/>
+          <p:nvPr/>
+        </p:nvSpPr>
+        <p:spPr>
+          <a:xfrm>
+            <a:off x="5760720" y="822960"/>
+            <a:ext cx="3200400" cy="2560320"/>
           </a:xfrm>
           <a:prstGeom prst="rect">
             <a:avLst>
-              <a:gd name="adj" fmla="val 1250"/>
+              <a:gd name="adj" fmla="val 1786"/>
             </a:avLst>
           </a:prstGeom>
           <a:solidFill>
             <a:srgbClr val="F7F8FA"/>
           </a:solidFill>
-          <a:ln w="6350">
-            <a:solidFill>
-              <a:srgbClr val="CBD5E0"/>
-            </a:solidFill>
-            <a:prstDash val="solid"/>
-          </a:ln>
-        </p:spPr>
-        <p:txBody>
-          <a:bodyPr/>
-          <a:p/>
-        </p:txBody>
-      </p:sp>
-      <p:sp>
-        <p:nvSpPr>
-          <p:cNvPr id="4" name="Text 2"/>
-          <p:cNvSpPr/>
-          <p:nvPr/>
-        </p:nvSpPr>
-        <p:spPr>
-          <a:xfrm>
-            <a:off x="457200" y="2011680"/>
-            <a:ext cx="5029200" cy="1645920"/>
+          <a:ln/>
+        </p:spPr>
+      </p:sp>
+      <p:sp>
+        <p:nvSpPr>
+          <p:cNvPr id="5" name="Shape 2"/>
+          <p:cNvSpPr/>
+          <p:nvPr/>
+        </p:nvSpPr>
+        <p:spPr>
+          <a:xfrm>
+            <a:off x="5760720" y="822960"/>
+            <a:ext cx="45720" cy="2560320"/>
+          </a:xfrm>
+          <a:prstGeom prst="rect">
+            <a:avLst/>
+          </a:prstGeom>
+          <a:solidFill>
+            <a:srgbClr val="1A5276"/>
+          </a:solidFill>
+          <a:ln/>
+        </p:spPr>
+      </p:sp>
+      <p:sp>
+        <p:nvSpPr>
+          <p:cNvPr id="6" name="Text 3"/>
+          <p:cNvSpPr/>
+          <p:nvPr/>
+        </p:nvSpPr>
+        <p:spPr>
+          <a:xfrm>
+            <a:off x="5897880" y="868680"/>
+            <a:ext cx="2926080" cy="320040"/>
           </a:xfrm>
           <a:prstGeom prst="rect">
             <a:avLst/>
@@ -4166,11 +3453,11 @@
           <a:bodyPr wrap="square" rtlCol="0" anchor="ctr"/>
           <a:lstStyle/>
           <a:p>
-            <a:pPr algn="ctr" indent="0" marL="0">
-              <a:buNone/>
-            </a:pPr>
-            <a:r>
-              <a:rPr lang="en-US" sz="1300" i="1" dirty="0">
+            <a:pPr indent="0" marL="0">
+              <a:buNone/>
+            </a:pPr>
+            <a:r>
+              <a:rPr lang="en-US" sz="1100" b="1" dirty="0">
                 <a:solidFill>
                   <a:srgbClr val="718096"/>
                 </a:solidFill>
@@ -4178,16 +3465,52 @@
                 <a:ea typeface="Arial" pitchFamily="34" charset="-122"/>
                 <a:cs typeface="Arial" pitchFamily="34" charset="-120"/>
               </a:rPr>
-              <a:t>Grafiek: V/A-diagram</a:t>
-            </a:r>
-            <a:endParaRPr lang="en-US" sz="1300" dirty="0"/>
-          </a:p>
-          <a:p>
-            <a:pPr algn="ctr" indent="0" marL="0">
-              <a:buNone/>
-            </a:pPr>
-            <a:r>
-              <a:rPr lang="en-US" sz="1300" i="1" dirty="0">
+              <a:t>V: </a:t>
+            </a:r>
+            <a:pPr indent="0" marL="0">
+              <a:buNone/>
+            </a:pPr>
+            <a:r>
+              <a:rPr lang="en-US" sz="1200" dirty="0">
+                <a:solidFill>
+                  <a:srgbClr val="2D3748"/>
+                </a:solidFill>
+                <a:latin typeface="Consolas" pitchFamily="34" charset="0"/>
+                <a:ea typeface="Consolas" pitchFamily="34" charset="-122"/>
+                <a:cs typeface="Consolas" pitchFamily="34" charset="-120"/>
+              </a:rPr>
+              <a:t>P = 60 − Q</a:t>
+            </a:r>
+            <a:endParaRPr lang="en-US" sz="1100" dirty="0"/>
+          </a:p>
+        </p:txBody>
+      </p:sp>
+      <p:sp>
+        <p:nvSpPr>
+          <p:cNvPr id="7" name="Text 4"/>
+          <p:cNvSpPr/>
+          <p:nvPr/>
+        </p:nvSpPr>
+        <p:spPr>
+          <a:xfrm>
+            <a:off x="5897880" y="1188720"/>
+            <a:ext cx="2926080" cy="320040"/>
+          </a:xfrm>
+          <a:prstGeom prst="rect">
+            <a:avLst/>
+          </a:prstGeom>
+          <a:noFill/>
+          <a:ln/>
+        </p:spPr>
+        <p:txBody>
+          <a:bodyPr wrap="square" rtlCol="0" anchor="ctr"/>
+          <a:lstStyle/>
+          <a:p>
+            <a:pPr indent="0" marL="0">
+              <a:buNone/>
+            </a:pPr>
+            <a:r>
+              <a:rPr lang="en-US" sz="1100" b="1" dirty="0">
                 <a:solidFill>
                   <a:srgbClr val="718096"/>
                 </a:solidFill>
@@ -4195,16 +3518,52 @@
                 <a:ea typeface="Arial" pitchFamily="34" charset="-122"/>
                 <a:cs typeface="Arial" pitchFamily="34" charset="-120"/>
               </a:rPr>
-              <a:t>CS = bovenste driehoek</a:t>
-            </a:r>
-            <a:endParaRPr lang="en-US" sz="1300" dirty="0"/>
-          </a:p>
-          <a:p>
-            <a:pPr algn="ctr" indent="0" marL="0">
-              <a:buNone/>
-            </a:pPr>
-            <a:r>
-              <a:rPr lang="en-US" sz="1300" i="1" dirty="0">
+              <a:t>MK: </a:t>
+            </a:r>
+            <a:pPr indent="0" marL="0">
+              <a:buNone/>
+            </a:pPr>
+            <a:r>
+              <a:rPr lang="en-US" sz="1200" dirty="0">
+                <a:solidFill>
+                  <a:srgbClr val="2D3748"/>
+                </a:solidFill>
+                <a:latin typeface="Consolas" pitchFamily="34" charset="0"/>
+                <a:ea typeface="Consolas" pitchFamily="34" charset="-122"/>
+                <a:cs typeface="Consolas" pitchFamily="34" charset="-120"/>
+              </a:rPr>
+              <a:t>P = Q</a:t>
+            </a:r>
+            <a:endParaRPr lang="en-US" sz="1100" dirty="0"/>
+          </a:p>
+        </p:txBody>
+      </p:sp>
+      <p:sp>
+        <p:nvSpPr>
+          <p:cNvPr id="8" name="Text 5"/>
+          <p:cNvSpPr/>
+          <p:nvPr/>
+        </p:nvSpPr>
+        <p:spPr>
+          <a:xfrm>
+            <a:off x="5897880" y="1508760"/>
+            <a:ext cx="2926080" cy="320040"/>
+          </a:xfrm>
+          <a:prstGeom prst="rect">
+            <a:avLst/>
+          </a:prstGeom>
+          <a:noFill/>
+          <a:ln/>
+        </p:spPr>
+        <p:txBody>
+          <a:bodyPr wrap="square" rtlCol="0" anchor="ctr"/>
+          <a:lstStyle/>
+          <a:p>
+            <a:pPr indent="0" marL="0">
+              <a:buNone/>
+            </a:pPr>
+            <a:r>
+              <a:rPr lang="en-US" sz="1100" b="1" dirty="0">
                 <a:solidFill>
                   <a:srgbClr val="718096"/>
                 </a:solidFill>
@@ -4212,16 +3571,52 @@
                 <a:ea typeface="Arial" pitchFamily="34" charset="-122"/>
                 <a:cs typeface="Arial" pitchFamily="34" charset="-120"/>
               </a:rPr>
-              <a:t>PS = onderste driehoek</a:t>
-            </a:r>
-            <a:endParaRPr lang="en-US" sz="1300" dirty="0"/>
-          </a:p>
-          <a:p>
-            <a:pPr algn="ctr" indent="0" marL="0">
-              <a:buNone/>
-            </a:pPr>
-            <a:r>
-              <a:rPr lang="en-US" sz="1300" i="1" dirty="0">
+              <a:t>Evenwicht: </a:t>
+            </a:r>
+            <a:pPr indent="0" marL="0">
+              <a:buNone/>
+            </a:pPr>
+            <a:r>
+              <a:rPr lang="en-US" sz="1200" dirty="0">
+                <a:solidFill>
+                  <a:srgbClr val="2D3748"/>
+                </a:solidFill>
+                <a:latin typeface="Consolas" pitchFamily="34" charset="0"/>
+                <a:ea typeface="Consolas" pitchFamily="34" charset="-122"/>
+                <a:cs typeface="Consolas" pitchFamily="34" charset="-120"/>
+              </a:rPr>
+              <a:t>Q* = 30, P* = 30</a:t>
+            </a:r>
+            <a:endParaRPr lang="en-US" sz="1100" dirty="0"/>
+          </a:p>
+        </p:txBody>
+      </p:sp>
+      <p:sp>
+        <p:nvSpPr>
+          <p:cNvPr id="9" name="Text 6"/>
+          <p:cNvSpPr/>
+          <p:nvPr/>
+        </p:nvSpPr>
+        <p:spPr>
+          <a:xfrm>
+            <a:off x="5897880" y="2148840"/>
+            <a:ext cx="2926080" cy="320040"/>
+          </a:xfrm>
+          <a:prstGeom prst="rect">
+            <a:avLst/>
+          </a:prstGeom>
+          <a:noFill/>
+          <a:ln/>
+        </p:spPr>
+        <p:txBody>
+          <a:bodyPr wrap="square" rtlCol="0" anchor="ctr"/>
+          <a:lstStyle/>
+          <a:p>
+            <a:pPr indent="0" marL="0">
+              <a:buNone/>
+            </a:pPr>
+            <a:r>
+              <a:rPr lang="en-US" sz="1100" b="1" dirty="0">
                 <a:solidFill>
                   <a:srgbClr val="718096"/>
                 </a:solidFill>
@@ -4229,55 +3624,164 @@
                 <a:ea typeface="Arial" pitchFamily="34" charset="-122"/>
                 <a:cs typeface="Arial" pitchFamily="34" charset="-120"/>
               </a:rPr>
-              <a:t>Q* = 30, P* = €30</a:t>
-            </a:r>
-            <a:endParaRPr lang="en-US" sz="1300" dirty="0"/>
-          </a:p>
-        </p:txBody>
-      </p:sp>
-      <p:sp>
-        <p:nvSpPr>
-          <p:cNvPr id="5" name="Shape 3"/>
-          <p:cNvSpPr/>
-          <p:nvPr/>
-        </p:nvSpPr>
-        <p:spPr>
-          <a:xfrm>
-            <a:off x="5760720" y="1005840"/>
-            <a:ext cx="2926080" cy="3657600"/>
+              <a:t>CS = </a:t>
+            </a:r>
+            <a:pPr indent="0" marL="0">
+              <a:buNone/>
+            </a:pPr>
+            <a:r>
+              <a:rPr lang="en-US" sz="1200" dirty="0">
+                <a:solidFill>
+                  <a:srgbClr val="2D3748"/>
+                </a:solidFill>
+                <a:latin typeface="Consolas" pitchFamily="34" charset="0"/>
+                <a:ea typeface="Consolas" pitchFamily="34" charset="-122"/>
+                <a:cs typeface="Consolas" pitchFamily="34" charset="-120"/>
+              </a:rPr>
+              <a:t>½ × 30 × 30 = 450</a:t>
+            </a:r>
+            <a:endParaRPr lang="en-US" sz="1100" dirty="0"/>
+          </a:p>
+        </p:txBody>
+      </p:sp>
+      <p:sp>
+        <p:nvSpPr>
+          <p:cNvPr id="10" name="Text 7"/>
+          <p:cNvSpPr/>
+          <p:nvPr/>
+        </p:nvSpPr>
+        <p:spPr>
+          <a:xfrm>
+            <a:off x="5897880" y="2468880"/>
+            <a:ext cx="2926080" cy="320040"/>
+          </a:xfrm>
+          <a:prstGeom prst="rect">
+            <a:avLst/>
+          </a:prstGeom>
+          <a:noFill/>
+          <a:ln/>
+        </p:spPr>
+        <p:txBody>
+          <a:bodyPr wrap="square" rtlCol="0" anchor="ctr"/>
+          <a:lstStyle/>
+          <a:p>
+            <a:pPr indent="0" marL="0">
+              <a:buNone/>
+            </a:pPr>
+            <a:r>
+              <a:rPr lang="en-US" sz="1100" b="1" dirty="0">
+                <a:solidFill>
+                  <a:srgbClr val="718096"/>
+                </a:solidFill>
+                <a:latin typeface="Arial" pitchFamily="34" charset="0"/>
+                <a:ea typeface="Arial" pitchFamily="34" charset="-122"/>
+                <a:cs typeface="Arial" pitchFamily="34" charset="-120"/>
+              </a:rPr>
+              <a:t>PS = </a:t>
+            </a:r>
+            <a:pPr indent="0" marL="0">
+              <a:buNone/>
+            </a:pPr>
+            <a:r>
+              <a:rPr lang="en-US" sz="1200" dirty="0">
+                <a:solidFill>
+                  <a:srgbClr val="2D3748"/>
+                </a:solidFill>
+                <a:latin typeface="Consolas" pitchFamily="34" charset="0"/>
+                <a:ea typeface="Consolas" pitchFamily="34" charset="-122"/>
+                <a:cs typeface="Consolas" pitchFamily="34" charset="-120"/>
+              </a:rPr>
+              <a:t>½ × 30 × 30 = 450</a:t>
+            </a:r>
+            <a:endParaRPr lang="en-US" sz="1100" dirty="0"/>
+          </a:p>
+        </p:txBody>
+      </p:sp>
+      <p:sp>
+        <p:nvSpPr>
+          <p:cNvPr id="11" name="Text 8"/>
+          <p:cNvSpPr/>
+          <p:nvPr/>
+        </p:nvSpPr>
+        <p:spPr>
+          <a:xfrm>
+            <a:off x="5897880" y="2788920"/>
+            <a:ext cx="2926080" cy="320040"/>
+          </a:xfrm>
+          <a:prstGeom prst="rect">
+            <a:avLst/>
+          </a:prstGeom>
+          <a:noFill/>
+          <a:ln/>
+        </p:spPr>
+        <p:txBody>
+          <a:bodyPr wrap="square" rtlCol="0" anchor="ctr"/>
+          <a:lstStyle/>
+          <a:p>
+            <a:pPr indent="0" marL="0">
+              <a:buNone/>
+            </a:pPr>
+            <a:r>
+              <a:rPr lang="en-US" sz="1100" b="1" dirty="0">
+                <a:solidFill>
+                  <a:srgbClr val="718096"/>
+                </a:solidFill>
+                <a:latin typeface="Arial" pitchFamily="34" charset="0"/>
+                <a:ea typeface="Arial" pitchFamily="34" charset="-122"/>
+                <a:cs typeface="Arial" pitchFamily="34" charset="-120"/>
+              </a:rPr>
+              <a:t>TS = </a:t>
+            </a:r>
+            <a:pPr indent="0" marL="0">
+              <a:buNone/>
+            </a:pPr>
+            <a:r>
+              <a:rPr lang="en-US" sz="1200" dirty="0">
+                <a:solidFill>
+                  <a:srgbClr val="2D3748"/>
+                </a:solidFill>
+                <a:latin typeface="Consolas" pitchFamily="34" charset="0"/>
+                <a:ea typeface="Consolas" pitchFamily="34" charset="-122"/>
+                <a:cs typeface="Consolas" pitchFamily="34" charset="-120"/>
+              </a:rPr>
+              <a:t>450 + 450 = 900</a:t>
+            </a:r>
+            <a:endParaRPr lang="en-US" sz="1100" dirty="0"/>
+          </a:p>
+        </p:txBody>
+      </p:sp>
+      <p:sp>
+        <p:nvSpPr>
+          <p:cNvPr id="12" name="Shape 9"/>
+          <p:cNvSpPr/>
+          <p:nvPr/>
+        </p:nvSpPr>
+        <p:spPr>
+          <a:xfrm>
+            <a:off x="274320" y="3703320"/>
+            <a:ext cx="8595360" cy="457200"/>
           </a:xfrm>
           <a:prstGeom prst="rect">
             <a:avLst>
-              <a:gd name="adj" fmla="val 1563"/>
+              <a:gd name="adj" fmla="val 10000"/>
             </a:avLst>
           </a:prstGeom>
           <a:solidFill>
             <a:srgbClr val="E8F8F0"/>
           </a:solidFill>
           <a:ln/>
-          <a:effectLst>
-            <a:outerShdw sx="100000" sy="100000" kx="0" ky="0" algn="bl" rotWithShape="0" blurRad="76200" dist="25400" dir="8100000">
-              <a:srgbClr val="000000">
-                <a:alpha val="10000"/>
-              </a:srgbClr>
-            </a:outerShdw>
-          </a:effectLst>
-        </p:spPr>
-        <p:txBody>
-          <a:bodyPr/>
-          <a:p/>
-        </p:txBody>
-      </p:sp>
-      <p:sp>
-        <p:nvSpPr>
-          <p:cNvPr id="6" name="Shape 4"/>
-          <p:cNvSpPr/>
-          <p:nvPr/>
-        </p:nvSpPr>
-        <p:spPr>
-          <a:xfrm>
-            <a:off x="5760720" y="1005840"/>
-            <a:ext cx="54864" cy="3657600"/>
+        </p:spPr>
+      </p:sp>
+      <p:sp>
+        <p:nvSpPr>
+          <p:cNvPr id="13" name="Shape 10"/>
+          <p:cNvSpPr/>
+          <p:nvPr/>
+        </p:nvSpPr>
+        <p:spPr>
+          <a:xfrm>
+            <a:off x="274320" y="3703320"/>
+            <a:ext cx="45720" cy="457200"/>
           </a:xfrm>
           <a:prstGeom prst="rect">
             <a:avLst/>
@@ -4287,37 +3791,33 @@
           </a:solidFill>
           <a:ln/>
         </p:spPr>
-        <p:txBody>
-          <a:bodyPr/>
-          <a:p/>
-        </p:txBody>
-      </p:sp>
-      <p:sp>
-        <p:nvSpPr>
-          <p:cNvPr id="7" name="Text 5"/>
-          <p:cNvSpPr/>
-          <p:nvPr/>
-        </p:nvSpPr>
-        <p:spPr>
-          <a:xfrm>
-            <a:off x="5943600" y="1143000"/>
-            <a:ext cx="2606040" cy="365760"/>
-          </a:xfrm>
-          <a:prstGeom prst="rect">
-            <a:avLst/>
-          </a:prstGeom>
-          <a:noFill/>
-          <a:ln/>
-        </p:spPr>
-        <p:txBody>
-          <a:bodyPr wrap="square" rtlCol="0" anchor="t"/>
+      </p:sp>
+      <p:sp>
+        <p:nvSpPr>
+          <p:cNvPr id="14" name="Text 11"/>
+          <p:cNvSpPr/>
+          <p:nvPr/>
+        </p:nvSpPr>
+        <p:spPr>
+          <a:xfrm>
+            <a:off x="502920" y="3703320"/>
+            <a:ext cx="8229600" cy="457200"/>
+          </a:xfrm>
+          <a:prstGeom prst="rect">
+            <a:avLst/>
+          </a:prstGeom>
+          <a:noFill/>
+          <a:ln/>
+        </p:spPr>
+        <p:txBody>
+          <a:bodyPr wrap="square" rtlCol="0" anchor="ctr"/>
           <a:lstStyle/>
           <a:p>
             <a:pPr indent="0" marL="0">
               <a:buNone/>
             </a:pPr>
             <a:r>
-              <a:rPr lang="en-US" sz="2000" b="1" dirty="0">
+              <a:rPr lang="en-US" sz="1300" b="1" dirty="0">
                 <a:solidFill>
                   <a:srgbClr val="1E8449"/>
                 </a:solidFill>
@@ -4325,105 +3825,9 @@
                 <a:ea typeface="Arial" pitchFamily="34" charset="-122"/>
                 <a:cs typeface="Arial" pitchFamily="34" charset="-120"/>
               </a:rPr>
-              <a:t>Efficiënt!</a:t>
-            </a:r>
-            <a:endParaRPr lang="en-US" sz="2000" dirty="0"/>
-          </a:p>
-        </p:txBody>
-      </p:sp>
-      <p:sp>
-        <p:nvSpPr>
-          <p:cNvPr id="8" name="Text 6"/>
-          <p:cNvSpPr/>
-          <p:nvPr/>
-        </p:nvSpPr>
-        <p:spPr>
-          <a:xfrm>
-            <a:off x="5943600" y="1554480"/>
-            <a:ext cx="2606040" cy="2971800"/>
-          </a:xfrm>
-          <a:prstGeom prst="rect">
-            <a:avLst/>
-          </a:prstGeom>
-          <a:noFill/>
-          <a:ln/>
-        </p:spPr>
-        <p:txBody>
-          <a:bodyPr wrap="square" rtlCol="0" anchor="t"/>
-          <a:lstStyle/>
-          <a:p>
-            <a:pPr algn="l" indent="0" marL="0">
-              <a:lnSpc>
-                <a:spcPct val="115000"/>
-              </a:lnSpc>
-              <a:buNone/>
-            </a:pPr>
-            <a:r>
-              <a:rPr lang="en-US" sz="1400" dirty="0">
-                <a:solidFill>
-                  <a:srgbClr val="2D3748"/>
-                </a:solidFill>
-                <a:latin typeface="Arial" pitchFamily="34" charset="0"/>
-                <a:ea typeface="Arial" pitchFamily="34" charset="-122"/>
-                <a:cs typeface="Arial" pitchFamily="34" charset="-120"/>
-              </a:rPr>
-              <a:t>Bij volkomen concurrentie:
-</a:t>
-            </a:r>
-            <a:pPr algn="l" indent="0" marL="0">
-              <a:lnSpc>
-                <a:spcPct val="115000"/>
-              </a:lnSpc>
-              <a:buNone/>
-            </a:pPr>
-            <a:r>
-              <a:rPr lang="en-US" sz="1600" b="1" dirty="0">
-                <a:solidFill>
-                  <a:srgbClr val="1E8449"/>
-                </a:solidFill>
-                <a:latin typeface="Arial" pitchFamily="34" charset="0"/>
-                <a:ea typeface="Arial" pitchFamily="34" charset="-122"/>
-                <a:cs typeface="Arial" pitchFamily="34" charset="-120"/>
-              </a:rPr>
-              <a:t>P = MK
-</a:t>
-            </a:r>
-            <a:pPr algn="l" indent="0" marL="0">
-              <a:lnSpc>
-                <a:spcPct val="115000"/>
-              </a:lnSpc>
-              <a:buNone/>
-            </a:pPr>
-            <a:r>
-              <a:rPr lang="en-US" sz="1400" b="1" dirty="0">
-                <a:solidFill>
-                  <a:srgbClr val="2D3748"/>
-                </a:solidFill>
-                <a:latin typeface="Arial" pitchFamily="34" charset="0"/>
-                <a:ea typeface="Arial" pitchFamily="34" charset="-122"/>
-                <a:cs typeface="Arial" pitchFamily="34" charset="-120"/>
-              </a:rPr>
-              <a:t>TS is maximaal
-</a:t>
-            </a:r>
-            <a:pPr algn="l" indent="0" marL="0">
-              <a:lnSpc>
-                <a:spcPct val="115000"/>
-              </a:lnSpc>
-              <a:buNone/>
-            </a:pPr>
-            <a:r>
-              <a:rPr lang="en-US" sz="1400" dirty="0">
-                <a:solidFill>
-                  <a:srgbClr val="2D3748"/>
-                </a:solidFill>
-                <a:latin typeface="Arial" pitchFamily="34" charset="0"/>
-                <a:ea typeface="Arial" pitchFamily="34" charset="-122"/>
-                <a:cs typeface="Arial" pitchFamily="34" charset="-120"/>
-              </a:rPr>
-              <a:t>Geen welvaartsverlies</a:t>
-            </a:r>
-            <a:endParaRPr lang="en-US" sz="1400" dirty="0"/>
+              <a:t>Bij VC is P = MK → TS is maximaal → efficiënt, geen welvaartsverlies</a:t>
+            </a:r>
+            <a:endParaRPr lang="en-US" sz="1300" dirty="0"/>
           </a:p>
         </p:txBody>
       </p:sp>
@@ -4499,16 +3903,16 @@
         </p:nvSpPr>
         <p:spPr>
           <a:xfrm>
-            <a:off x="457200" y="1005840"/>
-            <a:ext cx="3931920" cy="3474720"/>
+            <a:off x="274320" y="914400"/>
+            <a:ext cx="4114800" cy="3017520"/>
           </a:xfrm>
           <a:prstGeom prst="rect">
             <a:avLst>
-              <a:gd name="adj" fmla="val 1316"/>
+              <a:gd name="adj" fmla="val 1515"/>
             </a:avLst>
           </a:prstGeom>
           <a:solidFill>
-            <a:srgbClr val="E8F8F0"/>
+            <a:srgbClr val="F9F6F1"/>
           </a:solidFill>
           <a:ln/>
           <a:effectLst>
@@ -4519,10 +3923,6 @@
             </a:outerShdw>
           </a:effectLst>
         </p:spPr>
-        <p:txBody>
-          <a:bodyPr/>
-          <a:p/>
-        </p:txBody>
       </p:sp>
       <p:sp>
         <p:nvSpPr>
@@ -4532,21 +3932,17 @@
         </p:nvSpPr>
         <p:spPr>
           <a:xfrm>
-            <a:off x="457200" y="1005840"/>
-            <a:ext cx="54864" cy="3474720"/>
+            <a:off x="274320" y="914400"/>
+            <a:ext cx="54864" cy="3017520"/>
           </a:xfrm>
           <a:prstGeom prst="rect">
             <a:avLst/>
           </a:prstGeom>
           <a:solidFill>
-            <a:srgbClr val="1E8449"/>
+            <a:srgbClr val="1A5276"/>
           </a:solidFill>
           <a:ln/>
         </p:spPr>
-        <p:txBody>
-          <a:bodyPr/>
-          <a:p/>
-        </p:txBody>
       </p:sp>
       <p:sp>
         <p:nvSpPr>
@@ -4556,8 +3952,8 @@
         </p:nvSpPr>
         <p:spPr>
           <a:xfrm>
-            <a:off x="640080" y="1143000"/>
-            <a:ext cx="3611880" cy="365760"/>
+            <a:off x="457200" y="1051560"/>
+            <a:ext cx="3794760" cy="365760"/>
           </a:xfrm>
           <a:prstGeom prst="rect">
             <a:avLst/>
@@ -4575,7 +3971,7 @@
             <a:r>
               <a:rPr lang="en-US" sz="2000" b="1" dirty="0">
                 <a:solidFill>
-                  <a:srgbClr val="1E8449"/>
+                  <a:srgbClr val="1A5276"/>
                 </a:solidFill>
                 <a:latin typeface="Arial" pitchFamily="34" charset="0"/>
                 <a:ea typeface="Arial" pitchFamily="34" charset="-122"/>
@@ -4595,8 +3991,8 @@
         </p:nvSpPr>
         <p:spPr>
           <a:xfrm>
-            <a:off x="640080" y="1554480"/>
-            <a:ext cx="3611880" cy="2788920"/>
+            <a:off x="457200" y="1463040"/>
+            <a:ext cx="3794760" cy="2331720"/>
           </a:xfrm>
           <a:prstGeom prst="rect">
             <a:avLst/>
@@ -4608,12 +4004,11 @@
           <a:bodyPr wrap="square" rtlCol="0" anchor="t"/>
           <a:lstStyle/>
           <a:p>
-            <a:pPr algn="l" marL="342900" indent="-342900">
+            <a:pPr algn="l" indent="0" marL="0">
               <a:lnSpc>
                 <a:spcPct val="115000"/>
               </a:lnSpc>
-              <a:buSzPct val="100000"/>
-              <a:buChar char="•"/>
+              <a:buNone/>
             </a:pPr>
             <a:r>
               <a:rPr lang="en-US" sz="1400" dirty="0">
@@ -4627,12 +4022,11 @@
               <a:t>P = MK (= aanbodlijn)
 </a:t>
             </a:r>
-            <a:pPr algn="l" marL="342900" indent="-342900">
+            <a:pPr algn="l" indent="0" marL="0">
               <a:lnSpc>
                 <a:spcPct val="115000"/>
               </a:lnSpc>
-              <a:buSzPct val="100000"/>
-              <a:buChar char="•"/>
+              <a:buNone/>
             </a:pPr>
             <a:r>
               <a:rPr lang="en-US" sz="1400" dirty="0">
@@ -4646,12 +4040,11 @@
               <a:t>Maximaal totaal surplus
 </a:t>
             </a:r>
-            <a:pPr algn="l" marL="342900" indent="-342900">
+            <a:pPr algn="l" indent="0" marL="0">
               <a:lnSpc>
                 <a:spcPct val="115000"/>
               </a:lnSpc>
-              <a:buSzPct val="100000"/>
-              <a:buChar char="•"/>
+              <a:buNone/>
             </a:pPr>
             <a:r>
               <a:rPr lang="en-US" sz="1400" dirty="0">
@@ -4665,12 +4058,11 @@
               <a:t>CS = driehoek boven P*
 </a:t>
             </a:r>
-            <a:pPr algn="l" marL="342900" indent="-342900">
+            <a:pPr algn="l" indent="0" marL="0">
               <a:lnSpc>
                 <a:spcPct val="115000"/>
               </a:lnSpc>
-              <a:buSzPct val="100000"/>
-              <a:buChar char="•"/>
+              <a:buNone/>
             </a:pPr>
             <a:r>
               <a:rPr lang="en-US" sz="1400" dirty="0">
@@ -4684,12 +4076,11 @@
               <a:t>PS = driehoek onder P*
 </a:t>
             </a:r>
-            <a:pPr algn="l" marL="342900" indent="-342900">
+            <a:pPr algn="l" indent="0" marL="0">
               <a:lnSpc>
                 <a:spcPct val="115000"/>
               </a:lnSpc>
-              <a:buSzPct val="100000"/>
-              <a:buChar char="•"/>
+              <a:buNone/>
             </a:pPr>
             <a:r>
               <a:rPr lang="en-US" sz="1400" b="1" dirty="0">
@@ -4714,16 +4105,16 @@
         </p:nvSpPr>
         <p:spPr>
           <a:xfrm>
-            <a:off x="4754880" y="1005840"/>
-            <a:ext cx="3931920" cy="3474720"/>
+            <a:off x="4754880" y="914400"/>
+            <a:ext cx="4114800" cy="3017520"/>
           </a:xfrm>
           <a:prstGeom prst="rect">
             <a:avLst>
-              <a:gd name="adj" fmla="val 1316"/>
+              <a:gd name="adj" fmla="val 1515"/>
             </a:avLst>
           </a:prstGeom>
           <a:solidFill>
-            <a:srgbClr val="FDE8E8"/>
+            <a:srgbClr val="F9F6F1"/>
           </a:solidFill>
           <a:ln/>
           <a:effectLst>
@@ -4734,10 +4125,6 @@
             </a:outerShdw>
           </a:effectLst>
         </p:spPr>
-        <p:txBody>
-          <a:bodyPr/>
-          <a:p/>
-        </p:txBody>
       </p:sp>
       <p:sp>
         <p:nvSpPr>
@@ -4747,8 +4134,8 @@
         </p:nvSpPr>
         <p:spPr>
           <a:xfrm>
-            <a:off x="4754880" y="1005840"/>
-            <a:ext cx="54864" cy="3474720"/>
+            <a:off x="4754880" y="914400"/>
+            <a:ext cx="54864" cy="3017520"/>
           </a:xfrm>
           <a:prstGeom prst="rect">
             <a:avLst/>
@@ -4758,10 +4145,6 @@
           </a:solidFill>
           <a:ln/>
         </p:spPr>
-        <p:txBody>
-          <a:bodyPr/>
-          <a:p/>
-        </p:txBody>
       </p:sp>
       <p:sp>
         <p:nvSpPr>
@@ -4771,8 +4154,8 @@
         </p:nvSpPr>
         <p:spPr>
           <a:xfrm>
-            <a:off x="4937760" y="1143000"/>
-            <a:ext cx="3611880" cy="365760"/>
+            <a:off x="4937760" y="1051560"/>
+            <a:ext cx="3794760" cy="365760"/>
           </a:xfrm>
           <a:prstGeom prst="rect">
             <a:avLst/>
@@ -4810,8 +4193,8 @@
         </p:nvSpPr>
         <p:spPr>
           <a:xfrm>
-            <a:off x="4937760" y="1554480"/>
-            <a:ext cx="3611880" cy="2788920"/>
+            <a:off x="4937760" y="1463040"/>
+            <a:ext cx="3794760" cy="2331720"/>
           </a:xfrm>
           <a:prstGeom prst="rect">
             <a:avLst/>
@@ -4823,12 +4206,11 @@
           <a:bodyPr wrap="square" rtlCol="0" anchor="t"/>
           <a:lstStyle/>
           <a:p>
-            <a:pPr algn="l" marL="342900" indent="-342900">
+            <a:pPr algn="l" indent="0" marL="0">
               <a:lnSpc>
                 <a:spcPct val="115000"/>
               </a:lnSpc>
-              <a:buSzPct val="100000"/>
-              <a:buChar char="•"/>
+              <a:buNone/>
             </a:pPr>
             <a:r>
               <a:rPr lang="en-US" sz="1400" dirty="0">
@@ -4842,12 +4224,11 @@
               <a:t>MO = MK (winstmaximalisatie)
 </a:t>
             </a:r>
-            <a:pPr algn="l" marL="342900" indent="-342900">
+            <a:pPr algn="l" indent="0" marL="0">
               <a:lnSpc>
                 <a:spcPct val="115000"/>
               </a:lnSpc>
-              <a:buSzPct val="100000"/>
-              <a:buChar char="•"/>
+              <a:buNone/>
             </a:pPr>
             <a:r>
               <a:rPr lang="en-US" sz="1400" dirty="0">
@@ -4861,12 +4242,11 @@
               <a:t>Lagere Q, hogere P
 </a:t>
             </a:r>
-            <a:pPr algn="l" marL="342900" indent="-342900">
+            <a:pPr algn="l" indent="0" marL="0">
               <a:lnSpc>
                 <a:spcPct val="115000"/>
               </a:lnSpc>
-              <a:buSzPct val="100000"/>
-              <a:buChar char="•"/>
+              <a:buNone/>
             </a:pPr>
             <a:r>
               <a:rPr lang="en-US" sz="1400" dirty="0">
@@ -4880,12 +4260,11 @@
               <a:t>CS daalt (kleiner!)
 </a:t>
             </a:r>
-            <a:pPr algn="l" marL="342900" indent="-342900">
+            <a:pPr algn="l" indent="0" marL="0">
               <a:lnSpc>
                 <a:spcPct val="115000"/>
               </a:lnSpc>
-              <a:buSzPct val="100000"/>
-              <a:buChar char="•"/>
+              <a:buNone/>
             </a:pPr>
             <a:r>
               <a:rPr lang="en-US" sz="1400" dirty="0">
@@ -4899,12 +4278,11 @@
               <a:t>PS stijgt door hogere prijs
 </a:t>
             </a:r>
-            <a:pPr algn="l" marL="342900" indent="-342900">
+            <a:pPr algn="l" indent="0" marL="0">
               <a:lnSpc>
                 <a:spcPct val="115000"/>
               </a:lnSpc>
-              <a:buSzPct val="100000"/>
-              <a:buChar char="•"/>
+              <a:buNone/>
             </a:pPr>
             <a:r>
               <a:rPr lang="en-US" sz="1400" b="1" dirty="0">
@@ -4915,7 +4293,7 @@
                 <a:ea typeface="Arial" pitchFamily="34" charset="-122"/>
                 <a:cs typeface="Arial" pitchFamily="34" charset="-120"/>
               </a:rPr>
-              <a:t>TS daalt → efficiëntieverlies</a:t>
+              <a:t>TS daalt → welvaartsverlies</a:t>
             </a:r>
             <a:endParaRPr lang="en-US" sz="1400" dirty="0"/>
           </a:p>
@@ -4979,53 +4357,88 @@
                 <a:ea typeface="Arial" pitchFamily="34" charset="-122"/>
                 <a:cs typeface="Arial" pitchFamily="34" charset="-120"/>
               </a:rPr>
-              <a:t>CS, PS en Harbergerdriehoek</a:t>
+              <a:t>De Harbergerdriehoek</a:t>
             </a:r>
             <a:endParaRPr lang="en-US" sz="2400" dirty="0"/>
           </a:p>
         </p:txBody>
       </p:sp>
-      <p:sp>
-        <p:nvSpPr>
-          <p:cNvPr id="3" name="Shape 1"/>
-          <p:cNvSpPr/>
-          <p:nvPr/>
-        </p:nvSpPr>
-        <p:spPr>
-          <a:xfrm>
-            <a:off x="457200" y="1005840"/>
-            <a:ext cx="5029200" cy="3657600"/>
+      <p:pic>
+        <p:nvPicPr>
+          <p:cNvPr id="3" name="Image 0" descr="preencoded.png">    </p:cNvPr>
+          <p:cNvPicPr>
+            <a:picLocks noChangeAspect="1"/>
+          </p:cNvPicPr>
+          <p:nvPr/>
+        </p:nvPicPr>
+        <p:blipFill>
+          <a:blip r:embed="rId1"/>
+          <a:stretch>
+            <a:fillRect/>
+          </a:stretch>
+        </p:blipFill>
+        <p:spPr>
+          <a:xfrm>
+            <a:off x="274320" y="777240"/>
+            <a:ext cx="5303520" cy="2651760"/>
+          </a:xfrm>
+          <a:prstGeom prst="rect">
+            <a:avLst/>
+          </a:prstGeom>
+        </p:spPr>
+      </p:pic>
+      <p:sp>
+        <p:nvSpPr>
+          <p:cNvPr id="4" name="Shape 1"/>
+          <p:cNvSpPr/>
+          <p:nvPr/>
+        </p:nvSpPr>
+        <p:spPr>
+          <a:xfrm>
+            <a:off x="5760720" y="822960"/>
+            <a:ext cx="3200400" cy="2560320"/>
           </a:xfrm>
           <a:prstGeom prst="rect">
             <a:avLst>
-              <a:gd name="adj" fmla="val 1250"/>
+              <a:gd name="adj" fmla="val 1786"/>
             </a:avLst>
           </a:prstGeom>
           <a:solidFill>
             <a:srgbClr val="F7F8FA"/>
           </a:solidFill>
-          <a:ln w="6350">
-            <a:solidFill>
-              <a:srgbClr val="CBD5E0"/>
-            </a:solidFill>
-            <a:prstDash val="solid"/>
-          </a:ln>
-        </p:spPr>
-        <p:txBody>
-          <a:bodyPr/>
-          <a:p/>
-        </p:txBody>
-      </p:sp>
-      <p:sp>
-        <p:nvSpPr>
-          <p:cNvPr id="4" name="Text 2"/>
-          <p:cNvSpPr/>
-          <p:nvPr/>
-        </p:nvSpPr>
-        <p:spPr>
-          <a:xfrm>
-            <a:off x="457200" y="2103120"/>
-            <a:ext cx="5029200" cy="1371600"/>
+          <a:ln/>
+        </p:spPr>
+      </p:sp>
+      <p:sp>
+        <p:nvSpPr>
+          <p:cNvPr id="5" name="Shape 2"/>
+          <p:cNvSpPr/>
+          <p:nvPr/>
+        </p:nvSpPr>
+        <p:spPr>
+          <a:xfrm>
+            <a:off x="5760720" y="822960"/>
+            <a:ext cx="45720" cy="2560320"/>
+          </a:xfrm>
+          <a:prstGeom prst="rect">
+            <a:avLst/>
+          </a:prstGeom>
+          <a:solidFill>
+            <a:srgbClr val="D9534F"/>
+          </a:solidFill>
+          <a:ln/>
+        </p:spPr>
+      </p:sp>
+      <p:sp>
+        <p:nvSpPr>
+          <p:cNvPr id="6" name="Text 3"/>
+          <p:cNvSpPr/>
+          <p:nvPr/>
+        </p:nvSpPr>
+        <p:spPr>
+          <a:xfrm>
+            <a:off x="5897880" y="868680"/>
+            <a:ext cx="2926080" cy="256032"/>
           </a:xfrm>
           <a:prstGeom prst="rect">
             <a:avLst/>
@@ -5037,11 +4450,11 @@
           <a:bodyPr wrap="square" rtlCol="0" anchor="ctr"/>
           <a:lstStyle/>
           <a:p>
-            <a:pPr algn="ctr" indent="0" marL="0">
-              <a:buNone/>
-            </a:pPr>
-            <a:r>
-              <a:rPr lang="en-US" sz="1300" i="1" dirty="0">
+            <a:pPr indent="0" marL="0">
+              <a:buNone/>
+            </a:pPr>
+            <a:r>
+              <a:rPr lang="en-US" sz="1100" b="1" dirty="0">
                 <a:solidFill>
                   <a:srgbClr val="718096"/>
                 </a:solidFill>
@@ -5049,16 +4462,52 @@
                 <a:ea typeface="Arial" pitchFamily="34" charset="-122"/>
                 <a:cs typeface="Arial" pitchFamily="34" charset="-120"/>
               </a:rPr>
-              <a:t>Grafiek: V/A-diagram met</a:t>
-            </a:r>
-            <a:endParaRPr lang="en-US" sz="1300" dirty="0"/>
-          </a:p>
-          <a:p>
-            <a:pPr algn="ctr" indent="0" marL="0">
-              <a:buNone/>
-            </a:pPr>
-            <a:r>
-              <a:rPr lang="en-US" sz="1300" i="1" dirty="0">
+              <a:t>MO = MK:</a:t>
+            </a:r>
+            <a:pPr indent="0" marL="0">
+              <a:buNone/>
+            </a:pPr>
+            <a:r>
+              <a:rPr lang="en-US" sz="1100" dirty="0">
+                <a:solidFill>
+                  <a:srgbClr val="2D3748"/>
+                </a:solidFill>
+                <a:latin typeface="Arial" pitchFamily="34" charset="0"/>
+                <a:ea typeface="Arial" pitchFamily="34" charset="-122"/>
+                <a:cs typeface="Arial" pitchFamily="34" charset="-120"/>
+              </a:rPr>
+              <a:t> Qₘ = 20</a:t>
+            </a:r>
+            <a:endParaRPr lang="en-US" sz="1100" dirty="0"/>
+          </a:p>
+        </p:txBody>
+      </p:sp>
+      <p:sp>
+        <p:nvSpPr>
+          <p:cNvPr id="7" name="Text 4"/>
+          <p:cNvSpPr/>
+          <p:nvPr/>
+        </p:nvSpPr>
+        <p:spPr>
+          <a:xfrm>
+            <a:off x="5897880" y="1124712"/>
+            <a:ext cx="2926080" cy="256032"/>
+          </a:xfrm>
+          <a:prstGeom prst="rect">
+            <a:avLst/>
+          </a:prstGeom>
+          <a:noFill/>
+          <a:ln/>
+        </p:spPr>
+        <p:txBody>
+          <a:bodyPr wrap="square" rtlCol="0" anchor="ctr"/>
+          <a:lstStyle/>
+          <a:p>
+            <a:pPr indent="0" marL="0">
+              <a:buNone/>
+            </a:pPr>
+            <a:r>
+              <a:rPr lang="en-US" sz="1100" b="1" dirty="0">
                 <a:solidFill>
                   <a:srgbClr val="718096"/>
                 </a:solidFill>
@@ -5066,16 +4515,52 @@
                 <a:ea typeface="Arial" pitchFamily="34" charset="-122"/>
                 <a:cs typeface="Arial" pitchFamily="34" charset="-120"/>
               </a:rPr>
-              <a:t>CS, PS en Harbergerdriehoek</a:t>
-            </a:r>
-            <a:endParaRPr lang="en-US" sz="1300" dirty="0"/>
-          </a:p>
-          <a:p>
-            <a:pPr algn="ctr" indent="0" marL="0">
-              <a:buNone/>
-            </a:pPr>
-            <a:r>
-              <a:rPr lang="en-US" sz="1300" i="1" dirty="0">
+              <a:t>Pₘ:</a:t>
+            </a:r>
+            <a:pPr indent="0" marL="0">
+              <a:buNone/>
+            </a:pPr>
+            <a:r>
+              <a:rPr lang="en-US" sz="1100" dirty="0">
+                <a:solidFill>
+                  <a:srgbClr val="2D3748"/>
+                </a:solidFill>
+                <a:latin typeface="Arial" pitchFamily="34" charset="0"/>
+                <a:ea typeface="Arial" pitchFamily="34" charset="-122"/>
+                <a:cs typeface="Arial" pitchFamily="34" charset="-120"/>
+              </a:rPr>
+              <a:t> 60 − 20 = 40 (van V)</a:t>
+            </a:r>
+            <a:endParaRPr lang="en-US" sz="1100" dirty="0"/>
+          </a:p>
+        </p:txBody>
+      </p:sp>
+      <p:sp>
+        <p:nvSpPr>
+          <p:cNvPr id="8" name="Text 5"/>
+          <p:cNvSpPr/>
+          <p:nvPr/>
+        </p:nvSpPr>
+        <p:spPr>
+          <a:xfrm>
+            <a:off x="5897880" y="1380744"/>
+            <a:ext cx="2926080" cy="256032"/>
+          </a:xfrm>
+          <a:prstGeom prst="rect">
+            <a:avLst/>
+          </a:prstGeom>
+          <a:noFill/>
+          <a:ln/>
+        </p:spPr>
+        <p:txBody>
+          <a:bodyPr wrap="square" rtlCol="0" anchor="ctr"/>
+          <a:lstStyle/>
+          <a:p>
+            <a:pPr indent="0" marL="0">
+              <a:buNone/>
+            </a:pPr>
+            <a:r>
+              <a:rPr lang="en-US" sz="1100" b="1" dirty="0">
                 <a:solidFill>
                   <a:srgbClr val="718096"/>
                 </a:solidFill>
@@ -5083,55 +4568,284 @@
                 <a:ea typeface="Arial" pitchFamily="34" charset="-122"/>
                 <a:cs typeface="Arial" pitchFamily="34" charset="-120"/>
               </a:rPr>
-              <a:t>(gearceerd welvaartsverlies)</a:t>
-            </a:r>
-            <a:endParaRPr lang="en-US" sz="1300" dirty="0"/>
-          </a:p>
-        </p:txBody>
-      </p:sp>
-      <p:sp>
-        <p:nvSpPr>
-          <p:cNvPr id="5" name="Shape 3"/>
-          <p:cNvSpPr/>
-          <p:nvPr/>
-        </p:nvSpPr>
-        <p:spPr>
-          <a:xfrm>
-            <a:off x="5760720" y="1005840"/>
-            <a:ext cx="2926080" cy="3657600"/>
+              <a:t>MKₘ:</a:t>
+            </a:r>
+            <a:pPr indent="0" marL="0">
+              <a:buNone/>
+            </a:pPr>
+            <a:r>
+              <a:rPr lang="en-US" sz="1100" dirty="0">
+                <a:solidFill>
+                  <a:srgbClr val="2D3748"/>
+                </a:solidFill>
+                <a:latin typeface="Arial" pitchFamily="34" charset="0"/>
+                <a:ea typeface="Arial" pitchFamily="34" charset="-122"/>
+                <a:cs typeface="Arial" pitchFamily="34" charset="-120"/>
+              </a:rPr>
+              <a:t> 20</a:t>
+            </a:r>
+            <a:endParaRPr lang="en-US" sz="1100" dirty="0"/>
+          </a:p>
+        </p:txBody>
+      </p:sp>
+      <p:sp>
+        <p:nvSpPr>
+          <p:cNvPr id="9" name="Text 6"/>
+          <p:cNvSpPr/>
+          <p:nvPr/>
+        </p:nvSpPr>
+        <p:spPr>
+          <a:xfrm>
+            <a:off x="5897880" y="1892808"/>
+            <a:ext cx="2926080" cy="256032"/>
+          </a:xfrm>
+          <a:prstGeom prst="rect">
+            <a:avLst/>
+          </a:prstGeom>
+          <a:noFill/>
+          <a:ln/>
+        </p:spPr>
+        <p:txBody>
+          <a:bodyPr wrap="square" rtlCol="0" anchor="ctr"/>
+          <a:lstStyle/>
+          <a:p>
+            <a:pPr indent="0" marL="0">
+              <a:buNone/>
+            </a:pPr>
+            <a:r>
+              <a:rPr lang="en-US" sz="1100" b="1" dirty="0">
+                <a:solidFill>
+                  <a:srgbClr val="D9534F"/>
+                </a:solidFill>
+                <a:latin typeface="Arial" pitchFamily="34" charset="0"/>
+                <a:ea typeface="Arial" pitchFamily="34" charset="-122"/>
+                <a:cs typeface="Arial" pitchFamily="34" charset="-120"/>
+              </a:rPr>
+              <a:t>C</a:t>
+            </a:r>
+            <a:pPr indent="0" marL="0">
+              <a:buNone/>
+            </a:pPr>
+            <a:r>
+              <a:rPr lang="en-US" sz="1100" dirty="0">
+                <a:solidFill>
+                  <a:srgbClr val="2D3748"/>
+                </a:solidFill>
+                <a:latin typeface="Arial" pitchFamily="34" charset="0"/>
+                <a:ea typeface="Arial" pitchFamily="34" charset="-122"/>
+                <a:cs typeface="Arial" pitchFamily="34" charset="-120"/>
+              </a:rPr>
+              <a:t> (20, 40) monopolieprijs</a:t>
+            </a:r>
+            <a:endParaRPr lang="en-US" sz="1100" dirty="0"/>
+          </a:p>
+        </p:txBody>
+      </p:sp>
+      <p:sp>
+        <p:nvSpPr>
+          <p:cNvPr id="10" name="Text 7"/>
+          <p:cNvSpPr/>
+          <p:nvPr/>
+        </p:nvSpPr>
+        <p:spPr>
+          <a:xfrm>
+            <a:off x="5897880" y="2148840"/>
+            <a:ext cx="2926080" cy="256032"/>
+          </a:xfrm>
+          <a:prstGeom prst="rect">
+            <a:avLst/>
+          </a:prstGeom>
+          <a:noFill/>
+          <a:ln/>
+        </p:spPr>
+        <p:txBody>
+          <a:bodyPr wrap="square" rtlCol="0" anchor="ctr"/>
+          <a:lstStyle/>
+          <a:p>
+            <a:pPr indent="0" marL="0">
+              <a:buNone/>
+            </a:pPr>
+            <a:r>
+              <a:rPr lang="en-US" sz="1100" b="1" dirty="0">
+                <a:solidFill>
+                  <a:srgbClr val="1A5276"/>
+                </a:solidFill>
+                <a:latin typeface="Arial" pitchFamily="34" charset="0"/>
+                <a:ea typeface="Arial" pitchFamily="34" charset="-122"/>
+                <a:cs typeface="Arial" pitchFamily="34" charset="-120"/>
+              </a:rPr>
+              <a:t>B</a:t>
+            </a:r>
+            <a:pPr indent="0" marL="0">
+              <a:buNone/>
+            </a:pPr>
+            <a:r>
+              <a:rPr lang="en-US" sz="1100" dirty="0">
+                <a:solidFill>
+                  <a:srgbClr val="2D3748"/>
+                </a:solidFill>
+                <a:latin typeface="Arial" pitchFamily="34" charset="0"/>
+                <a:ea typeface="Arial" pitchFamily="34" charset="-122"/>
+                <a:cs typeface="Arial" pitchFamily="34" charset="-120"/>
+              </a:rPr>
+              <a:t> (30, 30) VC-evenwicht</a:t>
+            </a:r>
+            <a:endParaRPr lang="en-US" sz="1100" dirty="0"/>
+          </a:p>
+        </p:txBody>
+      </p:sp>
+      <p:sp>
+        <p:nvSpPr>
+          <p:cNvPr id="11" name="Text 8"/>
+          <p:cNvSpPr/>
+          <p:nvPr/>
+        </p:nvSpPr>
+        <p:spPr>
+          <a:xfrm>
+            <a:off x="5897880" y="2404872"/>
+            <a:ext cx="2926080" cy="256032"/>
+          </a:xfrm>
+          <a:prstGeom prst="rect">
+            <a:avLst/>
+          </a:prstGeom>
+          <a:noFill/>
+          <a:ln/>
+        </p:spPr>
+        <p:txBody>
+          <a:bodyPr wrap="square" rtlCol="0" anchor="ctr"/>
+          <a:lstStyle/>
+          <a:p>
+            <a:pPr indent="0" marL="0">
+              <a:buNone/>
+            </a:pPr>
+            <a:r>
+              <a:rPr lang="en-US" sz="1100" b="1" dirty="0">
+                <a:solidFill>
+                  <a:srgbClr val="7B2D8E"/>
+                </a:solidFill>
+                <a:latin typeface="Arial" pitchFamily="34" charset="0"/>
+                <a:ea typeface="Arial" pitchFamily="34" charset="-122"/>
+                <a:cs typeface="Arial" pitchFamily="34" charset="-120"/>
+              </a:rPr>
+              <a:t>A</a:t>
+            </a:r>
+            <a:pPr indent="0" marL="0">
+              <a:buNone/>
+            </a:pPr>
+            <a:r>
+              <a:rPr lang="en-US" sz="1100" dirty="0">
+                <a:solidFill>
+                  <a:srgbClr val="2D3748"/>
+                </a:solidFill>
+                <a:latin typeface="Arial" pitchFamily="34" charset="0"/>
+                <a:ea typeface="Arial" pitchFamily="34" charset="-122"/>
+                <a:cs typeface="Arial" pitchFamily="34" charset="-120"/>
+              </a:rPr>
+              <a:t> (20, 20) MO = MK</a:t>
+            </a:r>
+            <a:endParaRPr lang="en-US" sz="1100" dirty="0"/>
+          </a:p>
+        </p:txBody>
+      </p:sp>
+      <p:sp>
+        <p:nvSpPr>
+          <p:cNvPr id="12" name="Text 9"/>
+          <p:cNvSpPr/>
+          <p:nvPr/>
+        </p:nvSpPr>
+        <p:spPr>
+          <a:xfrm>
+            <a:off x="5897880" y="2916936"/>
+            <a:ext cx="2926080" cy="256032"/>
+          </a:xfrm>
+          <a:prstGeom prst="rect">
+            <a:avLst/>
+          </a:prstGeom>
+          <a:noFill/>
+          <a:ln/>
+        </p:spPr>
+        <p:txBody>
+          <a:bodyPr wrap="square" rtlCol="0" anchor="ctr"/>
+          <a:lstStyle/>
+          <a:p>
+            <a:pPr indent="0" marL="0">
+              <a:buNone/>
+            </a:pPr>
+            <a:r>
+              <a:rPr lang="en-US" sz="1100" b="1" dirty="0">
+                <a:solidFill>
+                  <a:srgbClr val="D9534F"/>
+                </a:solidFill>
+                <a:latin typeface="Arial" pitchFamily="34" charset="0"/>
+                <a:ea typeface="Arial" pitchFamily="34" charset="-122"/>
+                <a:cs typeface="Arial" pitchFamily="34" charset="-120"/>
+              </a:rPr>
+              <a:t>DWL = </a:t>
+            </a:r>
+            <a:pPr indent="0" marL="0">
+              <a:buNone/>
+            </a:pPr>
+            <a:r>
+              <a:rPr lang="en-US" sz="1100" dirty="0">
+                <a:solidFill>
+                  <a:srgbClr val="2D3748"/>
+                </a:solidFill>
+                <a:latin typeface="Consolas" pitchFamily="34" charset="0"/>
+                <a:ea typeface="Consolas" pitchFamily="34" charset="-122"/>
+                <a:cs typeface="Consolas" pitchFamily="34" charset="-120"/>
+              </a:rPr>
+              <a:t>½ × 10 × 20 = </a:t>
+            </a:r>
+            <a:pPr indent="0" marL="0">
+              <a:buNone/>
+            </a:pPr>
+            <a:r>
+              <a:rPr lang="en-US" sz="1100" b="1" dirty="0">
+                <a:solidFill>
+                  <a:srgbClr val="D9534F"/>
+                </a:solidFill>
+                <a:latin typeface="Consolas" pitchFamily="34" charset="0"/>
+                <a:ea typeface="Consolas" pitchFamily="34" charset="-122"/>
+                <a:cs typeface="Consolas" pitchFamily="34" charset="-120"/>
+              </a:rPr>
+              <a:t>100</a:t>
+            </a:r>
+            <a:endParaRPr lang="en-US" sz="1100" dirty="0"/>
+          </a:p>
+        </p:txBody>
+      </p:sp>
+      <p:sp>
+        <p:nvSpPr>
+          <p:cNvPr id="13" name="Shape 10"/>
+          <p:cNvSpPr/>
+          <p:nvPr/>
+        </p:nvSpPr>
+        <p:spPr>
+          <a:xfrm>
+            <a:off x="274320" y="3703320"/>
+            <a:ext cx="8595360" cy="457200"/>
           </a:xfrm>
           <a:prstGeom prst="rect">
             <a:avLst>
-              <a:gd name="adj" fmla="val 1563"/>
+              <a:gd name="adj" fmla="val 10000"/>
             </a:avLst>
           </a:prstGeom>
           <a:solidFill>
             <a:srgbClr val="FDE8E8"/>
           </a:solidFill>
           <a:ln/>
-          <a:effectLst>
-            <a:outerShdw sx="100000" sy="100000" kx="0" ky="0" algn="bl" rotWithShape="0" blurRad="76200" dist="25400" dir="8100000">
-              <a:srgbClr val="000000">
-                <a:alpha val="10000"/>
-              </a:srgbClr>
-            </a:outerShdw>
-          </a:effectLst>
-        </p:spPr>
-        <p:txBody>
-          <a:bodyPr/>
-          <a:p/>
-        </p:txBody>
-      </p:sp>
-      <p:sp>
-        <p:nvSpPr>
-          <p:cNvPr id="6" name="Shape 4"/>
-          <p:cNvSpPr/>
-          <p:nvPr/>
-        </p:nvSpPr>
-        <p:spPr>
-          <a:xfrm>
-            <a:off x="5760720" y="1005840"/>
-            <a:ext cx="54864" cy="3657600"/>
+        </p:spPr>
+      </p:sp>
+      <p:sp>
+        <p:nvSpPr>
+          <p:cNvPr id="14" name="Shape 11"/>
+          <p:cNvSpPr/>
+          <p:nvPr/>
+        </p:nvSpPr>
+        <p:spPr>
+          <a:xfrm>
+            <a:off x="274320" y="3703320"/>
+            <a:ext cx="45720" cy="457200"/>
           </a:xfrm>
           <a:prstGeom prst="rect">
             <a:avLst/>
@@ -5141,125 +4855,51 @@
           </a:solidFill>
           <a:ln/>
         </p:spPr>
-        <p:txBody>
-          <a:bodyPr/>
-          <a:p/>
-        </p:txBody>
-      </p:sp>
-      <p:sp>
-        <p:nvSpPr>
-          <p:cNvPr id="7" name="Text 5"/>
-          <p:cNvSpPr/>
-          <p:nvPr/>
-        </p:nvSpPr>
-        <p:spPr>
-          <a:xfrm>
-            <a:off x="5943600" y="1143000"/>
-            <a:ext cx="2606040" cy="365760"/>
-          </a:xfrm>
-          <a:prstGeom prst="rect">
-            <a:avLst/>
-          </a:prstGeom>
-          <a:noFill/>
-          <a:ln/>
-        </p:spPr>
-        <p:txBody>
-          <a:bodyPr wrap="square" rtlCol="0" anchor="t"/>
+      </p:sp>
+      <p:sp>
+        <p:nvSpPr>
+          <p:cNvPr id="15" name="Text 12"/>
+          <p:cNvSpPr/>
+          <p:nvPr/>
+        </p:nvSpPr>
+        <p:spPr>
+          <a:xfrm>
+            <a:off x="502920" y="3703320"/>
+            <a:ext cx="8229600" cy="457200"/>
+          </a:xfrm>
+          <a:prstGeom prst="rect">
+            <a:avLst/>
+          </a:prstGeom>
+          <a:noFill/>
+          <a:ln/>
+        </p:spPr>
+        <p:txBody>
+          <a:bodyPr wrap="square" rtlCol="0" anchor="ctr"/>
           <a:lstStyle/>
           <a:p>
             <a:pPr indent="0" marL="0">
               <a:buNone/>
             </a:pPr>
             <a:r>
-              <a:rPr lang="en-US" sz="2000" b="1" dirty="0">
+              <a:rPr lang="en-US" sz="1200" b="1" dirty="0">
                 <a:solidFill>
                   <a:srgbClr val="D9534F"/>
                 </a:solidFill>
-                <a:latin typeface="Arial" pitchFamily="34" charset="0"/>
-                <a:ea typeface="Arial" pitchFamily="34" charset="-122"/>
-                <a:cs typeface="Arial" pitchFamily="34" charset="-120"/>
-              </a:rPr>
-              <a:t>Harbergerdriehoek</a:t>
-            </a:r>
-            <a:endParaRPr lang="en-US" sz="2000" dirty="0"/>
-          </a:p>
-        </p:txBody>
-      </p:sp>
-      <p:sp>
-        <p:nvSpPr>
-          <p:cNvPr id="8" name="Text 6"/>
-          <p:cNvSpPr/>
-          <p:nvPr/>
-        </p:nvSpPr>
-        <p:spPr>
-          <a:xfrm>
-            <a:off x="5943600" y="1554480"/>
-            <a:ext cx="2606040" cy="2971800"/>
-          </a:xfrm>
-          <a:prstGeom prst="rect">
-            <a:avLst/>
-          </a:prstGeom>
-          <a:noFill/>
-          <a:ln/>
-        </p:spPr>
-        <p:txBody>
-          <a:bodyPr wrap="square" rtlCol="0" anchor="t"/>
-          <a:lstStyle/>
-          <a:p>
-            <a:pPr algn="l" indent="0" marL="0">
-              <a:lnSpc>
-                <a:spcPct val="115000"/>
-              </a:lnSpc>
-              <a:buNone/>
-            </a:pPr>
-            <a:r>
-              <a:rPr lang="en-US" sz="1400" dirty="0">
+              </a:rPr>
+              <a:t>De driehoek C-B-A is surplus dat verdwijnt</a:t>
+            </a:r>
+            <a:pPr indent="0" marL="0">
+              <a:buNone/>
+            </a:pPr>
+            <a:r>
+              <a:rPr lang="en-US" sz="1100" dirty="0">
                 <a:solidFill>
                   <a:srgbClr val="2D3748"/>
                 </a:solidFill>
-                <a:latin typeface="Arial" pitchFamily="34" charset="0"/>
-                <a:ea typeface="Arial" pitchFamily="34" charset="-122"/>
-                <a:cs typeface="Arial" pitchFamily="34" charset="-120"/>
-              </a:rPr>
-              <a:t>Het driehoekige welvaartsverlies
-</a:t>
-            </a:r>
-            <a:pPr algn="l" indent="0" marL="0">
-              <a:lnSpc>
-                <a:spcPct val="115000"/>
-              </a:lnSpc>
-              <a:buNone/>
-            </a:pPr>
-            <a:r>
-              <a:rPr lang="en-US" sz="1300" dirty="0">
-                <a:solidFill>
-                  <a:srgbClr val="2D3748"/>
-                </a:solidFill>
-                <a:latin typeface="Arial" pitchFamily="34" charset="0"/>
-                <a:ea typeface="Arial" pitchFamily="34" charset="-122"/>
-                <a:cs typeface="Arial" pitchFamily="34" charset="-120"/>
-              </a:rPr>
-              <a:t>Transacties die niet plaatsvinden terwijl ze voor koper én verkoper voordelig zouden zijn
-</a:t>
-            </a:r>
-            <a:pPr algn="l" indent="0" marL="0">
-              <a:lnSpc>
-                <a:spcPct val="115000"/>
-              </a:lnSpc>
-              <a:buNone/>
-            </a:pPr>
-            <a:r>
-              <a:rPr lang="en-US" sz="1400" b="1" dirty="0">
-                <a:solidFill>
-                  <a:srgbClr val="D9534F"/>
-                </a:solidFill>
-                <a:latin typeface="Arial" pitchFamily="34" charset="0"/>
-                <a:ea typeface="Arial" pitchFamily="34" charset="-122"/>
-                <a:cs typeface="Arial" pitchFamily="34" charset="-120"/>
-              </a:rPr>
-              <a:t>= deadweight loss</a:t>
-            </a:r>
-            <a:endParaRPr lang="en-US" sz="1400" dirty="0"/>
+              </a:rPr>
+              <a:t> — niemand krijgt het. Het blauwe vlak is herverdeling (CS → PS), géén verlies.</a:t>
+            </a:r>
+            <a:endParaRPr lang="en-US" sz="1200" dirty="0"/>
           </a:p>
         </p:txBody>
       </p:sp>
@@ -5335,8 +4975,8 @@
         </p:nvSpPr>
         <p:spPr>
           <a:xfrm>
-            <a:off x="457200" y="1005840"/>
-            <a:ext cx="4114800" cy="457200"/>
+            <a:off x="457200" y="1051560"/>
+            <a:ext cx="3657600" cy="457200"/>
           </a:xfrm>
           <a:prstGeom prst="rect">
             <a:avLst>
@@ -5355,10 +4995,6 @@
             </a:outerShdw>
           </a:effectLst>
         </p:spPr>
-        <p:txBody>
-          <a:bodyPr/>
-          <a:p/>
-        </p:txBody>
       </p:sp>
       <p:sp>
         <p:nvSpPr>
@@ -5368,8 +5004,8 @@
         </p:nvSpPr>
         <p:spPr>
           <a:xfrm>
-            <a:off x="640080" y="1005840"/>
-            <a:ext cx="3749040" cy="457200"/>
+            <a:off x="640080" y="1051560"/>
+            <a:ext cx="3291840" cy="457200"/>
           </a:xfrm>
           <a:prstGeom prst="rect">
             <a:avLst/>
@@ -5407,8 +5043,8 @@
         </p:nvSpPr>
         <p:spPr>
           <a:xfrm>
-            <a:off x="457200" y="1463040"/>
-            <a:ext cx="4114800" cy="137160"/>
+            <a:off x="457200" y="1508760"/>
+            <a:ext cx="3657600" cy="182880"/>
           </a:xfrm>
           <a:prstGeom prst="rect">
             <a:avLst/>
@@ -5446,8 +5082,8 @@
         </p:nvSpPr>
         <p:spPr>
           <a:xfrm>
-            <a:off x="457200" y="1600200"/>
-            <a:ext cx="4114800" cy="457200"/>
+            <a:off x="457200" y="1691640"/>
+            <a:ext cx="3657600" cy="457200"/>
           </a:xfrm>
           <a:prstGeom prst="rect">
             <a:avLst>
@@ -5466,10 +5102,6 @@
             </a:outerShdw>
           </a:effectLst>
         </p:spPr>
-        <p:txBody>
-          <a:bodyPr/>
-          <a:p/>
-        </p:txBody>
       </p:sp>
       <p:sp>
         <p:nvSpPr>
@@ -5479,8 +5111,8 @@
         </p:nvSpPr>
         <p:spPr>
           <a:xfrm>
-            <a:off x="640080" y="1600200"/>
-            <a:ext cx="3749040" cy="457200"/>
+            <a:off x="640080" y="1691640"/>
+            <a:ext cx="3291840" cy="457200"/>
           </a:xfrm>
           <a:prstGeom prst="rect">
             <a:avLst/>
@@ -5518,8 +5150,8 @@
         </p:nvSpPr>
         <p:spPr>
           <a:xfrm>
-            <a:off x="457200" y="2057400"/>
-            <a:ext cx="4114800" cy="137160"/>
+            <a:off x="457200" y="2148840"/>
+            <a:ext cx="3657600" cy="182880"/>
           </a:xfrm>
           <a:prstGeom prst="rect">
             <a:avLst/>
@@ -5557,8 +5189,8 @@
         </p:nvSpPr>
         <p:spPr>
           <a:xfrm>
-            <a:off x="457200" y="2194560"/>
-            <a:ext cx="4114800" cy="457200"/>
+            <a:off x="457200" y="2331720"/>
+            <a:ext cx="3657600" cy="457200"/>
           </a:xfrm>
           <a:prstGeom prst="rect">
             <a:avLst>
@@ -5577,10 +5209,6 @@
             </a:outerShdw>
           </a:effectLst>
         </p:spPr>
-        <p:txBody>
-          <a:bodyPr/>
-          <a:p/>
-        </p:txBody>
       </p:sp>
       <p:sp>
         <p:nvSpPr>
@@ -5590,8 +5218,8 @@
         </p:nvSpPr>
         <p:spPr>
           <a:xfrm>
-            <a:off x="640080" y="2194560"/>
-            <a:ext cx="3749040" cy="457200"/>
+            <a:off x="640080" y="2331720"/>
+            <a:ext cx="3291840" cy="457200"/>
           </a:xfrm>
           <a:prstGeom prst="rect">
             <a:avLst/>
@@ -5629,8 +5257,8 @@
         </p:nvSpPr>
         <p:spPr>
           <a:xfrm>
-            <a:off x="457200" y="2651760"/>
-            <a:ext cx="4114800" cy="137160"/>
+            <a:off x="457200" y="2788920"/>
+            <a:ext cx="3657600" cy="182880"/>
           </a:xfrm>
           <a:prstGeom prst="rect">
             <a:avLst/>
@@ -5668,8 +5296,8 @@
         </p:nvSpPr>
         <p:spPr>
           <a:xfrm>
-            <a:off x="457200" y="2788920"/>
-            <a:ext cx="4114800" cy="457200"/>
+            <a:off x="457200" y="2971800"/>
+            <a:ext cx="3657600" cy="457200"/>
           </a:xfrm>
           <a:prstGeom prst="rect">
             <a:avLst>
@@ -5688,10 +5316,6 @@
             </a:outerShdw>
           </a:effectLst>
         </p:spPr>
-        <p:txBody>
-          <a:bodyPr/>
-          <a:p/>
-        </p:txBody>
       </p:sp>
       <p:sp>
         <p:nvSpPr>
@@ -5701,8 +5325,8 @@
         </p:nvSpPr>
         <p:spPr>
           <a:xfrm>
-            <a:off x="640080" y="2788920"/>
-            <a:ext cx="3749040" cy="457200"/>
+            <a:off x="640080" y="2971800"/>
+            <a:ext cx="3291840" cy="457200"/>
           </a:xfrm>
           <a:prstGeom prst="rect">
             <a:avLst/>
@@ -5740,12 +5364,12 @@
         </p:nvSpPr>
         <p:spPr>
           <a:xfrm>
-            <a:off x="4937760" y="1005840"/>
-            <a:ext cx="3749040" cy="3474720"/>
+            <a:off x="4754880" y="914400"/>
+            <a:ext cx="4114800" cy="3108960"/>
           </a:xfrm>
           <a:prstGeom prst="rect">
             <a:avLst>
-              <a:gd name="adj" fmla="val 1316"/>
+              <a:gd name="adj" fmla="val 1471"/>
             </a:avLst>
           </a:prstGeom>
           <a:solidFill>
@@ -5760,10 +5384,6 @@
             </a:outerShdw>
           </a:effectLst>
         </p:spPr>
-        <p:txBody>
-          <a:bodyPr/>
-          <a:p/>
-        </p:txBody>
       </p:sp>
       <p:sp>
         <p:nvSpPr>
@@ -5773,21 +5393,17 @@
         </p:nvSpPr>
         <p:spPr>
           <a:xfrm>
-            <a:off x="4937760" y="1005840"/>
-            <a:ext cx="54864" cy="3474720"/>
+            <a:off x="4754880" y="914400"/>
+            <a:ext cx="54864" cy="3108960"/>
           </a:xfrm>
           <a:prstGeom prst="rect">
             <a:avLst/>
           </a:prstGeom>
           <a:solidFill>
-            <a:srgbClr val="1A5276"/>
+            <a:srgbClr val="E67E22"/>
           </a:solidFill>
           <a:ln/>
         </p:spPr>
-        <p:txBody>
-          <a:bodyPr/>
-          <a:p/>
-        </p:txBody>
       </p:sp>
       <p:sp>
         <p:nvSpPr>
@@ -5797,8 +5413,8 @@
         </p:nvSpPr>
         <p:spPr>
           <a:xfrm>
-            <a:off x="5120640" y="1143000"/>
-            <a:ext cx="3429000" cy="365760"/>
+            <a:off x="4937760" y="1051560"/>
+            <a:ext cx="3794760" cy="365760"/>
           </a:xfrm>
           <a:prstGeom prst="rect">
             <a:avLst/>
@@ -5816,7 +5432,7 @@
             <a:r>
               <a:rPr lang="en-US" sz="2000" b="1" dirty="0">
                 <a:solidFill>
-                  <a:srgbClr val="1A5276"/>
+                  <a:srgbClr val="E67E22"/>
                 </a:solidFill>
                 <a:latin typeface="Arial" pitchFamily="34" charset="0"/>
                 <a:ea typeface="Arial" pitchFamily="34" charset="-122"/>
@@ -5836,8 +5452,8 @@
         </p:nvSpPr>
         <p:spPr>
           <a:xfrm>
-            <a:off x="5120640" y="1554480"/>
-            <a:ext cx="3429000" cy="2788920"/>
+            <a:off x="4937760" y="1463040"/>
+            <a:ext cx="3794760" cy="2423160"/>
           </a:xfrm>
           <a:prstGeom prst="rect">
             <a:avLst/>
@@ -5858,7 +5474,7 @@
             <a:r>
               <a:rPr lang="en-US" sz="1300" b="1" dirty="0">
                 <a:solidFill>
-                  <a:srgbClr val="718096"/>
+                  <a:srgbClr val="2D3748"/>
                 </a:solidFill>
                 <a:latin typeface="Arial" pitchFamily="34" charset="0"/>
                 <a:ea typeface="Arial" pitchFamily="34" charset="-122"/>
@@ -5874,13 +5490,13 @@
               <a:buNone/>
             </a:pPr>
             <a:r>
-              <a:rPr lang="en-US" sz="1400" dirty="0">
+              <a:rPr lang="en-US" sz="1300" dirty="0">
                 <a:solidFill>
                   <a:srgbClr val="2D3748"/>
                 </a:solidFill>
-                <a:latin typeface="Arial" pitchFamily="34" charset="0"/>
-                <a:ea typeface="Arial" pitchFamily="34" charset="-122"/>
-                <a:cs typeface="Arial" pitchFamily="34" charset="-120"/>
+                <a:latin typeface="Consolas" pitchFamily="34" charset="0"/>
+                <a:ea typeface="Consolas" pitchFamily="34" charset="-122"/>
+                <a:cs typeface="Consolas" pitchFamily="34" charset="-120"/>
               </a:rPr>
               <a:t>CS = 450 + PS = 450 = TS = 900
 </a:t>
@@ -5894,7 +5510,7 @@
             <a:r>
               <a:rPr lang="en-US" sz="1300" b="1" dirty="0">
                 <a:solidFill>
-                  <a:srgbClr val="718096"/>
+                  <a:srgbClr val="2D3748"/>
                 </a:solidFill>
                 <a:latin typeface="Arial" pitchFamily="34" charset="0"/>
                 <a:ea typeface="Arial" pitchFamily="34" charset="-122"/>
@@ -5910,13 +5526,13 @@
               <a:buNone/>
             </a:pPr>
             <a:r>
-              <a:rPr lang="en-US" sz="1400" dirty="0">
+              <a:rPr lang="en-US" sz="1300" dirty="0">
                 <a:solidFill>
                   <a:srgbClr val="2D3748"/>
                 </a:solidFill>
-                <a:latin typeface="Arial" pitchFamily="34" charset="0"/>
-                <a:ea typeface="Arial" pitchFamily="34" charset="-122"/>
-                <a:cs typeface="Arial" pitchFamily="34" charset="-120"/>
+                <a:latin typeface="Consolas" pitchFamily="34" charset="0"/>
+                <a:ea typeface="Consolas" pitchFamily="34" charset="-122"/>
+                <a:cs typeface="Consolas" pitchFamily="34" charset="-120"/>
               </a:rPr>
               <a:t>CS = 200 + PS = 600 = TS = 800
 </a:t>
@@ -5946,13 +5562,13 @@
               <a:buNone/>
             </a:pPr>
             <a:r>
-              <a:rPr lang="en-US" sz="1600" b="1" dirty="0">
+              <a:rPr lang="en-US" sz="1500" b="1" dirty="0">
                 <a:solidFill>
                   <a:srgbClr val="D9534F"/>
                 </a:solidFill>
-                <a:latin typeface="Arial" pitchFamily="34" charset="0"/>
-                <a:ea typeface="Arial" pitchFamily="34" charset="-122"/>
-                <a:cs typeface="Arial" pitchFamily="34" charset="-120"/>
+                <a:latin typeface="Consolas" pitchFamily="34" charset="0"/>
+                <a:ea typeface="Consolas" pitchFamily="34" charset="-122"/>
+                <a:cs typeface="Consolas" pitchFamily="34" charset="-120"/>
               </a:rPr>
               <a:t>900 − 800 = 100</a:t>
             </a:r>
@@ -5968,7 +5584,7 @@
         </p:nvSpPr>
         <p:spPr>
           <a:xfrm>
-            <a:off x="457200" y="4572000"/>
+            <a:off x="457200" y="4297680"/>
             <a:ext cx="8229600" cy="320040"/>
           </a:xfrm>
           <a:prstGeom prst="rect">
@@ -5985,7 +5601,7 @@
               <a:buNone/>
             </a:pPr>
             <a:r>
-              <a:rPr lang="en-US" sz="1200" i="1" dirty="0">
+              <a:rPr lang="en-US" sz="1300" i="1" dirty="0">
                 <a:solidFill>
                   <a:srgbClr val="718096"/>
                 </a:solidFill>
@@ -5995,7 +5611,7 @@
               </a:rPr>
               <a:t>De daling van het CS is groter dan de stijging van het PS → netto welvaartsverlies</a:t>
             </a:r>
-            <a:endParaRPr lang="en-US" sz="1200" dirty="0"/>
+            <a:endParaRPr lang="en-US" sz="1300" dirty="0"/>
           </a:p>
         </p:txBody>
       </p:sp>
@@ -6071,16 +5687,16 @@
         </p:nvSpPr>
         <p:spPr>
           <a:xfrm>
-            <a:off x="457200" y="1005840"/>
-            <a:ext cx="3931920" cy="2926080"/>
+            <a:off x="274320" y="914400"/>
+            <a:ext cx="4114800" cy="2377440"/>
           </a:xfrm>
           <a:prstGeom prst="rect">
             <a:avLst>
-              <a:gd name="adj" fmla="val 1563"/>
+              <a:gd name="adj" fmla="val 1923"/>
             </a:avLst>
           </a:prstGeom>
           <a:solidFill>
-            <a:srgbClr val="E8F8F0"/>
+            <a:srgbClr val="F9F6F1"/>
           </a:solidFill>
           <a:ln/>
           <a:effectLst>
@@ -6091,10 +5707,6 @@
             </a:outerShdw>
           </a:effectLst>
         </p:spPr>
-        <p:txBody>
-          <a:bodyPr/>
-          <a:p/>
-        </p:txBody>
       </p:sp>
       <p:sp>
         <p:nvSpPr>
@@ -6104,8 +5716,8 @@
         </p:nvSpPr>
         <p:spPr>
           <a:xfrm>
-            <a:off x="457200" y="1005840"/>
-            <a:ext cx="54864" cy="2926080"/>
+            <a:off x="274320" y="914400"/>
+            <a:ext cx="54864" cy="2377440"/>
           </a:xfrm>
           <a:prstGeom prst="rect">
             <a:avLst/>
@@ -6115,10 +5727,6 @@
           </a:solidFill>
           <a:ln/>
         </p:spPr>
-        <p:txBody>
-          <a:bodyPr/>
-          <a:p/>
-        </p:txBody>
       </p:sp>
       <p:sp>
         <p:nvSpPr>
@@ -6128,8 +5736,8 @@
         </p:nvSpPr>
         <p:spPr>
           <a:xfrm>
-            <a:off x="640080" y="1143000"/>
-            <a:ext cx="3611880" cy="365760"/>
+            <a:off x="457200" y="1051560"/>
+            <a:ext cx="3794760" cy="365760"/>
           </a:xfrm>
           <a:prstGeom prst="rect">
             <a:avLst/>
@@ -6167,8 +5775,8 @@
         </p:nvSpPr>
         <p:spPr>
           <a:xfrm>
-            <a:off x="640080" y="1554480"/>
-            <a:ext cx="3611880" cy="2240280"/>
+            <a:off x="457200" y="1463040"/>
+            <a:ext cx="3794760" cy="1691640"/>
           </a:xfrm>
           <a:prstGeom prst="rect">
             <a:avLst/>
@@ -6180,12 +5788,11 @@
           <a:bodyPr wrap="square" rtlCol="0" anchor="t"/>
           <a:lstStyle/>
           <a:p>
-            <a:pPr algn="l" marL="342900" indent="-342900">
+            <a:pPr algn="l" indent="0" marL="0">
               <a:lnSpc>
                 <a:spcPct val="115000"/>
               </a:lnSpc>
-              <a:buSzPct val="100000"/>
-              <a:buChar char="•"/>
+              <a:buNone/>
             </a:pPr>
             <a:r>
               <a:rPr lang="en-US" sz="1400" dirty="0">
@@ -6199,12 +5806,11 @@
               <a:t>TS is maximaal
 </a:t>
             </a:r>
-            <a:pPr algn="l" marL="342900" indent="-342900">
+            <a:pPr algn="l" indent="0" marL="0">
               <a:lnSpc>
                 <a:spcPct val="115000"/>
               </a:lnSpc>
-              <a:buSzPct val="100000"/>
-              <a:buChar char="•"/>
+              <a:buNone/>
             </a:pPr>
             <a:r>
               <a:rPr lang="en-US" sz="1400" dirty="0">
@@ -6218,12 +5824,11 @@
               <a:t>P = MK
 </a:t>
             </a:r>
-            <a:pPr algn="l" marL="342900" indent="-342900">
+            <a:pPr algn="l" indent="0" marL="0">
               <a:lnSpc>
                 <a:spcPct val="115000"/>
               </a:lnSpc>
-              <a:buSzPct val="100000"/>
-              <a:buChar char="•"/>
+              <a:buNone/>
             </a:pPr>
             <a:r>
               <a:rPr lang="en-US" sz="1400" dirty="0">
@@ -6237,12 +5842,11 @@
               <a:t>Geen welvaartsverlies
 </a:t>
             </a:r>
-            <a:pPr algn="l" marL="342900" indent="-342900">
+            <a:pPr algn="l" indent="0" marL="0">
               <a:lnSpc>
                 <a:spcPct val="115000"/>
               </a:lnSpc>
-              <a:buSzPct val="100000"/>
-              <a:buChar char="•"/>
+              <a:buNone/>
             </a:pPr>
             <a:r>
               <a:rPr lang="en-US" sz="1400" b="1" dirty="0">
@@ -6267,16 +5871,16 @@
         </p:nvSpPr>
         <p:spPr>
           <a:xfrm>
-            <a:off x="4754880" y="1005840"/>
-            <a:ext cx="3931920" cy="2926080"/>
+            <a:off x="4754880" y="914400"/>
+            <a:ext cx="4114800" cy="2377440"/>
           </a:xfrm>
           <a:prstGeom prst="rect">
             <a:avLst>
-              <a:gd name="adj" fmla="val 1563"/>
+              <a:gd name="adj" fmla="val 1923"/>
             </a:avLst>
           </a:prstGeom>
           <a:solidFill>
-            <a:srgbClr val="FDE8E8"/>
+            <a:srgbClr val="F9F6F1"/>
           </a:solidFill>
           <a:ln/>
           <a:effectLst>
@@ -6287,10 +5891,6 @@
             </a:outerShdw>
           </a:effectLst>
         </p:spPr>
-        <p:txBody>
-          <a:bodyPr/>
-          <a:p/>
-        </p:txBody>
       </p:sp>
       <p:sp>
         <p:nvSpPr>
@@ -6300,8 +5900,8 @@
         </p:nvSpPr>
         <p:spPr>
           <a:xfrm>
-            <a:off x="4754880" y="1005840"/>
-            <a:ext cx="54864" cy="2926080"/>
+            <a:off x="4754880" y="914400"/>
+            <a:ext cx="54864" cy="2377440"/>
           </a:xfrm>
           <a:prstGeom prst="rect">
             <a:avLst/>
@@ -6311,10 +5911,6 @@
           </a:solidFill>
           <a:ln/>
         </p:spPr>
-        <p:txBody>
-          <a:bodyPr/>
-          <a:p/>
-        </p:txBody>
       </p:sp>
       <p:sp>
         <p:nvSpPr>
@@ -6324,8 +5920,8 @@
         </p:nvSpPr>
         <p:spPr>
           <a:xfrm>
-            <a:off x="4937760" y="1143000"/>
-            <a:ext cx="3611880" cy="365760"/>
+            <a:off x="4937760" y="1051560"/>
+            <a:ext cx="3794760" cy="365760"/>
           </a:xfrm>
           <a:prstGeom prst="rect">
             <a:avLst/>
@@ -6363,8 +5959,8 @@
         </p:nvSpPr>
         <p:spPr>
           <a:xfrm>
-            <a:off x="4937760" y="1554480"/>
-            <a:ext cx="3611880" cy="2240280"/>
+            <a:off x="4937760" y="1463040"/>
+            <a:ext cx="3794760" cy="1691640"/>
           </a:xfrm>
           <a:prstGeom prst="rect">
             <a:avLst/>
@@ -6376,12 +5972,11 @@
           <a:bodyPr wrap="square" rtlCol="0" anchor="t"/>
           <a:lstStyle/>
           <a:p>
-            <a:pPr algn="l" marL="342900" indent="-342900">
+            <a:pPr algn="l" indent="0" marL="0">
               <a:lnSpc>
                 <a:spcPct val="115000"/>
               </a:lnSpc>
-              <a:buSzPct val="100000"/>
-              <a:buChar char="•"/>
+              <a:buNone/>
             </a:pPr>
             <a:r>
               <a:rPr lang="en-US" sz="1400" dirty="0">
@@ -6395,12 +5990,11 @@
               <a:t>TS is niet maximaal
 </a:t>
             </a:r>
-            <a:pPr algn="l" marL="342900" indent="-342900">
+            <a:pPr algn="l" indent="0" marL="0">
               <a:lnSpc>
                 <a:spcPct val="115000"/>
               </a:lnSpc>
-              <a:buSzPct val="100000"/>
-              <a:buChar char="•"/>
+              <a:buNone/>
             </a:pPr>
             <a:r>
               <a:rPr lang="en-US" sz="1400" dirty="0">
@@ -6414,12 +6008,11 @@
               <a:t>P &gt; MK (monopolist)
 </a:t>
             </a:r>
-            <a:pPr algn="l" marL="342900" indent="-342900">
+            <a:pPr algn="l" indent="0" marL="0">
               <a:lnSpc>
                 <a:spcPct val="115000"/>
               </a:lnSpc>
-              <a:buSzPct val="100000"/>
-              <a:buChar char="•"/>
+              <a:buNone/>
             </a:pPr>
             <a:r>
               <a:rPr lang="en-US" sz="1400" dirty="0">
@@ -6433,12 +6026,11 @@
               <a:t>Harbergerdriehoek &gt; 0
 </a:t>
             </a:r>
-            <a:pPr algn="l" marL="342900" indent="-342900">
+            <a:pPr algn="l" indent="0" marL="0">
               <a:lnSpc>
                 <a:spcPct val="115000"/>
               </a:lnSpc>
-              <a:buSzPct val="100000"/>
-              <a:buChar char="•"/>
+              <a:buNone/>
             </a:pPr>
             <a:r>
               <a:rPr lang="en-US" sz="1400" b="1" dirty="0">
@@ -6463,8 +6055,8 @@
         </p:nvSpPr>
         <p:spPr>
           <a:xfrm>
-            <a:off x="457200" y="4160520"/>
-            <a:ext cx="8229600" cy="365760"/>
+            <a:off x="457200" y="3657600"/>
+            <a:ext cx="8229600" cy="457200"/>
           </a:xfrm>
           <a:prstGeom prst="rect">
             <a:avLst/>
@@ -6480,9 +6072,9 @@
               <a:buNone/>
             </a:pPr>
             <a:r>
-              <a:rPr lang="en-US" sz="1300" i="1" dirty="0">
-                <a:solidFill>
-                  <a:srgbClr val="718096"/>
+              <a:rPr lang="en-US" sz="1500" b="1" dirty="0">
+                <a:solidFill>
+                  <a:srgbClr val="2D3748"/>
                 </a:solidFill>
                 <a:latin typeface="Arial" pitchFamily="34" charset="0"/>
                 <a:ea typeface="Arial" pitchFamily="34" charset="-122"/>
@@ -6490,7 +6082,7 @@
               </a:rPr>
               <a:t>Toets: vergelijk het TS met dat bij volkomen concurrentie</a:t>
             </a:r>
-            <a:endParaRPr lang="en-US" sz="1300" dirty="0"/>
+            <a:endParaRPr lang="en-US" sz="1500" dirty="0"/>
           </a:p>
         </p:txBody>
       </p:sp>
@@ -6566,12 +6158,12 @@
         </p:nvSpPr>
         <p:spPr>
           <a:xfrm>
-            <a:off x="914400" y="960120"/>
-            <a:ext cx="7315200" cy="411480"/>
+            <a:off x="1371600" y="1005840"/>
+            <a:ext cx="6400800" cy="457200"/>
           </a:xfrm>
           <a:prstGeom prst="rect">
             <a:avLst>
-              <a:gd name="adj" fmla="val 11111"/>
+              <a:gd name="adj" fmla="val 10000"/>
             </a:avLst>
           </a:prstGeom>
           <a:solidFill>
@@ -6586,10 +6178,6 @@
             </a:outerShdw>
           </a:effectLst>
         </p:spPr>
-        <p:txBody>
-          <a:bodyPr/>
-          <a:p/>
-        </p:txBody>
       </p:sp>
       <p:sp>
         <p:nvSpPr>
@@ -6599,8 +6187,8 @@
         </p:nvSpPr>
         <p:spPr>
           <a:xfrm>
-            <a:off x="1097280" y="960120"/>
-            <a:ext cx="6949440" cy="411480"/>
+            <a:off x="1645920" y="1005840"/>
+            <a:ext cx="5852160" cy="457200"/>
           </a:xfrm>
           <a:prstGeom prst="rect">
             <a:avLst/>
@@ -6616,7 +6204,7 @@
               <a:buNone/>
             </a:pPr>
             <a:r>
-              <a:rPr lang="en-US" sz="1400" dirty="0">
+              <a:rPr lang="en-US" sz="1500" dirty="0">
                 <a:solidFill>
                   <a:srgbClr val="2D3748"/>
                 </a:solidFill>
@@ -6626,63 +6214,63 @@
               </a:rPr>
               <a:t>Hoge toetredingsdrempels</a:t>
             </a:r>
+            <a:endParaRPr lang="en-US" sz="1500" dirty="0"/>
+          </a:p>
+        </p:txBody>
+      </p:sp>
+      <p:sp>
+        <p:nvSpPr>
+          <p:cNvPr id="5" name="Text 3"/>
+          <p:cNvSpPr/>
+          <p:nvPr/>
+        </p:nvSpPr>
+        <p:spPr>
+          <a:xfrm>
+            <a:off x="1371600" y="1463040"/>
+            <a:ext cx="6400800" cy="164592"/>
+          </a:xfrm>
+          <a:prstGeom prst="rect">
+            <a:avLst/>
+          </a:prstGeom>
+          <a:noFill/>
+          <a:ln/>
+        </p:spPr>
+        <p:txBody>
+          <a:bodyPr wrap="square" rtlCol="0" anchor="ctr"/>
+          <a:lstStyle/>
+          <a:p>
+            <a:pPr algn="ctr" indent="0" marL="0">
+              <a:buNone/>
+            </a:pPr>
+            <a:r>
+              <a:rPr lang="en-US" sz="1400" b="1" dirty="0">
+                <a:solidFill>
+                  <a:srgbClr val="1A5276"/>
+                </a:solidFill>
+                <a:latin typeface="Arial" pitchFamily="34" charset="0"/>
+                <a:ea typeface="Arial" pitchFamily="34" charset="-122"/>
+                <a:cs typeface="Arial" pitchFamily="34" charset="-120"/>
+              </a:rPr>
+              <a:t>↓</a:t>
+            </a:r>
             <a:endParaRPr lang="en-US" sz="1400" dirty="0"/>
           </a:p>
         </p:txBody>
       </p:sp>
       <p:sp>
         <p:nvSpPr>
-          <p:cNvPr id="5" name="Text 3"/>
-          <p:cNvSpPr/>
-          <p:nvPr/>
-        </p:nvSpPr>
-        <p:spPr>
-          <a:xfrm>
-            <a:off x="914400" y="1371600"/>
-            <a:ext cx="7315200" cy="109728"/>
-          </a:xfrm>
-          <a:prstGeom prst="rect">
-            <a:avLst/>
-          </a:prstGeom>
-          <a:noFill/>
-          <a:ln/>
-        </p:spPr>
-        <p:txBody>
-          <a:bodyPr wrap="square" rtlCol="0" anchor="ctr"/>
-          <a:lstStyle/>
-          <a:p>
-            <a:pPr algn="ctr" indent="0" marL="0">
-              <a:buNone/>
-            </a:pPr>
-            <a:r>
-              <a:rPr lang="en-US" sz="1200" b="1" dirty="0">
-                <a:solidFill>
-                  <a:srgbClr val="1A5276"/>
-                </a:solidFill>
-                <a:latin typeface="Arial" pitchFamily="34" charset="0"/>
-                <a:ea typeface="Arial" pitchFamily="34" charset="-122"/>
-                <a:cs typeface="Arial" pitchFamily="34" charset="-120"/>
-              </a:rPr>
-              <a:t>↓</a:t>
-            </a:r>
-            <a:endParaRPr lang="en-US" sz="1200" dirty="0"/>
-          </a:p>
-        </p:txBody>
-      </p:sp>
-      <p:sp>
-        <p:nvSpPr>
           <p:cNvPr id="6" name="Shape 4"/>
           <p:cNvSpPr/>
           <p:nvPr/>
         </p:nvSpPr>
         <p:spPr>
           <a:xfrm>
-            <a:off x="914400" y="1481328"/>
-            <a:ext cx="7315200" cy="411480"/>
+            <a:off x="1371600" y="1627632"/>
+            <a:ext cx="6400800" cy="457200"/>
           </a:xfrm>
           <a:prstGeom prst="rect">
             <a:avLst>
-              <a:gd name="adj" fmla="val 11111"/>
+              <a:gd name="adj" fmla="val 10000"/>
             </a:avLst>
           </a:prstGeom>
           <a:solidFill>
@@ -6697,10 +6285,6 @@
             </a:outerShdw>
           </a:effectLst>
         </p:spPr>
-        <p:txBody>
-          <a:bodyPr/>
-          <a:p/>
-        </p:txBody>
       </p:sp>
       <p:sp>
         <p:nvSpPr>
@@ -6710,8 +6294,8 @@
         </p:nvSpPr>
         <p:spPr>
           <a:xfrm>
-            <a:off x="1097280" y="1481328"/>
-            <a:ext cx="6949440" cy="411480"/>
+            <a:off x="1645920" y="1627632"/>
+            <a:ext cx="5852160" cy="457200"/>
           </a:xfrm>
           <a:prstGeom prst="rect">
             <a:avLst/>
@@ -6727,7 +6311,7 @@
               <a:buNone/>
             </a:pPr>
             <a:r>
-              <a:rPr lang="en-US" sz="1400" dirty="0">
+              <a:rPr lang="en-US" sz="1500" dirty="0">
                 <a:solidFill>
                   <a:srgbClr val="2D3748"/>
                 </a:solidFill>
@@ -6737,63 +6321,63 @@
               </a:rPr>
               <a:t>Weinig of geen nieuwe aanbieders</a:t>
             </a:r>
+            <a:endParaRPr lang="en-US" sz="1500" dirty="0"/>
+          </a:p>
+        </p:txBody>
+      </p:sp>
+      <p:sp>
+        <p:nvSpPr>
+          <p:cNvPr id="8" name="Text 6"/>
+          <p:cNvSpPr/>
+          <p:nvPr/>
+        </p:nvSpPr>
+        <p:spPr>
+          <a:xfrm>
+            <a:off x="1371600" y="2084832"/>
+            <a:ext cx="6400800" cy="164592"/>
+          </a:xfrm>
+          <a:prstGeom prst="rect">
+            <a:avLst/>
+          </a:prstGeom>
+          <a:noFill/>
+          <a:ln/>
+        </p:spPr>
+        <p:txBody>
+          <a:bodyPr wrap="square" rtlCol="0" anchor="ctr"/>
+          <a:lstStyle/>
+          <a:p>
+            <a:pPr algn="ctr" indent="0" marL="0">
+              <a:buNone/>
+            </a:pPr>
+            <a:r>
+              <a:rPr lang="en-US" sz="1400" b="1" dirty="0">
+                <a:solidFill>
+                  <a:srgbClr val="1A5276"/>
+                </a:solidFill>
+                <a:latin typeface="Arial" pitchFamily="34" charset="0"/>
+                <a:ea typeface="Arial" pitchFamily="34" charset="-122"/>
+                <a:cs typeface="Arial" pitchFamily="34" charset="-120"/>
+              </a:rPr>
+              <a:t>↓</a:t>
+            </a:r>
             <a:endParaRPr lang="en-US" sz="1400" dirty="0"/>
           </a:p>
         </p:txBody>
       </p:sp>
       <p:sp>
         <p:nvSpPr>
-          <p:cNvPr id="8" name="Text 6"/>
-          <p:cNvSpPr/>
-          <p:nvPr/>
-        </p:nvSpPr>
-        <p:spPr>
-          <a:xfrm>
-            <a:off x="914400" y="1892808"/>
-            <a:ext cx="7315200" cy="109728"/>
-          </a:xfrm>
-          <a:prstGeom prst="rect">
-            <a:avLst/>
-          </a:prstGeom>
-          <a:noFill/>
-          <a:ln/>
-        </p:spPr>
-        <p:txBody>
-          <a:bodyPr wrap="square" rtlCol="0" anchor="ctr"/>
-          <a:lstStyle/>
-          <a:p>
-            <a:pPr algn="ctr" indent="0" marL="0">
-              <a:buNone/>
-            </a:pPr>
-            <a:r>
-              <a:rPr lang="en-US" sz="1200" b="1" dirty="0">
-                <a:solidFill>
-                  <a:srgbClr val="1A5276"/>
-                </a:solidFill>
-                <a:latin typeface="Arial" pitchFamily="34" charset="0"/>
-                <a:ea typeface="Arial" pitchFamily="34" charset="-122"/>
-                <a:cs typeface="Arial" pitchFamily="34" charset="-120"/>
-              </a:rPr>
-              <a:t>↓</a:t>
-            </a:r>
-            <a:endParaRPr lang="en-US" sz="1200" dirty="0"/>
-          </a:p>
-        </p:txBody>
-      </p:sp>
-      <p:sp>
-        <p:nvSpPr>
           <p:cNvPr id="9" name="Shape 7"/>
           <p:cNvSpPr/>
           <p:nvPr/>
         </p:nvSpPr>
         <p:spPr>
           <a:xfrm>
-            <a:off x="914400" y="2002536"/>
-            <a:ext cx="7315200" cy="411480"/>
+            <a:off x="1371600" y="2249424"/>
+            <a:ext cx="6400800" cy="457200"/>
           </a:xfrm>
           <a:prstGeom prst="rect">
             <a:avLst>
-              <a:gd name="adj" fmla="val 11111"/>
+              <a:gd name="adj" fmla="val 10000"/>
             </a:avLst>
           </a:prstGeom>
           <a:solidFill>
@@ -6808,10 +6392,6 @@
             </a:outerShdw>
           </a:effectLst>
         </p:spPr>
-        <p:txBody>
-          <a:bodyPr/>
-          <a:p/>
-        </p:txBody>
       </p:sp>
       <p:sp>
         <p:nvSpPr>
@@ -6821,8 +6401,8 @@
         </p:nvSpPr>
         <p:spPr>
           <a:xfrm>
-            <a:off x="1097280" y="2002536"/>
-            <a:ext cx="6949440" cy="411480"/>
+            <a:off x="1645920" y="2249424"/>
+            <a:ext cx="5852160" cy="457200"/>
           </a:xfrm>
           <a:prstGeom prst="rect">
             <a:avLst/>
@@ -6838,7 +6418,7 @@
               <a:buNone/>
             </a:pPr>
             <a:r>
-              <a:rPr lang="en-US" sz="1400" dirty="0">
+              <a:rPr lang="en-US" sz="1500" dirty="0">
                 <a:solidFill>
                   <a:srgbClr val="2D3748"/>
                 </a:solidFill>
@@ -6848,63 +6428,63 @@
               </a:rPr>
               <a:t>Monopolist/oligopolist behoudt marktmacht</a:t>
             </a:r>
+            <a:endParaRPr lang="en-US" sz="1500" dirty="0"/>
+          </a:p>
+        </p:txBody>
+      </p:sp>
+      <p:sp>
+        <p:nvSpPr>
+          <p:cNvPr id="11" name="Text 9"/>
+          <p:cNvSpPr/>
+          <p:nvPr/>
+        </p:nvSpPr>
+        <p:spPr>
+          <a:xfrm>
+            <a:off x="1371600" y="2706624"/>
+            <a:ext cx="6400800" cy="164592"/>
+          </a:xfrm>
+          <a:prstGeom prst="rect">
+            <a:avLst/>
+          </a:prstGeom>
+          <a:noFill/>
+          <a:ln/>
+        </p:spPr>
+        <p:txBody>
+          <a:bodyPr wrap="square" rtlCol="0" anchor="ctr"/>
+          <a:lstStyle/>
+          <a:p>
+            <a:pPr algn="ctr" indent="0" marL="0">
+              <a:buNone/>
+            </a:pPr>
+            <a:r>
+              <a:rPr lang="en-US" sz="1400" b="1" dirty="0">
+                <a:solidFill>
+                  <a:srgbClr val="1A5276"/>
+                </a:solidFill>
+                <a:latin typeface="Arial" pitchFamily="34" charset="0"/>
+                <a:ea typeface="Arial" pitchFamily="34" charset="-122"/>
+                <a:cs typeface="Arial" pitchFamily="34" charset="-120"/>
+              </a:rPr>
+              <a:t>↓</a:t>
+            </a:r>
             <a:endParaRPr lang="en-US" sz="1400" dirty="0"/>
           </a:p>
         </p:txBody>
       </p:sp>
       <p:sp>
         <p:nvSpPr>
-          <p:cNvPr id="11" name="Text 9"/>
-          <p:cNvSpPr/>
-          <p:nvPr/>
-        </p:nvSpPr>
-        <p:spPr>
-          <a:xfrm>
-            <a:off x="914400" y="2414016"/>
-            <a:ext cx="7315200" cy="109728"/>
-          </a:xfrm>
-          <a:prstGeom prst="rect">
-            <a:avLst/>
-          </a:prstGeom>
-          <a:noFill/>
-          <a:ln/>
-        </p:spPr>
-        <p:txBody>
-          <a:bodyPr wrap="square" rtlCol="0" anchor="ctr"/>
-          <a:lstStyle/>
-          <a:p>
-            <a:pPr algn="ctr" indent="0" marL="0">
-              <a:buNone/>
-            </a:pPr>
-            <a:r>
-              <a:rPr lang="en-US" sz="1200" b="1" dirty="0">
-                <a:solidFill>
-                  <a:srgbClr val="1A5276"/>
-                </a:solidFill>
-                <a:latin typeface="Arial" pitchFamily="34" charset="0"/>
-                <a:ea typeface="Arial" pitchFamily="34" charset="-122"/>
-                <a:cs typeface="Arial" pitchFamily="34" charset="-120"/>
-              </a:rPr>
-              <a:t>↓</a:t>
-            </a:r>
-            <a:endParaRPr lang="en-US" sz="1200" dirty="0"/>
-          </a:p>
-        </p:txBody>
-      </p:sp>
-      <p:sp>
-        <p:nvSpPr>
           <p:cNvPr id="12" name="Shape 10"/>
           <p:cNvSpPr/>
           <p:nvPr/>
         </p:nvSpPr>
         <p:spPr>
           <a:xfrm>
-            <a:off x="914400" y="2523744"/>
-            <a:ext cx="7315200" cy="411480"/>
+            <a:off x="1371600" y="2871216"/>
+            <a:ext cx="6400800" cy="457200"/>
           </a:xfrm>
           <a:prstGeom prst="rect">
             <a:avLst>
-              <a:gd name="adj" fmla="val 11111"/>
+              <a:gd name="adj" fmla="val 10000"/>
             </a:avLst>
           </a:prstGeom>
           <a:solidFill>
@@ -6919,10 +6499,6 @@
             </a:outerShdw>
           </a:effectLst>
         </p:spPr>
-        <p:txBody>
-          <a:bodyPr/>
-          <a:p/>
-        </p:txBody>
       </p:sp>
       <p:sp>
         <p:nvSpPr>
@@ -6932,8 +6508,8 @@
         </p:nvSpPr>
         <p:spPr>
           <a:xfrm>
-            <a:off x="1097280" y="2523744"/>
-            <a:ext cx="6949440" cy="411480"/>
+            <a:off x="1645920" y="2871216"/>
+            <a:ext cx="5852160" cy="457200"/>
           </a:xfrm>
           <a:prstGeom prst="rect">
             <a:avLst/>
@@ -6949,7 +6525,7 @@
               <a:buNone/>
             </a:pPr>
             <a:r>
-              <a:rPr lang="en-US" sz="1400" dirty="0">
+              <a:rPr lang="en-US" sz="1500" dirty="0">
                 <a:solidFill>
                   <a:srgbClr val="2D3748"/>
                 </a:solidFill>
@@ -6959,63 +6535,63 @@
               </a:rPr>
               <a:t>P &gt; MK blijft bestaan</a:t>
             </a:r>
+            <a:endParaRPr lang="en-US" sz="1500" dirty="0"/>
+          </a:p>
+        </p:txBody>
+      </p:sp>
+      <p:sp>
+        <p:nvSpPr>
+          <p:cNvPr id="14" name="Text 12"/>
+          <p:cNvSpPr/>
+          <p:nvPr/>
+        </p:nvSpPr>
+        <p:spPr>
+          <a:xfrm>
+            <a:off x="1371600" y="3328416"/>
+            <a:ext cx="6400800" cy="164592"/>
+          </a:xfrm>
+          <a:prstGeom prst="rect">
+            <a:avLst/>
+          </a:prstGeom>
+          <a:noFill/>
+          <a:ln/>
+        </p:spPr>
+        <p:txBody>
+          <a:bodyPr wrap="square" rtlCol="0" anchor="ctr"/>
+          <a:lstStyle/>
+          <a:p>
+            <a:pPr algn="ctr" indent="0" marL="0">
+              <a:buNone/>
+            </a:pPr>
+            <a:r>
+              <a:rPr lang="en-US" sz="1400" b="1" dirty="0">
+                <a:solidFill>
+                  <a:srgbClr val="1A5276"/>
+                </a:solidFill>
+                <a:latin typeface="Arial" pitchFamily="34" charset="0"/>
+                <a:ea typeface="Arial" pitchFamily="34" charset="-122"/>
+                <a:cs typeface="Arial" pitchFamily="34" charset="-120"/>
+              </a:rPr>
+              <a:t>↓</a:t>
+            </a:r>
             <a:endParaRPr lang="en-US" sz="1400" dirty="0"/>
           </a:p>
         </p:txBody>
       </p:sp>
       <p:sp>
         <p:nvSpPr>
-          <p:cNvPr id="14" name="Text 12"/>
-          <p:cNvSpPr/>
-          <p:nvPr/>
-        </p:nvSpPr>
-        <p:spPr>
-          <a:xfrm>
-            <a:off x="914400" y="2935224"/>
-            <a:ext cx="7315200" cy="109728"/>
-          </a:xfrm>
-          <a:prstGeom prst="rect">
-            <a:avLst/>
-          </a:prstGeom>
-          <a:noFill/>
-          <a:ln/>
-        </p:spPr>
-        <p:txBody>
-          <a:bodyPr wrap="square" rtlCol="0" anchor="ctr"/>
-          <a:lstStyle/>
-          <a:p>
-            <a:pPr algn="ctr" indent="0" marL="0">
-              <a:buNone/>
-            </a:pPr>
-            <a:r>
-              <a:rPr lang="en-US" sz="1200" b="1" dirty="0">
-                <a:solidFill>
-                  <a:srgbClr val="1A5276"/>
-                </a:solidFill>
-                <a:latin typeface="Arial" pitchFamily="34" charset="0"/>
-                <a:ea typeface="Arial" pitchFamily="34" charset="-122"/>
-                <a:cs typeface="Arial" pitchFamily="34" charset="-120"/>
-              </a:rPr>
-              <a:t>↓</a:t>
-            </a:r>
-            <a:endParaRPr lang="en-US" sz="1200" dirty="0"/>
-          </a:p>
-        </p:txBody>
-      </p:sp>
-      <p:sp>
-        <p:nvSpPr>
           <p:cNvPr id="15" name="Shape 13"/>
           <p:cNvSpPr/>
           <p:nvPr/>
         </p:nvSpPr>
         <p:spPr>
           <a:xfrm>
-            <a:off x="914400" y="3044952"/>
-            <a:ext cx="7315200" cy="411480"/>
+            <a:off x="1371600" y="3493008"/>
+            <a:ext cx="6400800" cy="457200"/>
           </a:xfrm>
           <a:prstGeom prst="rect">
             <a:avLst>
-              <a:gd name="adj" fmla="val 11111"/>
+              <a:gd name="adj" fmla="val 10000"/>
             </a:avLst>
           </a:prstGeom>
           <a:solidFill>
@@ -7030,10 +6606,6 @@
             </a:outerShdw>
           </a:effectLst>
         </p:spPr>
-        <p:txBody>
-          <a:bodyPr/>
-          <a:p/>
-        </p:txBody>
       </p:sp>
       <p:sp>
         <p:nvSpPr>
@@ -7043,8 +6615,8 @@
         </p:nvSpPr>
         <p:spPr>
           <a:xfrm>
-            <a:off x="1097280" y="3044952"/>
-            <a:ext cx="6949440" cy="411480"/>
+            <a:off x="1645920" y="3493008"/>
+            <a:ext cx="5852160" cy="457200"/>
           </a:xfrm>
           <a:prstGeom prst="rect">
             <a:avLst/>
@@ -7060,7 +6632,7 @@
               <a:buNone/>
             </a:pPr>
             <a:r>
-              <a:rPr lang="en-US" sz="1400" b="1" dirty="0">
+              <a:rPr lang="en-US" sz="1500" b="1" dirty="0">
                 <a:solidFill>
                   <a:srgbClr val="FFFFFF"/>
                 </a:solidFill>
@@ -7070,7 +6642,7 @@
               </a:rPr>
               <a:t>Efficiëntieverlies blijft → Harbergerdriehoek</a:t>
             </a:r>
-            <a:endParaRPr lang="en-US" sz="1400" dirty="0"/>
+            <a:endParaRPr lang="en-US" sz="1500" dirty="0"/>
           </a:p>
         </p:txBody>
       </p:sp>
@@ -7082,8 +6654,8 @@
         </p:nvSpPr>
         <p:spPr>
           <a:xfrm>
-            <a:off x="457200" y="4480560"/>
-            <a:ext cx="8229600" cy="365760"/>
+            <a:off x="640080" y="4297680"/>
+            <a:ext cx="7863840" cy="320040"/>
           </a:xfrm>
           <a:prstGeom prst="rect">
             <a:avLst/>
@@ -7095,11 +6667,11 @@
           <a:bodyPr wrap="square" rtlCol="0" anchor="ctr"/>
           <a:lstStyle/>
           <a:p>
-            <a:pPr algn="l" indent="0" marL="0">
-              <a:buNone/>
-            </a:pPr>
-            <a:r>
-              <a:rPr lang="en-US" sz="1200" b="1" dirty="0">
+            <a:pPr indent="0" marL="0">
+              <a:buNone/>
+            </a:pPr>
+            <a:r>
+              <a:rPr lang="en-US" sz="1300" i="1" dirty="0">
                 <a:solidFill>
                   <a:srgbClr val="718096"/>
                 </a:solidFill>
@@ -7107,23 +6679,9 @@
                 <a:ea typeface="Arial" pitchFamily="34" charset="-122"/>
                 <a:cs typeface="Arial" pitchFamily="34" charset="-120"/>
               </a:rPr>
-              <a:t>Voorbeeld: </a:t>
-            </a:r>
-            <a:pPr algn="l" indent="0" marL="0">
-              <a:buNone/>
-            </a:pPr>
-            <a:r>
-              <a:rPr lang="en-US" sz="1200" dirty="0">
-                <a:solidFill>
-                  <a:srgbClr val="718096"/>
-                </a:solidFill>
-                <a:latin typeface="Arial" pitchFamily="34" charset="0"/>
-                <a:ea typeface="Arial" pitchFamily="34" charset="-122"/>
-                <a:cs typeface="Arial" pitchFamily="34" charset="-120"/>
-              </a:rPr>
-              <a:t>elektriciteitsmarkt — hoge kosten om toe te treden, P 25% boven GTK</a:t>
-            </a:r>
-            <a:endParaRPr lang="en-US" sz="1200" dirty="0"/>
+              <a:t>Voorbeeld: elektriciteitsmarkt — hoge kosten om toe te treden, P 25% boven GTK</a:t>
+            </a:r>
+            <a:endParaRPr lang="en-US" sz="1300" dirty="0"/>
           </a:p>
         </p:txBody>
       </p:sp>
@@ -7199,16 +6757,16 @@
         </p:nvSpPr>
         <p:spPr>
           <a:xfrm>
-            <a:off x="457200" y="1005840"/>
-            <a:ext cx="3931920" cy="3291840"/>
+            <a:off x="274320" y="914400"/>
+            <a:ext cx="4114800" cy="1828800"/>
           </a:xfrm>
           <a:prstGeom prst="rect">
             <a:avLst>
-              <a:gd name="adj" fmla="val 1389"/>
+              <a:gd name="adj" fmla="val 2500"/>
             </a:avLst>
           </a:prstGeom>
           <a:solidFill>
-            <a:srgbClr val="F3E8F9"/>
+            <a:srgbClr val="F9F6F1"/>
           </a:solidFill>
           <a:ln/>
           <a:effectLst>
@@ -7219,10 +6777,6 @@
             </a:outerShdw>
           </a:effectLst>
         </p:spPr>
-        <p:txBody>
-          <a:bodyPr/>
-          <a:p/>
-        </p:txBody>
       </p:sp>
       <p:sp>
         <p:nvSpPr>
@@ -7232,21 +6786,17 @@
         </p:nvSpPr>
         <p:spPr>
           <a:xfrm>
-            <a:off x="457200" y="1005840"/>
-            <a:ext cx="54864" cy="3291840"/>
+            <a:off x="274320" y="914400"/>
+            <a:ext cx="54864" cy="1828800"/>
           </a:xfrm>
           <a:prstGeom prst="rect">
             <a:avLst/>
           </a:prstGeom>
           <a:solidFill>
-            <a:srgbClr val="7B2D8E"/>
+            <a:srgbClr val="1A5276"/>
           </a:solidFill>
           <a:ln/>
         </p:spPr>
-        <p:txBody>
-          <a:bodyPr/>
-          <a:p/>
-        </p:txBody>
       </p:sp>
       <p:sp>
         <p:nvSpPr>
@@ -7256,8 +6806,8 @@
         </p:nvSpPr>
         <p:spPr>
           <a:xfrm>
-            <a:off x="640080" y="1143000"/>
-            <a:ext cx="3611880" cy="365760"/>
+            <a:off x="457200" y="1051560"/>
+            <a:ext cx="3794760" cy="365760"/>
           </a:xfrm>
           <a:prstGeom prst="rect">
             <a:avLst/>
@@ -7275,7 +6825,7 @@
             <a:r>
               <a:rPr lang="en-US" sz="2000" b="1" dirty="0">
                 <a:solidFill>
-                  <a:srgbClr val="7B2D8E"/>
+                  <a:srgbClr val="1A5276"/>
                 </a:solidFill>
                 <a:latin typeface="Arial" pitchFamily="34" charset="0"/>
                 <a:ea typeface="Arial" pitchFamily="34" charset="-122"/>
@@ -7295,8 +6845,8 @@
         </p:nvSpPr>
         <p:spPr>
           <a:xfrm>
-            <a:off x="640080" y="1554480"/>
-            <a:ext cx="3611880" cy="2606040"/>
+            <a:off x="457200" y="1463040"/>
+            <a:ext cx="3794760" cy="1143000"/>
           </a:xfrm>
           <a:prstGeom prst="rect">
             <a:avLst/>
@@ -7315,7 +6865,7 @@
               <a:buNone/>
             </a:pPr>
             <a:r>
-              <a:rPr lang="en-US" sz="1400" dirty="0">
+              <a:rPr lang="en-US" sz="1300" dirty="0">
                 <a:solidFill>
                   <a:srgbClr val="2D3748"/>
                 </a:solidFill>
@@ -7323,41 +6873,7 @@
                 <a:ea typeface="Arial" pitchFamily="34" charset="-122"/>
                 <a:cs typeface="Arial" pitchFamily="34" charset="-120"/>
               </a:rPr>
-              <a:t>Een situatie is Pareto-efficiënt als het </a:t>
-            </a:r>
-            <a:pPr algn="l" indent="0" marL="0">
-              <a:lnSpc>
-                <a:spcPct val="115000"/>
-              </a:lnSpc>
-              <a:buNone/>
-            </a:pPr>
-            <a:r>
-              <a:rPr lang="en-US" sz="1400" b="1" dirty="0">
-                <a:solidFill>
-                  <a:srgbClr val="7B2D8E"/>
-                </a:solidFill>
-                <a:latin typeface="Arial" pitchFamily="34" charset="0"/>
-                <a:ea typeface="Arial" pitchFamily="34" charset="-122"/>
-                <a:cs typeface="Arial" pitchFamily="34" charset="-120"/>
-              </a:rPr>
-              <a:t>niet mogelijk is</a:t>
-            </a:r>
-            <a:pPr algn="l" indent="0" marL="0">
-              <a:lnSpc>
-                <a:spcPct val="115000"/>
-              </a:lnSpc>
-              <a:buNone/>
-            </a:pPr>
-            <a:r>
-              <a:rPr lang="en-US" sz="1400" dirty="0">
-                <a:solidFill>
-                  <a:srgbClr val="2D3748"/>
-                </a:solidFill>
-                <a:latin typeface="Arial" pitchFamily="34" charset="0"/>
-                <a:ea typeface="Arial" pitchFamily="34" charset="-122"/>
-                <a:cs typeface="Arial" pitchFamily="34" charset="-120"/>
-              </a:rPr>
-              <a:t> om iemand erop vooruit te laten gaan zonder dat iemand anders erop achteruitgaat.</a:t>
+              <a:t>Een situatie is Pareto-efficiënt als het niet mogelijk is om iemand erop vooruit te laten gaan zonder dat iemand anders erop achteruitgaat.</a:t>
             </a:r>
             <a:endParaRPr lang="en-US" sz="1400" dirty="0"/>
           </a:p>
@@ -7371,16 +6887,16 @@
         </p:nvSpPr>
         <p:spPr>
           <a:xfrm>
-            <a:off x="4754880" y="1005840"/>
-            <a:ext cx="3931920" cy="3291840"/>
+            <a:off x="4754880" y="914400"/>
+            <a:ext cx="4114800" cy="1828800"/>
           </a:xfrm>
           <a:prstGeom prst="rect">
             <a:avLst>
-              <a:gd name="adj" fmla="val 1389"/>
+              <a:gd name="adj" fmla="val 2500"/>
             </a:avLst>
           </a:prstGeom>
           <a:solidFill>
-            <a:srgbClr val="E8F8F0"/>
+            <a:srgbClr val="F9F6F1"/>
           </a:solidFill>
           <a:ln/>
           <a:effectLst>
@@ -7391,10 +6907,6 @@
             </a:outerShdw>
           </a:effectLst>
         </p:spPr>
-        <p:txBody>
-          <a:bodyPr/>
-          <a:p/>
-        </p:txBody>
       </p:sp>
       <p:sp>
         <p:nvSpPr>
@@ -7404,8 +6916,8 @@
         </p:nvSpPr>
         <p:spPr>
           <a:xfrm>
-            <a:off x="4754880" y="1005840"/>
-            <a:ext cx="54864" cy="3291840"/>
+            <a:off x="4754880" y="914400"/>
+            <a:ext cx="54864" cy="1828800"/>
           </a:xfrm>
           <a:prstGeom prst="rect">
             <a:avLst/>
@@ -7415,10 +6927,6 @@
           </a:solidFill>
           <a:ln/>
         </p:spPr>
-        <p:txBody>
-          <a:bodyPr/>
-          <a:p/>
-        </p:txBody>
       </p:sp>
       <p:sp>
         <p:nvSpPr>
@@ -7428,8 +6936,8 @@
         </p:nvSpPr>
         <p:spPr>
           <a:xfrm>
-            <a:off x="4937760" y="1143000"/>
-            <a:ext cx="3611880" cy="365760"/>
+            <a:off x="4937760" y="1051560"/>
+            <a:ext cx="3794760" cy="365760"/>
           </a:xfrm>
           <a:prstGeom prst="rect">
             <a:avLst/>
@@ -7467,8 +6975,8 @@
         </p:nvSpPr>
         <p:spPr>
           <a:xfrm>
-            <a:off x="4937760" y="1554480"/>
-            <a:ext cx="3611880" cy="2606040"/>
+            <a:off x="4937760" y="1463040"/>
+            <a:ext cx="3794760" cy="1143000"/>
           </a:xfrm>
           <a:prstGeom prst="rect">
             <a:avLst/>
@@ -7487,7 +6995,7 @@
               <a:buNone/>
             </a:pPr>
             <a:r>
-              <a:rPr lang="en-US" sz="1400" dirty="0">
+              <a:rPr lang="en-US" sz="1300" dirty="0">
                 <a:solidFill>
                   <a:srgbClr val="2D3748"/>
                 </a:solidFill>
@@ -7495,8 +7003,160 @@
                 <a:ea typeface="Arial" pitchFamily="34" charset="-122"/>
                 <a:cs typeface="Arial" pitchFamily="34" charset="-120"/>
               </a:rPr>
-              <a:t>Een verandering waarbij </a:t>
-            </a:r>
+              <a:t>Een verandering waarbij minstens één persoon erop vooruitgaat en niemand erop achteruitgaat.</a:t>
+            </a:r>
+            <a:endParaRPr lang="en-US" sz="1400" dirty="0"/>
+          </a:p>
+        </p:txBody>
+      </p:sp>
+      <p:sp>
+        <p:nvSpPr>
+          <p:cNvPr id="11" name="Text 9"/>
+          <p:cNvSpPr/>
+          <p:nvPr/>
+        </p:nvSpPr>
+        <p:spPr>
+          <a:xfrm>
+            <a:off x="457200" y="3108960"/>
+            <a:ext cx="8229600" cy="457200"/>
+          </a:xfrm>
+          <a:prstGeom prst="rect">
+            <a:avLst/>
+          </a:prstGeom>
+          <a:noFill/>
+          <a:ln/>
+        </p:spPr>
+        <p:txBody>
+          <a:bodyPr wrap="square" rtlCol="0" anchor="ctr"/>
+          <a:lstStyle/>
+          <a:p>
+            <a:pPr algn="ctr" indent="0" marL="0">
+              <a:buNone/>
+            </a:pPr>
+            <a:r>
+              <a:rPr lang="en-US" sz="1500" b="1" dirty="0">
+                <a:solidFill>
+                  <a:srgbClr val="2D3748"/>
+                </a:solidFill>
+                <a:latin typeface="Arial" pitchFamily="34" charset="0"/>
+                <a:ea typeface="Arial" pitchFamily="34" charset="-122"/>
+                <a:cs typeface="Arial" pitchFamily="34" charset="-120"/>
+              </a:rPr>
+              <a:t>Als er géén Pareto-verbetering meer mogelijk is → de situatie is Pareto-efficiënt</a:t>
+            </a:r>
+            <a:endParaRPr lang="en-US" sz="1500" dirty="0"/>
+          </a:p>
+        </p:txBody>
+      </p:sp>
+      <p:sp>
+        <p:nvSpPr>
+          <p:cNvPr id="12" name="Shape 10"/>
+          <p:cNvSpPr/>
+          <p:nvPr/>
+        </p:nvSpPr>
+        <p:spPr>
+          <a:xfrm>
+            <a:off x="1371600" y="3657600"/>
+            <a:ext cx="6400800" cy="1097280"/>
+          </a:xfrm>
+          <a:prstGeom prst="rect">
+            <a:avLst>
+              <a:gd name="adj" fmla="val 4167"/>
+            </a:avLst>
+          </a:prstGeom>
+          <a:solidFill>
+            <a:srgbClr val="F9F6F1"/>
+          </a:solidFill>
+          <a:ln/>
+          <a:effectLst>
+            <a:outerShdw sx="100000" sy="100000" kx="0" ky="0" algn="bl" rotWithShape="0" blurRad="76200" dist="25400" dir="8100000">
+              <a:srgbClr val="000000">
+                <a:alpha val="10000"/>
+              </a:srgbClr>
+            </a:outerShdw>
+          </a:effectLst>
+        </p:spPr>
+      </p:sp>
+      <p:sp>
+        <p:nvSpPr>
+          <p:cNvPr id="13" name="Shape 11"/>
+          <p:cNvSpPr/>
+          <p:nvPr/>
+        </p:nvSpPr>
+        <p:spPr>
+          <a:xfrm>
+            <a:off x="1371600" y="3657600"/>
+            <a:ext cx="54864" cy="1097280"/>
+          </a:xfrm>
+          <a:prstGeom prst="rect">
+            <a:avLst/>
+          </a:prstGeom>
+          <a:solidFill>
+            <a:srgbClr val="E67E22"/>
+          </a:solidFill>
+          <a:ln/>
+        </p:spPr>
+      </p:sp>
+      <p:sp>
+        <p:nvSpPr>
+          <p:cNvPr id="14" name="Text 12"/>
+          <p:cNvSpPr/>
+          <p:nvPr/>
+        </p:nvSpPr>
+        <p:spPr>
+          <a:xfrm>
+            <a:off x="1554480" y="3794760"/>
+            <a:ext cx="6080760" cy="365760"/>
+          </a:xfrm>
+          <a:prstGeom prst="rect">
+            <a:avLst/>
+          </a:prstGeom>
+          <a:noFill/>
+          <a:ln/>
+        </p:spPr>
+        <p:txBody>
+          <a:bodyPr wrap="square" rtlCol="0" anchor="t"/>
+          <a:lstStyle/>
+          <a:p>
+            <a:pPr indent="0" marL="0">
+              <a:buNone/>
+            </a:pPr>
+            <a:r>
+              <a:rPr lang="en-US" sz="2000" b="1" dirty="0">
+                <a:solidFill>
+                  <a:srgbClr val="E67E22"/>
+                </a:solidFill>
+                <a:latin typeface="Arial" pitchFamily="34" charset="0"/>
+                <a:ea typeface="Arial" pitchFamily="34" charset="-122"/>
+                <a:cs typeface="Arial" pitchFamily="34" charset="-120"/>
+              </a:rPr>
+              <a:t>Voorbeeld: stoelruil</a:t>
+            </a:r>
+            <a:endParaRPr lang="en-US" sz="2000" dirty="0"/>
+          </a:p>
+        </p:txBody>
+      </p:sp>
+      <p:sp>
+        <p:nvSpPr>
+          <p:cNvPr id="15" name="Text 13"/>
+          <p:cNvSpPr/>
+          <p:nvPr/>
+        </p:nvSpPr>
+        <p:spPr>
+          <a:xfrm>
+            <a:off x="1554480" y="4206240"/>
+            <a:ext cx="6080760" cy="411480"/>
+          </a:xfrm>
+          <a:prstGeom prst="rect">
+            <a:avLst/>
+          </a:prstGeom>
+          <a:noFill/>
+          <a:ln/>
+        </p:spPr>
+        <p:txBody>
+          <a:bodyPr wrap="square" rtlCol="0" anchor="t"/>
+          <a:lstStyle/>
+          <a:p>
             <a:pPr algn="l" indent="0" marL="0">
               <a:lnSpc>
                 <a:spcPct val="115000"/>
@@ -7504,24 +7164,7 @@
               <a:buNone/>
             </a:pPr>
             <a:r>
-              <a:rPr lang="en-US" sz="1400" b="1" dirty="0">
-                <a:solidFill>
-                  <a:srgbClr val="1E8449"/>
-                </a:solidFill>
-                <a:latin typeface="Arial" pitchFamily="34" charset="0"/>
-                <a:ea typeface="Arial" pitchFamily="34" charset="-122"/>
-                <a:cs typeface="Arial" pitchFamily="34" charset="-120"/>
-              </a:rPr>
-              <a:t>minstens één persoon </a:t>
-            </a:r>
-            <a:pPr algn="l" indent="0" marL="0">
-              <a:lnSpc>
-                <a:spcPct val="115000"/>
-              </a:lnSpc>
-              <a:buNone/>
-            </a:pPr>
-            <a:r>
-              <a:rPr lang="en-US" sz="1400" dirty="0">
+              <a:rPr lang="en-US" sz="1200" dirty="0">
                 <a:solidFill>
                   <a:srgbClr val="2D3748"/>
                 </a:solidFill>
@@ -7529,82 +7172,9 @@
                 <a:ea typeface="Arial" pitchFamily="34" charset="-122"/>
                 <a:cs typeface="Arial" pitchFamily="34" charset="-120"/>
               </a:rPr>
-              <a:t>erop vooruitgaat en </a:t>
-            </a:r>
-            <a:pPr algn="l" indent="0" marL="0">
-              <a:lnSpc>
-                <a:spcPct val="115000"/>
-              </a:lnSpc>
-              <a:buNone/>
-            </a:pPr>
-            <a:r>
-              <a:rPr lang="en-US" sz="1400" b="1" dirty="0">
-                <a:solidFill>
-                  <a:srgbClr val="1E8449"/>
-                </a:solidFill>
-                <a:latin typeface="Arial" pitchFamily="34" charset="0"/>
-                <a:ea typeface="Arial" pitchFamily="34" charset="-122"/>
-                <a:cs typeface="Arial" pitchFamily="34" charset="-120"/>
-              </a:rPr>
-              <a:t>niemand </a:t>
-            </a:r>
-            <a:pPr algn="l" indent="0" marL="0">
-              <a:lnSpc>
-                <a:spcPct val="115000"/>
-              </a:lnSpc>
-              <a:buNone/>
-            </a:pPr>
-            <a:r>
-              <a:rPr lang="en-US" sz="1400" dirty="0">
-                <a:solidFill>
-                  <a:srgbClr val="2D3748"/>
-                </a:solidFill>
-                <a:latin typeface="Arial" pitchFamily="34" charset="0"/>
-                <a:ea typeface="Arial" pitchFamily="34" charset="-122"/>
-                <a:cs typeface="Arial" pitchFamily="34" charset="-120"/>
-              </a:rPr>
-              <a:t>erop achteruitgaat.</a:t>
+              <a:t>Esther zit vooraan, Mieke achteraan. Mieke wil graag vooraan, Esther maakt het niet uit. Ze wisselen: Mieke blij, Esther niet slechter af → Pareto-verbetering!</a:t>
             </a:r>
             <a:endParaRPr lang="en-US" sz="1400" dirty="0"/>
-          </a:p>
-        </p:txBody>
-      </p:sp>
-      <p:sp>
-        <p:nvSpPr>
-          <p:cNvPr id="11" name="Text 9"/>
-          <p:cNvSpPr/>
-          <p:nvPr/>
-        </p:nvSpPr>
-        <p:spPr>
-          <a:xfrm>
-            <a:off x="457200" y="4480560"/>
-            <a:ext cx="8229600" cy="365760"/>
-          </a:xfrm>
-          <a:prstGeom prst="rect">
-            <a:avLst/>
-          </a:prstGeom>
-          <a:noFill/>
-          <a:ln/>
-        </p:spPr>
-        <p:txBody>
-          <a:bodyPr wrap="square" rtlCol="0" anchor="ctr"/>
-          <a:lstStyle/>
-          <a:p>
-            <a:pPr algn="ctr" indent="0" marL="0">
-              <a:buNone/>
-            </a:pPr>
-            <a:r>
-              <a:rPr lang="en-US" sz="1300" b="1" i="1" dirty="0">
-                <a:solidFill>
-                  <a:srgbClr val="1A5276"/>
-                </a:solidFill>
-                <a:latin typeface="Arial" pitchFamily="34" charset="0"/>
-                <a:ea typeface="Arial" pitchFamily="34" charset="-122"/>
-                <a:cs typeface="Arial" pitchFamily="34" charset="-120"/>
-              </a:rPr>
-              <a:t>Als er géén Pareto-verbetering meer mogelijk is → de situatie is Pareto-efficiënt</a:t>
-            </a:r>
-            <a:endParaRPr lang="en-US" sz="1300" dirty="0"/>
           </a:p>
         </p:txBody>
       </p:sp>
